--- a/docs/Prahari_Pitch_Deck.pptx
+++ b/docs/Prahari_Pitch_Deck.pptx
@@ -15,9 +15,10 @@
     <p:sldId id="263" r:id="rId9"/>
     <p:sldId id="264" r:id="rId10"/>
     <p:sldId id="265" r:id="rId11"/>
+    <p:sldId id="266" r:id="rId12"/>
   </p:sldIdLst>
   <p:notesMasterIdLst>
-    <p:notesMasterId r:id="rId12"/>
+    <p:notesMasterId r:id="rId13"/>
   </p:notesMasterIdLst>
   <p:sldSz cx="12188952" cy="6858000"/>
   <p:notesSz cx="6858000" cy="12188952"/>
@@ -850,6 +851,94 @@
             <a:fld id="{F7021451-1387-4CA6-816F-3879F97B5CBC}" type="slidenum">
               <a:rPr lang="en-US"/>
               <a:t>10</a:t>
+            </a:fld>
+            <a:endParaRPr lang="en-US"/>
+          </a:p>
+        </p:txBody>
+      </p:sp>
+    </p:spTree>
+    <p:extLst>
+      <p:ext uri="{BB962C8B-B14F-4D97-AF65-F5344CB8AC3E}">
+        <p14:creationId xmlns:p14="http://schemas.microsoft.com/office/powerpoint/2010/main" val="1024086991"/>
+      </p:ext>
+    </p:extLst>
+  </p:cSld>
+  <p:clrMapOvr>
+    <a:masterClrMapping/>
+  </p:clrMapOvr>
+</p:notes>
+</file>
+
+<file path=ppt/notesSlides/notesSlide11.xml><?xml version="1.0" encoding="utf-8"?>
+<p:notes xmlns:a="http://schemas.openxmlformats.org/drawingml/2006/main" xmlns:r="http://schemas.openxmlformats.org/officeDocument/2006/relationships" xmlns:p="http://schemas.openxmlformats.org/presentationml/2006/main">
+  <p:cSld>
+    <p:spTree>
+      <p:nvGrpSpPr>
+        <p:cNvPr id="1" name=""/>
+        <p:cNvGrpSpPr/>
+        <p:nvPr/>
+      </p:nvGrpSpPr>
+      <p:grpSpPr>
+        <a:xfrm>
+          <a:off x="0" y="0"/>
+          <a:ext cx="0" cy="0"/>
+          <a:chOff x="0" y="0"/>
+          <a:chExt cx="0" cy="0"/>
+        </a:xfrm>
+      </p:grpSpPr>
+      <p:sp>
+        <p:nvSpPr>
+          <p:cNvPr id="2" name="Slide Image Placeholder 1"/>
+          <p:cNvSpPr>
+            <a:spLocks noGrp="1" noRot="1" noChangeAspect="1"/>
+          </p:cNvSpPr>
+          <p:nvPr>
+            <p:ph type="sldImg"/>
+          </p:nvPr>
+        </p:nvSpPr>
+        <p:spPr/>
+      </p:sp>
+      <p:sp>
+        <p:nvSpPr>
+          <p:cNvPr id="3" name="Notes Placeholder 2"/>
+          <p:cNvSpPr>
+            <a:spLocks noGrp="1"/>
+          </p:cNvSpPr>
+          <p:nvPr>
+            <p:ph type="body" idx="1"/>
+          </p:nvPr>
+        </p:nvSpPr>
+        <p:spPr/>
+        <p:txBody>
+          <a:bodyPr/>
+          <a:lstStyle/>
+          <a:p>
+            <a:r>
+              <a:rPr lang="en-US" dirty="0"/>
+              <a:t/>
+            </a:r>
+            <a:endParaRPr lang="en-US" dirty="0"/>
+          </a:p>
+        </p:txBody>
+      </p:sp>
+      <p:sp>
+        <p:nvSpPr>
+          <p:cNvPr id="4" name="Slide Number Placeholder 3"/>
+          <p:cNvSpPr>
+            <a:spLocks noGrp="1"/>
+          </p:cNvSpPr>
+          <p:nvPr>
+            <p:ph type="sldNum" sz="quarter" idx="10"/>
+          </p:nvPr>
+        </p:nvSpPr>
+        <p:spPr/>
+        <p:txBody>
+          <a:bodyPr/>
+          <a:lstStyle/>
+          <a:p>
+            <a:fld id="{F7021451-1387-4CA6-816F-3879F97B5CBC}" type="slidenum">
+              <a:rPr lang="en-US"/>
+              <a:t>11</a:t>
             </a:fld>
             <a:endParaRPr lang="en-US"/>
           </a:p>
@@ -2353,6 +2442,534 @@
       </p:grpSpPr>
       <p:sp>
         <p:nvSpPr>
+          <p:cNvPr id="2" name="Text 0"/>
+          <p:cNvSpPr/>
+          <p:nvPr/>
+        </p:nvSpPr>
+        <p:spPr>
+          <a:xfrm>
+            <a:off x="548640" y="457200"/>
+            <a:ext cx="10972800" cy="640080"/>
+          </a:xfrm>
+          <a:prstGeom prst="rect">
+            <a:avLst/>
+          </a:prstGeom>
+          <a:noFill/>
+          <a:ln/>
+        </p:spPr>
+        <p:txBody>
+          <a:bodyPr wrap="square" rtlCol="0" anchor="ctr"/>
+          <a:lstStyle/>
+          <a:p>
+            <a:pPr indent="0" marL="0">
+              <a:buNone/>
+            </a:pPr>
+            <a:r>
+              <a:rPr lang="en-US" sz="2800" b="1" dirty="0">
+                <a:solidFill>
+                  <a:srgbClr val="E6EDF6"/>
+                </a:solidFill>
+                <a:latin typeface="Cambria" pitchFamily="34" charset="0"/>
+                <a:ea typeface="Cambria" pitchFamily="34" charset="-122"/>
+                <a:cs typeface="Cambria" pitchFamily="34" charset="-120"/>
+              </a:rPr>
+              <a:t>Built today · production tomorrow</a:t>
+            </a:r>
+            <a:endParaRPr lang="en-US" sz="2800" dirty="0"/>
+          </a:p>
+        </p:txBody>
+      </p:sp>
+      <p:sp>
+        <p:nvSpPr>
+          <p:cNvPr id="3" name="Shape 1"/>
+          <p:cNvSpPr/>
+          <p:nvPr/>
+        </p:nvSpPr>
+        <p:spPr>
+          <a:xfrm>
+            <a:off x="548640" y="1463040"/>
+            <a:ext cx="5486400" cy="4114800"/>
+          </a:xfrm>
+          <a:prstGeom prst="roundRect">
+            <a:avLst>
+              <a:gd name="adj" fmla="val 1778"/>
+            </a:avLst>
+          </a:prstGeom>
+          <a:solidFill>
+            <a:srgbClr val="121826"/>
+          </a:solidFill>
+          <a:ln w="12700">
+            <a:solidFill>
+              <a:srgbClr val="1F2A3D"/>
+            </a:solidFill>
+            <a:prstDash val="solid"/>
+          </a:ln>
+          <a:effectLst>
+            <a:outerShdw sx="100000" sy="100000" kx="0" ky="0" algn="bl" rotWithShape="0" blurRad="88900" dist="38100" dir="5400000">
+              <a:srgbClr val="000000">
+                <a:alpha val="35000"/>
+              </a:srgbClr>
+            </a:outerShdw>
+          </a:effectLst>
+        </p:spPr>
+      </p:sp>
+      <p:sp>
+        <p:nvSpPr>
+          <p:cNvPr id="4" name="Text 2"/>
+          <p:cNvSpPr/>
+          <p:nvPr/>
+        </p:nvSpPr>
+        <p:spPr>
+          <a:xfrm>
+            <a:off x="777240" y="1645920"/>
+            <a:ext cx="5029200" cy="365760"/>
+          </a:xfrm>
+          <a:prstGeom prst="rect">
+            <a:avLst/>
+          </a:prstGeom>
+          <a:noFill/>
+          <a:ln/>
+        </p:spPr>
+        <p:txBody>
+          <a:bodyPr wrap="square" rtlCol="0" anchor="ctr"/>
+          <a:lstStyle/>
+          <a:p>
+            <a:pPr indent="0" marL="0">
+              <a:buNone/>
+            </a:pPr>
+            <a:r>
+              <a:rPr lang="en-US" sz="1600" b="1" dirty="0">
+                <a:solidFill>
+                  <a:srgbClr val="2ECC71"/>
+                </a:solidFill>
+                <a:latin typeface="Cambria" pitchFamily="34" charset="0"/>
+                <a:ea typeface="Cambria" pitchFamily="34" charset="-122"/>
+                <a:cs typeface="Cambria" pitchFamily="34" charset="-120"/>
+              </a:rPr>
+              <a:t>Working prototype (this build)</a:t>
+            </a:r>
+            <a:endParaRPr lang="en-US" sz="1600" dirty="0"/>
+          </a:p>
+        </p:txBody>
+      </p:sp>
+      <p:sp>
+        <p:nvSpPr>
+          <p:cNvPr id="5" name="Text 3"/>
+          <p:cNvSpPr/>
+          <p:nvPr/>
+        </p:nvSpPr>
+        <p:spPr>
+          <a:xfrm>
+            <a:off x="777240" y="2148840"/>
+            <a:ext cx="5029200" cy="3108960"/>
+          </a:xfrm>
+          <a:prstGeom prst="rect">
+            <a:avLst/>
+          </a:prstGeom>
+          <a:noFill/>
+          <a:ln/>
+        </p:spPr>
+        <p:txBody>
+          <a:bodyPr wrap="square" rtlCol="0" anchor="ctr"/>
+          <a:lstStyle/>
+          <a:p>
+            <a:pPr marL="342900" indent="-342900">
+              <a:spcAft>
+                <a:spcPts val="1000"/>
+              </a:spcAft>
+              <a:buSzPct val="100000"/>
+              <a:buChar char="•"/>
+            </a:pPr>
+            <a:r>
+              <a:rPr lang="en-US" sz="1300" dirty="0">
+                <a:solidFill>
+                  <a:srgbClr val="E6EDF6"/>
+                </a:solidFill>
+                <a:latin typeface="Calibri" pitchFamily="34" charset="0"/>
+                <a:ea typeface="Calibri" pitchFamily="34" charset="-122"/>
+                <a:cs typeface="Calibri" pitchFamily="34" charset="-120"/>
+              </a:rPr>
+              <a:t>FastAPI backend, 5 live modules, one command-centre UI.</a:t>
+            </a:r>
+            <a:endParaRPr lang="en-US" sz="1300" dirty="0"/>
+          </a:p>
+          <a:p>
+            <a:pPr marL="342900" indent="-342900">
+              <a:spcAft>
+                <a:spcPts val="1000"/>
+              </a:spcAft>
+              <a:buSzPct val="100000"/>
+              <a:buChar char="•"/>
+            </a:pPr>
+            <a:r>
+              <a:rPr lang="en-US" sz="1300" dirty="0">
+                <a:solidFill>
+                  <a:srgbClr val="E6EDF6"/>
+                </a:solidFill>
+                <a:latin typeface="Calibri" pitchFamily="34" charset="0"/>
+                <a:ea typeface="Calibri" pitchFamily="34" charset="-122"/>
+                <a:cs typeface="Calibri" pitchFamily="34" charset="-120"/>
+              </a:rPr>
+              <a:t>Explainable scam scorer + 7-feature note forensics (PIL/numpy).</a:t>
+            </a:r>
+            <a:endParaRPr lang="en-US" sz="1300" dirty="0"/>
+          </a:p>
+          <a:p>
+            <a:pPr marL="342900" indent="-342900">
+              <a:spcAft>
+                <a:spcPts val="1000"/>
+              </a:spcAft>
+              <a:buSzPct val="100000"/>
+              <a:buChar char="•"/>
+            </a:pPr>
+            <a:r>
+              <a:rPr lang="en-US" sz="1300" dirty="0">
+                <a:solidFill>
+                  <a:srgbClr val="E6EDF6"/>
+                </a:solidFill>
+                <a:latin typeface="Calibri" pitchFamily="34" charset="0"/>
+                <a:ea typeface="Calibri" pitchFamily="34" charset="-122"/>
+                <a:cs typeface="Calibri" pitchFamily="34" charset="-120"/>
+              </a:rPr>
+              <a:t>networkx graph engine with hashed intelligence packages.</a:t>
+            </a:r>
+            <a:endParaRPr lang="en-US" sz="1300" dirty="0"/>
+          </a:p>
+          <a:p>
+            <a:pPr marL="342900" indent="-342900">
+              <a:spcAft>
+                <a:spcPts val="1000"/>
+              </a:spcAft>
+              <a:buSzPct val="100000"/>
+              <a:buChar char="•"/>
+            </a:pPr>
+            <a:r>
+              <a:rPr lang="en-US" sz="1300" dirty="0">
+                <a:solidFill>
+                  <a:srgbClr val="E6EDF6"/>
+                </a:solidFill>
+                <a:latin typeface="Calibri" pitchFamily="34" charset="0"/>
+                <a:ea typeface="Calibri" pitchFamily="34" charset="-122"/>
+                <a:cs typeface="Calibri" pitchFamily="34" charset="-120"/>
+              </a:rPr>
+              <a:t>Leaflet command map + multilingual citizen chatbot.</a:t>
+            </a:r>
+            <a:endParaRPr lang="en-US" sz="1300" dirty="0"/>
+          </a:p>
+        </p:txBody>
+      </p:sp>
+      <p:sp>
+        <p:nvSpPr>
+          <p:cNvPr id="6" name="Shape 4"/>
+          <p:cNvSpPr/>
+          <p:nvPr/>
+        </p:nvSpPr>
+        <p:spPr>
+          <a:xfrm>
+            <a:off x="6263640" y="1463040"/>
+            <a:ext cx="5349240" cy="4114800"/>
+          </a:xfrm>
+          <a:prstGeom prst="roundRect">
+            <a:avLst>
+              <a:gd name="adj" fmla="val 1778"/>
+            </a:avLst>
+          </a:prstGeom>
+          <a:solidFill>
+            <a:srgbClr val="0F1420"/>
+          </a:solidFill>
+          <a:ln w="12700">
+            <a:solidFill>
+              <a:srgbClr val="1F2A3D"/>
+            </a:solidFill>
+            <a:prstDash val="solid"/>
+          </a:ln>
+          <a:effectLst>
+            <a:outerShdw sx="100000" sy="100000" kx="0" ky="0" algn="bl" rotWithShape="0" blurRad="88900" dist="38100" dir="5400000">
+              <a:srgbClr val="000000">
+                <a:alpha val="35000"/>
+              </a:srgbClr>
+            </a:outerShdw>
+          </a:effectLst>
+        </p:spPr>
+      </p:sp>
+      <p:sp>
+        <p:nvSpPr>
+          <p:cNvPr id="7" name="Text 5"/>
+          <p:cNvSpPr/>
+          <p:nvPr/>
+        </p:nvSpPr>
+        <p:spPr>
+          <a:xfrm>
+            <a:off x="6492240" y="1645920"/>
+            <a:ext cx="4937760" cy="365760"/>
+          </a:xfrm>
+          <a:prstGeom prst="rect">
+            <a:avLst/>
+          </a:prstGeom>
+          <a:noFill/>
+          <a:ln/>
+        </p:spPr>
+        <p:txBody>
+          <a:bodyPr wrap="square" rtlCol="0" anchor="ctr"/>
+          <a:lstStyle/>
+          <a:p>
+            <a:pPr indent="0" marL="0">
+              <a:buNone/>
+            </a:pPr>
+            <a:r>
+              <a:rPr lang="en-US" sz="1600" b="1" dirty="0">
+                <a:solidFill>
+                  <a:srgbClr val="3EA6FF"/>
+                </a:solidFill>
+                <a:latin typeface="Cambria" pitchFamily="34" charset="0"/>
+                <a:ea typeface="Cambria" pitchFamily="34" charset="-122"/>
+                <a:cs typeface="Cambria" pitchFamily="34" charset="-120"/>
+              </a:rPr>
+              <a:t>Production roadmap</a:t>
+            </a:r>
+            <a:endParaRPr lang="en-US" sz="1600" dirty="0"/>
+          </a:p>
+        </p:txBody>
+      </p:sp>
+      <p:sp>
+        <p:nvSpPr>
+          <p:cNvPr id="8" name="Text 6"/>
+          <p:cNvSpPr/>
+          <p:nvPr/>
+        </p:nvSpPr>
+        <p:spPr>
+          <a:xfrm>
+            <a:off x="6492240" y="2148840"/>
+            <a:ext cx="4937760" cy="3200400"/>
+          </a:xfrm>
+          <a:prstGeom prst="rect">
+            <a:avLst/>
+          </a:prstGeom>
+          <a:noFill/>
+          <a:ln/>
+        </p:spPr>
+        <p:txBody>
+          <a:bodyPr wrap="square" rtlCol="0" anchor="ctr"/>
+          <a:lstStyle/>
+          <a:p>
+            <a:pPr marL="342900" indent="-342900">
+              <a:spcAft>
+                <a:spcPts val="1000"/>
+              </a:spcAft>
+              <a:buSzPct val="100000"/>
+              <a:buChar char="•"/>
+            </a:pPr>
+            <a:r>
+              <a:rPr lang="en-US" sz="1300" dirty="0">
+                <a:solidFill>
+                  <a:srgbClr val="E6EDF6"/>
+                </a:solidFill>
+                <a:latin typeface="Calibri" pitchFamily="34" charset="0"/>
+                <a:ea typeface="Calibri" pitchFamily="34" charset="-122"/>
+                <a:cs typeface="Calibri" pitchFamily="34" charset="-120"/>
+              </a:rPr>
+              <a:t>Swap heuristics for fine-tuned models: transformer scam classifier, CNN/ViT per security ROI.</a:t>
+            </a:r>
+            <a:endParaRPr lang="en-US" sz="1300" dirty="0"/>
+          </a:p>
+          <a:p>
+            <a:pPr marL="342900" indent="-342900">
+              <a:spcAft>
+                <a:spcPts val="1000"/>
+              </a:spcAft>
+              <a:buSzPct val="100000"/>
+              <a:buChar char="•"/>
+            </a:pPr>
+            <a:r>
+              <a:rPr lang="en-US" sz="1300" dirty="0">
+                <a:solidFill>
+                  <a:srgbClr val="E6EDF6"/>
+                </a:solidFill>
+                <a:latin typeface="Calibri" pitchFamily="34" charset="0"/>
+                <a:ea typeface="Calibri" pitchFamily="34" charset="-122"/>
+                <a:cs typeface="Calibri" pitchFamily="34" charset="-120"/>
+              </a:rPr>
+              <a:t>Speech-AI front-end for live synthetic-voice detection.</a:t>
+            </a:r>
+            <a:endParaRPr lang="en-US" sz="1300" dirty="0"/>
+          </a:p>
+          <a:p>
+            <a:pPr marL="342900" indent="-342900">
+              <a:spcAft>
+                <a:spcPts val="1000"/>
+              </a:spcAft>
+              <a:buSzPct val="100000"/>
+              <a:buChar char="•"/>
+            </a:pPr>
+            <a:r>
+              <a:rPr lang="en-US" sz="1300" dirty="0">
+                <a:solidFill>
+                  <a:srgbClr val="E6EDF6"/>
+                </a:solidFill>
+                <a:latin typeface="Calibri" pitchFamily="34" charset="0"/>
+                <a:ea typeface="Calibri" pitchFamily="34" charset="-122"/>
+                <a:cs typeface="Calibri" pitchFamily="34" charset="-120"/>
+              </a:rPr>
+              <a:t>IndicTrans + LLM for full 12-language NLG.</a:t>
+            </a:r>
+            <a:endParaRPr lang="en-US" sz="1300" dirty="0"/>
+          </a:p>
+          <a:p>
+            <a:pPr marL="342900" indent="-342900">
+              <a:spcAft>
+                <a:spcPts val="1000"/>
+              </a:spcAft>
+              <a:buSzPct val="100000"/>
+              <a:buChar char="•"/>
+            </a:pPr>
+            <a:r>
+              <a:rPr lang="en-US" sz="1300" dirty="0">
+                <a:solidFill>
+                  <a:srgbClr val="E6EDF6"/>
+                </a:solidFill>
+                <a:latin typeface="Calibri" pitchFamily="34" charset="0"/>
+                <a:ea typeface="Calibri" pitchFamily="34" charset="-122"/>
+                <a:cs typeface="Calibri" pitchFamily="34" charset="-120"/>
+              </a:rPr>
+              <a:t>Real connectors: TSP CDR, NPCI/UPI, bank STR, NCRP/1930, I4C.</a:t>
+            </a:r>
+            <a:endParaRPr lang="en-US" sz="1300" dirty="0"/>
+          </a:p>
+          <a:p>
+            <a:pPr marL="342900" indent="-342900">
+              <a:spcAft>
+                <a:spcPts val="1000"/>
+              </a:spcAft>
+              <a:buSzPct val="100000"/>
+              <a:buChar char="•"/>
+            </a:pPr>
+            <a:r>
+              <a:rPr lang="en-US" sz="1300" dirty="0">
+                <a:solidFill>
+                  <a:srgbClr val="E6EDF6"/>
+                </a:solidFill>
+                <a:latin typeface="Calibri" pitchFamily="34" charset="0"/>
+                <a:ea typeface="Calibri" pitchFamily="34" charset="-122"/>
+                <a:cs typeface="Calibri" pitchFamily="34" charset="-120"/>
+              </a:rPr>
+              <a:t>PII tokenisation at ingest; signed append-only audit ledger.</a:t>
+            </a:r>
+            <a:endParaRPr lang="en-US" sz="1300" dirty="0"/>
+          </a:p>
+        </p:txBody>
+      </p:sp>
+      <p:sp>
+        <p:nvSpPr>
+          <p:cNvPr id="9" name="Text 7"/>
+          <p:cNvSpPr/>
+          <p:nvPr/>
+        </p:nvSpPr>
+        <p:spPr>
+          <a:xfrm>
+            <a:off x="457200" y="6473952"/>
+            <a:ext cx="7315200" cy="274320"/>
+          </a:xfrm>
+          <a:prstGeom prst="rect">
+            <a:avLst/>
+          </a:prstGeom>
+          <a:noFill/>
+          <a:ln/>
+        </p:spPr>
+        <p:txBody>
+          <a:bodyPr wrap="square" rtlCol="0" anchor="ctr"/>
+          <a:lstStyle/>
+          <a:p>
+            <a:pPr indent="0" marL="0">
+              <a:buNone/>
+            </a:pPr>
+            <a:r>
+              <a:rPr lang="en-US" sz="900" dirty="0">
+                <a:solidFill>
+                  <a:srgbClr val="8C9BB5"/>
+                </a:solidFill>
+                <a:latin typeface="Calibri" pitchFamily="34" charset="0"/>
+                <a:ea typeface="Calibri" pitchFamily="34" charset="-122"/>
+                <a:cs typeface="Calibri" pitchFamily="34" charset="-120"/>
+              </a:rPr>
+              <a:t>PRAHARI · Digital Public Safety Intelligence</a:t>
+            </a:r>
+            <a:endParaRPr lang="en-US" sz="900" dirty="0"/>
+          </a:p>
+        </p:txBody>
+      </p:sp>
+      <p:sp>
+        <p:nvSpPr>
+          <p:cNvPr id="10" name="Text 8"/>
+          <p:cNvSpPr/>
+          <p:nvPr/>
+        </p:nvSpPr>
+        <p:spPr>
+          <a:xfrm>
+            <a:off x="11274552" y="6473952"/>
+            <a:ext cx="457200" cy="274320"/>
+          </a:xfrm>
+          <a:prstGeom prst="rect">
+            <a:avLst/>
+          </a:prstGeom>
+          <a:noFill/>
+          <a:ln/>
+        </p:spPr>
+        <p:txBody>
+          <a:bodyPr wrap="square" rtlCol="0" anchor="ctr"/>
+          <a:lstStyle/>
+          <a:p>
+            <a:pPr algn="r" indent="0" marL="0">
+              <a:buNone/>
+            </a:pPr>
+            <a:r>
+              <a:rPr lang="en-US" sz="900" dirty="0">
+                <a:solidFill>
+                  <a:srgbClr val="8C9BB5"/>
+                </a:solidFill>
+                <a:latin typeface="Calibri" pitchFamily="34" charset="0"/>
+                <a:ea typeface="Calibri" pitchFamily="34" charset="-122"/>
+                <a:cs typeface="Calibri" pitchFamily="34" charset="-120"/>
+              </a:rPr>
+              <a:t>10</a:t>
+            </a:r>
+            <a:endParaRPr lang="en-US" sz="900" dirty="0"/>
+          </a:p>
+        </p:txBody>
+      </p:sp>
+    </p:spTree>
+  </p:cSld>
+  <p:clrMapOvr>
+    <a:masterClrMapping/>
+  </p:clrMapOvr>
+</p:sld>
+</file>
+
+<file path=ppt/slides/slide11.xml><?xml version="1.0" encoding="utf-8"?>
+<p:sld xmlns:a="http://schemas.openxmlformats.org/drawingml/2006/main" xmlns:r="http://schemas.openxmlformats.org/officeDocument/2006/relationships" xmlns:p="http://schemas.openxmlformats.org/presentationml/2006/main">
+  <p:cSld name="Slide 11">
+    <p:bg>
+      <p:bgPr>
+        <a:solidFill>
+          <a:srgbClr val="0A0E17"/>
+        </a:solidFill>
+      </p:bgPr>
+    </p:bg>
+    <p:spTree>
+      <p:nvGrpSpPr>
+        <p:cNvPr id="1" name=""/>
+        <p:cNvGrpSpPr/>
+        <p:nvPr/>
+      </p:nvGrpSpPr>
+      <p:grpSpPr>
+        <a:xfrm>
+          <a:off x="0" y="0"/>
+          <a:ext cx="0" cy="0"/>
+          <a:chOff x="0" y="0"/>
+          <a:chExt cx="0" cy="0"/>
+        </a:xfrm>
+      </p:grpSpPr>
+      <p:sp>
+        <p:nvSpPr>
           <p:cNvPr id="2" name="Shape 0"/>
           <p:cNvSpPr/>
           <p:nvPr/>
@@ -4493,7 +5110,7 @@
       </p:sp>
       <p:pic>
         <p:nvPicPr>
-          <p:cNvPr id="3" name="Image 0" descr="/Users/swapnalatha/Desktop/AI for Digital Public Safety- Defeating Counterfeiting, Fraud &amp; Digital Arrest Scams/prahari/docs/architecture.png">    </p:cNvPr>
+          <p:cNvPr id="3" name="Image 0" descr="/Users/swapnalatha/Desktop/AI for Digital Public Safety- Defeating Counterfeiting, Fraud &amp; Digital Arrest Scams/docs/architecture.png">    </p:cNvPr>
           <p:cNvPicPr>
             <a:picLocks noChangeAspect="1"/>
           </p:cNvPicPr>
@@ -7772,7 +8389,7 @@
                 <a:ea typeface="Cambria" pitchFamily="34" charset="-122"/>
                 <a:cs typeface="Cambria" pitchFamily="34" charset="-120"/>
               </a:rPr>
-              <a:t>Impact &amp; alignment to judging criteria</a:t>
+              <a:t>Measured performance — not just a demo</a:t>
             </a:r>
             <a:endParaRPr lang="en-US" sz="2800" dirty="0"/>
           </a:p>
@@ -7780,18 +8397,57 @@
       </p:sp>
       <p:sp>
         <p:nvSpPr>
-          <p:cNvPr id="3" name="Shape 1"/>
-          <p:cNvSpPr/>
-          <p:nvPr/>
-        </p:nvSpPr>
-        <p:spPr>
-          <a:xfrm>
-            <a:off x="548640" y="1463040"/>
-            <a:ext cx="11064240" cy="731520"/>
+          <p:cNvPr id="3" name="Text 1"/>
+          <p:cNvSpPr/>
+          <p:nvPr/>
+        </p:nvSpPr>
+        <p:spPr>
+          <a:xfrm>
+            <a:off x="548640" y="1051560"/>
+            <a:ext cx="10972800" cy="365760"/>
+          </a:xfrm>
+          <a:prstGeom prst="rect">
+            <a:avLst/>
+          </a:prstGeom>
+          <a:noFill/>
+          <a:ln/>
+        </p:spPr>
+        <p:txBody>
+          <a:bodyPr wrap="square" rtlCol="0" anchor="ctr"/>
+          <a:lstStyle/>
+          <a:p>
+            <a:pPr indent="0" marL="0">
+              <a:buNone/>
+            </a:pPr>
+            <a:r>
+              <a:rPr lang="en-US" sz="1300" i="1" dirty="0">
+                <a:solidFill>
+                  <a:srgbClr val="3EA6FF"/>
+                </a:solidFill>
+                <a:latin typeface="Calibri" pitchFamily="34" charset="0"/>
+                <a:ea typeface="Calibri" pitchFamily="34" charset="-122"/>
+                <a:cs typeface="Calibri" pitchFamily="34" charset="-120"/>
+              </a:rPr>
+              <a:t>Scam classifier benchmarked live against realistic scam + benign messages (incl. hard negatives). Computed on every run — nothing pre-baked.</a:t>
+            </a:r>
+            <a:endParaRPr lang="en-US" sz="1300" dirty="0"/>
+          </a:p>
+        </p:txBody>
+      </p:sp>
+      <p:sp>
+        <p:nvSpPr>
+          <p:cNvPr id="4" name="Shape 2"/>
+          <p:cNvSpPr/>
+          <p:nvPr/>
+        </p:nvSpPr>
+        <p:spPr>
+          <a:xfrm>
+            <a:off x="548640" y="1600200"/>
+            <a:ext cx="2057400" cy="1371600"/>
           </a:xfrm>
           <a:prstGeom prst="roundRect">
             <a:avLst>
-              <a:gd name="adj" fmla="val 10000"/>
+              <a:gd name="adj" fmla="val 5333"/>
             </a:avLst>
           </a:prstGeom>
           <a:solidFill>
@@ -7814,96 +8470,773 @@
       </p:sp>
       <p:sp>
         <p:nvSpPr>
-          <p:cNvPr id="4" name="Text 2"/>
-          <p:cNvSpPr/>
-          <p:nvPr/>
-        </p:nvSpPr>
-        <p:spPr>
-          <a:xfrm>
-            <a:off x="777240" y="1463040"/>
-            <a:ext cx="3291840" cy="731520"/>
-          </a:xfrm>
-          <a:prstGeom prst="rect">
-            <a:avLst/>
-          </a:prstGeom>
-          <a:noFill/>
-          <a:ln/>
-        </p:spPr>
-        <p:txBody>
-          <a:bodyPr wrap="square" rtlCol="0" anchor="ctr"/>
-          <a:lstStyle/>
-          <a:p>
-            <a:pPr indent="0" marL="0">
-              <a:buNone/>
-            </a:pPr>
-            <a:r>
-              <a:rPr lang="en-US" sz="1450" b="1" dirty="0">
-                <a:solidFill>
-                  <a:srgbClr val="3EA6FF"/>
+          <p:cNvPr id="5" name="Text 3"/>
+          <p:cNvSpPr/>
+          <p:nvPr/>
+        </p:nvSpPr>
+        <p:spPr>
+          <a:xfrm>
+            <a:off x="548640" y="1783080"/>
+            <a:ext cx="2057400" cy="640080"/>
+          </a:xfrm>
+          <a:prstGeom prst="rect">
+            <a:avLst/>
+          </a:prstGeom>
+          <a:noFill/>
+          <a:ln/>
+        </p:spPr>
+        <p:txBody>
+          <a:bodyPr wrap="square" rtlCol="0" anchor="ctr"/>
+          <a:lstStyle/>
+          <a:p>
+            <a:pPr algn="ctr" indent="0" marL="0">
+              <a:buNone/>
+            </a:pPr>
+            <a:r>
+              <a:rPr lang="en-US" sz="3000" b="1" dirty="0">
+                <a:solidFill>
+                  <a:srgbClr val="2ECC71"/>
                 </a:solidFill>
                 <a:latin typeface="Cambria" pitchFamily="34" charset="0"/>
                 <a:ea typeface="Cambria" pitchFamily="34" charset="-122"/>
                 <a:cs typeface="Cambria" pitchFamily="34" charset="-120"/>
               </a:rPr>
-              <a:t>Innovation (25%)</a:t>
-            </a:r>
-            <a:endParaRPr lang="en-US" sz="1450" dirty="0"/>
-          </a:p>
-        </p:txBody>
-      </p:sp>
-      <p:sp>
-        <p:nvSpPr>
-          <p:cNvPr id="5" name="Text 3"/>
-          <p:cNvSpPr/>
-          <p:nvPr/>
-        </p:nvSpPr>
-        <p:spPr>
-          <a:xfrm>
-            <a:off x="4114800" y="1463040"/>
-            <a:ext cx="7315200" cy="731520"/>
-          </a:xfrm>
-          <a:prstGeom prst="rect">
-            <a:avLst/>
-          </a:prstGeom>
-          <a:noFill/>
-          <a:ln/>
-        </p:spPr>
-        <p:txBody>
-          <a:bodyPr wrap="square" rtlCol="0" anchor="ctr"/>
-          <a:lstStyle/>
-          <a:p>
-            <a:pPr indent="0" marL="0">
-              <a:buNone/>
-            </a:pPr>
-            <a:r>
-              <a:rPr lang="en-US" sz="1300" dirty="0">
-                <a:solidFill>
-                  <a:srgbClr val="E6EDF6"/>
-                </a:solidFill>
-                <a:latin typeface="Calibri" pitchFamily="34" charset="0"/>
-                <a:ea typeface="Calibri" pitchFamily="34" charset="-122"/>
-                <a:cs typeface="Calibri" pitchFamily="34" charset="-120"/>
-              </a:rPr>
-              <a:t>Kill-chain scam modelling + lead-time KPI + cross-domain entity fusion.</a:t>
-            </a:r>
-            <a:endParaRPr lang="en-US" sz="1300" dirty="0"/>
-          </a:p>
-        </p:txBody>
-      </p:sp>
-      <p:sp>
-        <p:nvSpPr>
-          <p:cNvPr id="6" name="Shape 4"/>
-          <p:cNvSpPr/>
-          <p:nvPr/>
-        </p:nvSpPr>
-        <p:spPr>
-          <a:xfrm>
-            <a:off x="548640" y="2304288"/>
-            <a:ext cx="11064240" cy="731520"/>
+              <a:t>100%</a:t>
+            </a:r>
+            <a:endParaRPr lang="en-US" sz="3000" dirty="0"/>
+          </a:p>
+        </p:txBody>
+      </p:sp>
+      <p:sp>
+        <p:nvSpPr>
+          <p:cNvPr id="6" name="Text 4"/>
+          <p:cNvSpPr/>
+          <p:nvPr/>
+        </p:nvSpPr>
+        <p:spPr>
+          <a:xfrm>
+            <a:off x="548640" y="2423160"/>
+            <a:ext cx="2057400" cy="365760"/>
+          </a:xfrm>
+          <a:prstGeom prst="rect">
+            <a:avLst/>
+          </a:prstGeom>
+          <a:noFill/>
+          <a:ln/>
+        </p:spPr>
+        <p:txBody>
+          <a:bodyPr wrap="square" rtlCol="0" anchor="ctr"/>
+          <a:lstStyle/>
+          <a:p>
+            <a:pPr algn="ctr" indent="0" marL="0">
+              <a:buNone/>
+            </a:pPr>
+            <a:r>
+              <a:rPr lang="en-US" sz="1150" dirty="0">
+                <a:solidFill>
+                  <a:srgbClr val="8C9BB5"/>
+                </a:solidFill>
+                <a:latin typeface="Calibri" pitchFamily="34" charset="0"/>
+                <a:ea typeface="Calibri" pitchFamily="34" charset="-122"/>
+                <a:cs typeface="Calibri" pitchFamily="34" charset="-120"/>
+              </a:rPr>
+              <a:t>Precision</a:t>
+            </a:r>
+            <a:endParaRPr lang="en-US" sz="1150" dirty="0"/>
+          </a:p>
+        </p:txBody>
+      </p:sp>
+      <p:sp>
+        <p:nvSpPr>
+          <p:cNvPr id="7" name="Shape 5"/>
+          <p:cNvSpPr/>
+          <p:nvPr/>
+        </p:nvSpPr>
+        <p:spPr>
+          <a:xfrm>
+            <a:off x="2788920" y="1600200"/>
+            <a:ext cx="2057400" cy="1371600"/>
           </a:xfrm>
           <a:prstGeom prst="roundRect">
             <a:avLst>
-              <a:gd name="adj" fmla="val 10000"/>
+              <a:gd name="adj" fmla="val 5333"/>
+            </a:avLst>
+          </a:prstGeom>
+          <a:solidFill>
+            <a:srgbClr val="121826"/>
+          </a:solidFill>
+          <a:ln w="12700">
+            <a:solidFill>
+              <a:srgbClr val="1F2A3D"/>
+            </a:solidFill>
+            <a:prstDash val="solid"/>
+          </a:ln>
+          <a:effectLst>
+            <a:outerShdw sx="100000" sy="100000" kx="0" ky="0" algn="bl" rotWithShape="0" blurRad="88900" dist="38100" dir="5400000">
+              <a:srgbClr val="000000">
+                <a:alpha val="35000"/>
+              </a:srgbClr>
+            </a:outerShdw>
+          </a:effectLst>
+        </p:spPr>
+      </p:sp>
+      <p:sp>
+        <p:nvSpPr>
+          <p:cNvPr id="8" name="Text 6"/>
+          <p:cNvSpPr/>
+          <p:nvPr/>
+        </p:nvSpPr>
+        <p:spPr>
+          <a:xfrm>
+            <a:off x="2788920" y="1783080"/>
+            <a:ext cx="2057400" cy="640080"/>
+          </a:xfrm>
+          <a:prstGeom prst="rect">
+            <a:avLst/>
+          </a:prstGeom>
+          <a:noFill/>
+          <a:ln/>
+        </p:spPr>
+        <p:txBody>
+          <a:bodyPr wrap="square" rtlCol="0" anchor="ctr"/>
+          <a:lstStyle/>
+          <a:p>
+            <a:pPr algn="ctr" indent="0" marL="0">
+              <a:buNone/>
+            </a:pPr>
+            <a:r>
+              <a:rPr lang="en-US" sz="3000" b="1" dirty="0">
+                <a:solidFill>
+                  <a:srgbClr val="2ECC71"/>
+                </a:solidFill>
+                <a:latin typeface="Cambria" pitchFamily="34" charset="0"/>
+                <a:ea typeface="Cambria" pitchFamily="34" charset="-122"/>
+                <a:cs typeface="Cambria" pitchFamily="34" charset="-120"/>
+              </a:rPr>
+              <a:t>92.3%</a:t>
+            </a:r>
+            <a:endParaRPr lang="en-US" sz="3000" dirty="0"/>
+          </a:p>
+        </p:txBody>
+      </p:sp>
+      <p:sp>
+        <p:nvSpPr>
+          <p:cNvPr id="9" name="Text 7"/>
+          <p:cNvSpPr/>
+          <p:nvPr/>
+        </p:nvSpPr>
+        <p:spPr>
+          <a:xfrm>
+            <a:off x="2788920" y="2423160"/>
+            <a:ext cx="2057400" cy="365760"/>
+          </a:xfrm>
+          <a:prstGeom prst="rect">
+            <a:avLst/>
+          </a:prstGeom>
+          <a:noFill/>
+          <a:ln/>
+        </p:spPr>
+        <p:txBody>
+          <a:bodyPr wrap="square" rtlCol="0" anchor="ctr"/>
+          <a:lstStyle/>
+          <a:p>
+            <a:pPr algn="ctr" indent="0" marL="0">
+              <a:buNone/>
+            </a:pPr>
+            <a:r>
+              <a:rPr lang="en-US" sz="1150" dirty="0">
+                <a:solidFill>
+                  <a:srgbClr val="8C9BB5"/>
+                </a:solidFill>
+                <a:latin typeface="Calibri" pitchFamily="34" charset="0"/>
+                <a:ea typeface="Calibri" pitchFamily="34" charset="-122"/>
+                <a:cs typeface="Calibri" pitchFamily="34" charset="-120"/>
+              </a:rPr>
+              <a:t>Recall</a:t>
+            </a:r>
+            <a:endParaRPr lang="en-US" sz="1150" dirty="0"/>
+          </a:p>
+        </p:txBody>
+      </p:sp>
+      <p:sp>
+        <p:nvSpPr>
+          <p:cNvPr id="10" name="Shape 8"/>
+          <p:cNvSpPr/>
+          <p:nvPr/>
+        </p:nvSpPr>
+        <p:spPr>
+          <a:xfrm>
+            <a:off x="5029200" y="1600200"/>
+            <a:ext cx="2057400" cy="1371600"/>
+          </a:xfrm>
+          <a:prstGeom prst="roundRect">
+            <a:avLst>
+              <a:gd name="adj" fmla="val 5333"/>
+            </a:avLst>
+          </a:prstGeom>
+          <a:solidFill>
+            <a:srgbClr val="121826"/>
+          </a:solidFill>
+          <a:ln w="12700">
+            <a:solidFill>
+              <a:srgbClr val="1F2A3D"/>
+            </a:solidFill>
+            <a:prstDash val="solid"/>
+          </a:ln>
+          <a:effectLst>
+            <a:outerShdw sx="100000" sy="100000" kx="0" ky="0" algn="bl" rotWithShape="0" blurRad="88900" dist="38100" dir="5400000">
+              <a:srgbClr val="000000">
+                <a:alpha val="35000"/>
+              </a:srgbClr>
+            </a:outerShdw>
+          </a:effectLst>
+        </p:spPr>
+      </p:sp>
+      <p:sp>
+        <p:nvSpPr>
+          <p:cNvPr id="11" name="Text 9"/>
+          <p:cNvSpPr/>
+          <p:nvPr/>
+        </p:nvSpPr>
+        <p:spPr>
+          <a:xfrm>
+            <a:off x="5029200" y="1783080"/>
+            <a:ext cx="2057400" cy="640080"/>
+          </a:xfrm>
+          <a:prstGeom prst="rect">
+            <a:avLst/>
+          </a:prstGeom>
+          <a:noFill/>
+          <a:ln/>
+        </p:spPr>
+        <p:txBody>
+          <a:bodyPr wrap="square" rtlCol="0" anchor="ctr"/>
+          <a:lstStyle/>
+          <a:p>
+            <a:pPr algn="ctr" indent="0" marL="0">
+              <a:buNone/>
+            </a:pPr>
+            <a:r>
+              <a:rPr lang="en-US" sz="3000" b="1" dirty="0">
+                <a:solidFill>
+                  <a:srgbClr val="2ECC71"/>
+                </a:solidFill>
+                <a:latin typeface="Cambria" pitchFamily="34" charset="0"/>
+                <a:ea typeface="Cambria" pitchFamily="34" charset="-122"/>
+                <a:cs typeface="Cambria" pitchFamily="34" charset="-120"/>
+              </a:rPr>
+              <a:t>96.0%</a:t>
+            </a:r>
+            <a:endParaRPr lang="en-US" sz="3000" dirty="0"/>
+          </a:p>
+        </p:txBody>
+      </p:sp>
+      <p:sp>
+        <p:nvSpPr>
+          <p:cNvPr id="12" name="Text 10"/>
+          <p:cNvSpPr/>
+          <p:nvPr/>
+        </p:nvSpPr>
+        <p:spPr>
+          <a:xfrm>
+            <a:off x="5029200" y="2423160"/>
+            <a:ext cx="2057400" cy="365760"/>
+          </a:xfrm>
+          <a:prstGeom prst="rect">
+            <a:avLst/>
+          </a:prstGeom>
+          <a:noFill/>
+          <a:ln/>
+        </p:spPr>
+        <p:txBody>
+          <a:bodyPr wrap="square" rtlCol="0" anchor="ctr"/>
+          <a:lstStyle/>
+          <a:p>
+            <a:pPr algn="ctr" indent="0" marL="0">
+              <a:buNone/>
+            </a:pPr>
+            <a:r>
+              <a:rPr lang="en-US" sz="1150" dirty="0">
+                <a:solidFill>
+                  <a:srgbClr val="8C9BB5"/>
+                </a:solidFill>
+                <a:latin typeface="Calibri" pitchFamily="34" charset="0"/>
+                <a:ea typeface="Calibri" pitchFamily="34" charset="-122"/>
+                <a:cs typeface="Calibri" pitchFamily="34" charset="-120"/>
+              </a:rPr>
+              <a:t>F1 score</a:t>
+            </a:r>
+            <a:endParaRPr lang="en-US" sz="1150" dirty="0"/>
+          </a:p>
+        </p:txBody>
+      </p:sp>
+      <p:sp>
+        <p:nvSpPr>
+          <p:cNvPr id="13" name="Shape 11"/>
+          <p:cNvSpPr/>
+          <p:nvPr/>
+        </p:nvSpPr>
+        <p:spPr>
+          <a:xfrm>
+            <a:off x="7269480" y="1600200"/>
+            <a:ext cx="2057400" cy="1371600"/>
+          </a:xfrm>
+          <a:prstGeom prst="roundRect">
+            <a:avLst>
+              <a:gd name="adj" fmla="val 5333"/>
+            </a:avLst>
+          </a:prstGeom>
+          <a:solidFill>
+            <a:srgbClr val="121826"/>
+          </a:solidFill>
+          <a:ln w="12700">
+            <a:solidFill>
+              <a:srgbClr val="1F2A3D"/>
+            </a:solidFill>
+            <a:prstDash val="solid"/>
+          </a:ln>
+          <a:effectLst>
+            <a:outerShdw sx="100000" sy="100000" kx="0" ky="0" algn="bl" rotWithShape="0" blurRad="88900" dist="38100" dir="5400000">
+              <a:srgbClr val="000000">
+                <a:alpha val="35000"/>
+              </a:srgbClr>
+            </a:outerShdw>
+          </a:effectLst>
+        </p:spPr>
+      </p:sp>
+      <p:sp>
+        <p:nvSpPr>
+          <p:cNvPr id="14" name="Text 12"/>
+          <p:cNvSpPr/>
+          <p:nvPr/>
+        </p:nvSpPr>
+        <p:spPr>
+          <a:xfrm>
+            <a:off x="7269480" y="1783080"/>
+            <a:ext cx="2057400" cy="640080"/>
+          </a:xfrm>
+          <a:prstGeom prst="rect">
+            <a:avLst/>
+          </a:prstGeom>
+          <a:noFill/>
+          <a:ln/>
+        </p:spPr>
+        <p:txBody>
+          <a:bodyPr wrap="square" rtlCol="0" anchor="ctr"/>
+          <a:lstStyle/>
+          <a:p>
+            <a:pPr algn="ctr" indent="0" marL="0">
+              <a:buNone/>
+            </a:pPr>
+            <a:r>
+              <a:rPr lang="en-US" sz="3000" b="1" dirty="0">
+                <a:solidFill>
+                  <a:srgbClr val="2ECC71"/>
+                </a:solidFill>
+                <a:latin typeface="Cambria" pitchFamily="34" charset="0"/>
+                <a:ea typeface="Cambria" pitchFamily="34" charset="-122"/>
+                <a:cs typeface="Cambria" pitchFamily="34" charset="-120"/>
+              </a:rPr>
+              <a:t>95.7%</a:t>
+            </a:r>
+            <a:endParaRPr lang="en-US" sz="3000" dirty="0"/>
+          </a:p>
+        </p:txBody>
+      </p:sp>
+      <p:sp>
+        <p:nvSpPr>
+          <p:cNvPr id="15" name="Text 13"/>
+          <p:cNvSpPr/>
+          <p:nvPr/>
+        </p:nvSpPr>
+        <p:spPr>
+          <a:xfrm>
+            <a:off x="7269480" y="2423160"/>
+            <a:ext cx="2057400" cy="365760"/>
+          </a:xfrm>
+          <a:prstGeom prst="rect">
+            <a:avLst/>
+          </a:prstGeom>
+          <a:noFill/>
+          <a:ln/>
+        </p:spPr>
+        <p:txBody>
+          <a:bodyPr wrap="square" rtlCol="0" anchor="ctr"/>
+          <a:lstStyle/>
+          <a:p>
+            <a:pPr algn="ctr" indent="0" marL="0">
+              <a:buNone/>
+            </a:pPr>
+            <a:r>
+              <a:rPr lang="en-US" sz="1150" dirty="0">
+                <a:solidFill>
+                  <a:srgbClr val="8C9BB5"/>
+                </a:solidFill>
+                <a:latin typeface="Calibri" pitchFamily="34" charset="0"/>
+                <a:ea typeface="Calibri" pitchFamily="34" charset="-122"/>
+                <a:cs typeface="Calibri" pitchFamily="34" charset="-120"/>
+              </a:rPr>
+              <a:t>Accuracy</a:t>
+            </a:r>
+            <a:endParaRPr lang="en-US" sz="1150" dirty="0"/>
+          </a:p>
+        </p:txBody>
+      </p:sp>
+      <p:sp>
+        <p:nvSpPr>
+          <p:cNvPr id="16" name="Shape 14"/>
+          <p:cNvSpPr/>
+          <p:nvPr/>
+        </p:nvSpPr>
+        <p:spPr>
+          <a:xfrm>
+            <a:off x="9509760" y="1600200"/>
+            <a:ext cx="2057400" cy="1371600"/>
+          </a:xfrm>
+          <a:prstGeom prst="roundRect">
+            <a:avLst>
+              <a:gd name="adj" fmla="val 5333"/>
+            </a:avLst>
+          </a:prstGeom>
+          <a:solidFill>
+            <a:srgbClr val="121826"/>
+          </a:solidFill>
+          <a:ln w="12700">
+            <a:solidFill>
+              <a:srgbClr val="1F2A3D"/>
+            </a:solidFill>
+            <a:prstDash val="solid"/>
+          </a:ln>
+          <a:effectLst>
+            <a:outerShdw sx="100000" sy="100000" kx="0" ky="0" algn="bl" rotWithShape="0" blurRad="88900" dist="38100" dir="5400000">
+              <a:srgbClr val="000000">
+                <a:alpha val="35000"/>
+              </a:srgbClr>
+            </a:outerShdw>
+          </a:effectLst>
+        </p:spPr>
+      </p:sp>
+      <p:sp>
+        <p:nvSpPr>
+          <p:cNvPr id="17" name="Text 15"/>
+          <p:cNvSpPr/>
+          <p:nvPr/>
+        </p:nvSpPr>
+        <p:spPr>
+          <a:xfrm>
+            <a:off x="9509760" y="1783080"/>
+            <a:ext cx="2057400" cy="640080"/>
+          </a:xfrm>
+          <a:prstGeom prst="rect">
+            <a:avLst/>
+          </a:prstGeom>
+          <a:noFill/>
+          <a:ln/>
+        </p:spPr>
+        <p:txBody>
+          <a:bodyPr wrap="square" rtlCol="0" anchor="ctr"/>
+          <a:lstStyle/>
+          <a:p>
+            <a:pPr algn="ctr" indent="0" marL="0">
+              <a:buNone/>
+            </a:pPr>
+            <a:r>
+              <a:rPr lang="en-US" sz="3000" b="1" dirty="0">
+                <a:solidFill>
+                  <a:srgbClr val="2ECC71"/>
+                </a:solidFill>
+                <a:latin typeface="Cambria" pitchFamily="34" charset="0"/>
+                <a:ea typeface="Cambria" pitchFamily="34" charset="-122"/>
+                <a:cs typeface="Cambria" pitchFamily="34" charset="-120"/>
+              </a:rPr>
+              <a:t>0.0%</a:t>
+            </a:r>
+            <a:endParaRPr lang="en-US" sz="3000" dirty="0"/>
+          </a:p>
+        </p:txBody>
+      </p:sp>
+      <p:sp>
+        <p:nvSpPr>
+          <p:cNvPr id="18" name="Text 16"/>
+          <p:cNvSpPr/>
+          <p:nvPr/>
+        </p:nvSpPr>
+        <p:spPr>
+          <a:xfrm>
+            <a:off x="9509760" y="2423160"/>
+            <a:ext cx="2057400" cy="365760"/>
+          </a:xfrm>
+          <a:prstGeom prst="rect">
+            <a:avLst/>
+          </a:prstGeom>
+          <a:noFill/>
+          <a:ln/>
+        </p:spPr>
+        <p:txBody>
+          <a:bodyPr wrap="square" rtlCol="0" anchor="ctr"/>
+          <a:lstStyle/>
+          <a:p>
+            <a:pPr algn="ctr" indent="0" marL="0">
+              <a:buNone/>
+            </a:pPr>
+            <a:r>
+              <a:rPr lang="en-US" sz="1150" dirty="0">
+                <a:solidFill>
+                  <a:srgbClr val="8C9BB5"/>
+                </a:solidFill>
+                <a:latin typeface="Calibri" pitchFamily="34" charset="0"/>
+                <a:ea typeface="Calibri" pitchFamily="34" charset="-122"/>
+                <a:cs typeface="Calibri" pitchFamily="34" charset="-120"/>
+              </a:rPr>
+              <a:t>False-positive rate</a:t>
+            </a:r>
+            <a:endParaRPr lang="en-US" sz="1150" dirty="0"/>
+          </a:p>
+        </p:txBody>
+      </p:sp>
+      <p:sp>
+        <p:nvSpPr>
+          <p:cNvPr id="19" name="Shape 17"/>
+          <p:cNvSpPr/>
+          <p:nvPr/>
+        </p:nvSpPr>
+        <p:spPr>
+          <a:xfrm>
+            <a:off x="548640" y="3246120"/>
+            <a:ext cx="5486400" cy="2514600"/>
+          </a:xfrm>
+          <a:prstGeom prst="roundRect">
+            <a:avLst>
+              <a:gd name="adj" fmla="val 2909"/>
+            </a:avLst>
+          </a:prstGeom>
+          <a:solidFill>
+            <a:srgbClr val="121826"/>
+          </a:solidFill>
+          <a:ln w="12700">
+            <a:solidFill>
+              <a:srgbClr val="1F2A3D"/>
+            </a:solidFill>
+            <a:prstDash val="solid"/>
+          </a:ln>
+          <a:effectLst>
+            <a:outerShdw sx="100000" sy="100000" kx="0" ky="0" algn="bl" rotWithShape="0" blurRad="88900" dist="38100" dir="5400000">
+              <a:srgbClr val="000000">
+                <a:alpha val="35000"/>
+              </a:srgbClr>
+            </a:outerShdw>
+          </a:effectLst>
+        </p:spPr>
+      </p:sp>
+      <p:sp>
+        <p:nvSpPr>
+          <p:cNvPr id="20" name="Text 18"/>
+          <p:cNvSpPr/>
+          <p:nvPr/>
+        </p:nvSpPr>
+        <p:spPr>
+          <a:xfrm>
+            <a:off x="777240" y="3401568"/>
+            <a:ext cx="5029200" cy="365760"/>
+          </a:xfrm>
+          <a:prstGeom prst="rect">
+            <a:avLst/>
+          </a:prstGeom>
+          <a:noFill/>
+          <a:ln/>
+        </p:spPr>
+        <p:txBody>
+          <a:bodyPr wrap="square" rtlCol="0" anchor="ctr"/>
+          <a:lstStyle/>
+          <a:p>
+            <a:pPr indent="0" marL="0">
+              <a:buNone/>
+            </a:pPr>
+            <a:r>
+              <a:rPr lang="en-US" sz="1400" b="1" dirty="0">
+                <a:solidFill>
+                  <a:srgbClr val="3EA6FF"/>
+                </a:solidFill>
+                <a:latin typeface="Cambria" pitchFamily="34" charset="0"/>
+                <a:ea typeface="Cambria" pitchFamily="34" charset="-122"/>
+                <a:cs typeface="Cambria" pitchFamily="34" charset="-120"/>
+              </a:rPr>
+              <a:t>Confusion matrix (46 messages)</a:t>
+            </a:r>
+            <a:endParaRPr lang="en-US" sz="1400" dirty="0"/>
+          </a:p>
+        </p:txBody>
+      </p:sp>
+      <p:sp>
+        <p:nvSpPr>
+          <p:cNvPr id="21" name="Text 19"/>
+          <p:cNvSpPr/>
+          <p:nvPr/>
+        </p:nvSpPr>
+        <p:spPr>
+          <a:xfrm>
+            <a:off x="777240" y="3886200"/>
+            <a:ext cx="1005840" cy="777240"/>
+          </a:xfrm>
+          <a:prstGeom prst="rect">
+            <a:avLst/>
+          </a:prstGeom>
+          <a:noFill/>
+          <a:ln/>
+        </p:spPr>
+        <p:txBody>
+          <a:bodyPr wrap="square" rtlCol="0" anchor="ctr"/>
+          <a:lstStyle/>
+          <a:p>
+            <a:pPr indent="0" marL="0">
+              <a:buNone/>
+            </a:pPr>
+            <a:r>
+              <a:rPr lang="en-US" sz="900" dirty="0">
+                <a:solidFill>
+                  <a:srgbClr val="8C9BB5"/>
+                </a:solidFill>
+                <a:latin typeface="Calibri" pitchFamily="34" charset="0"/>
+                <a:ea typeface="Calibri" pitchFamily="34" charset="-122"/>
+                <a:cs typeface="Calibri" pitchFamily="34" charset="-120"/>
+              </a:rPr>
+              <a:t>Actual SCAM</a:t>
+            </a:r>
+            <a:endParaRPr lang="en-US" sz="900" dirty="0"/>
+          </a:p>
+        </p:txBody>
+      </p:sp>
+      <p:sp>
+        <p:nvSpPr>
+          <p:cNvPr id="22" name="Text 20"/>
+          <p:cNvSpPr/>
+          <p:nvPr/>
+        </p:nvSpPr>
+        <p:spPr>
+          <a:xfrm>
+            <a:off x="777240" y="4846320"/>
+            <a:ext cx="1005840" cy="777240"/>
+          </a:xfrm>
+          <a:prstGeom prst="rect">
+            <a:avLst/>
+          </a:prstGeom>
+          <a:noFill/>
+          <a:ln/>
+        </p:spPr>
+        <p:txBody>
+          <a:bodyPr wrap="square" rtlCol="0" anchor="ctr"/>
+          <a:lstStyle/>
+          <a:p>
+            <a:pPr indent="0" marL="0">
+              <a:buNone/>
+            </a:pPr>
+            <a:r>
+              <a:rPr lang="en-US" sz="900" dirty="0">
+                <a:solidFill>
+                  <a:srgbClr val="8C9BB5"/>
+                </a:solidFill>
+                <a:latin typeface="Calibri" pitchFamily="34" charset="0"/>
+                <a:ea typeface="Calibri" pitchFamily="34" charset="-122"/>
+                <a:cs typeface="Calibri" pitchFamily="34" charset="-120"/>
+              </a:rPr>
+              <a:t>Actual BENIGN</a:t>
+            </a:r>
+            <a:endParaRPr lang="en-US" sz="900" dirty="0"/>
+          </a:p>
+        </p:txBody>
+      </p:sp>
+      <p:sp>
+        <p:nvSpPr>
+          <p:cNvPr id="23" name="Text 21"/>
+          <p:cNvSpPr/>
+          <p:nvPr/>
+        </p:nvSpPr>
+        <p:spPr>
+          <a:xfrm>
+            <a:off x="1828800" y="3657600"/>
+            <a:ext cx="1828800" cy="228600"/>
+          </a:xfrm>
+          <a:prstGeom prst="rect">
+            <a:avLst/>
+          </a:prstGeom>
+          <a:noFill/>
+          <a:ln/>
+        </p:spPr>
+        <p:txBody>
+          <a:bodyPr wrap="square" rtlCol="0" anchor="ctr"/>
+          <a:lstStyle/>
+          <a:p>
+            <a:pPr algn="ctr" indent="0" marL="0">
+              <a:buNone/>
+            </a:pPr>
+            <a:r>
+              <a:rPr lang="en-US" sz="900" dirty="0">
+                <a:solidFill>
+                  <a:srgbClr val="8C9BB5"/>
+                </a:solidFill>
+                <a:latin typeface="Calibri" pitchFamily="34" charset="0"/>
+                <a:ea typeface="Calibri" pitchFamily="34" charset="-122"/>
+                <a:cs typeface="Calibri" pitchFamily="34" charset="-120"/>
+              </a:rPr>
+              <a:t>Pred. SCAM</a:t>
+            </a:r>
+            <a:endParaRPr lang="en-US" sz="900" dirty="0"/>
+          </a:p>
+        </p:txBody>
+      </p:sp>
+      <p:sp>
+        <p:nvSpPr>
+          <p:cNvPr id="24" name="Text 22"/>
+          <p:cNvSpPr/>
+          <p:nvPr/>
+        </p:nvSpPr>
+        <p:spPr>
+          <a:xfrm>
+            <a:off x="3794760" y="3657600"/>
+            <a:ext cx="1828800" cy="228600"/>
+          </a:xfrm>
+          <a:prstGeom prst="rect">
+            <a:avLst/>
+          </a:prstGeom>
+          <a:noFill/>
+          <a:ln/>
+        </p:spPr>
+        <p:txBody>
+          <a:bodyPr wrap="square" rtlCol="0" anchor="ctr"/>
+          <a:lstStyle/>
+          <a:p>
+            <a:pPr algn="ctr" indent="0" marL="0">
+              <a:buNone/>
+            </a:pPr>
+            <a:r>
+              <a:rPr lang="en-US" sz="900" dirty="0">
+                <a:solidFill>
+                  <a:srgbClr val="8C9BB5"/>
+                </a:solidFill>
+                <a:latin typeface="Calibri" pitchFamily="34" charset="0"/>
+                <a:ea typeface="Calibri" pitchFamily="34" charset="-122"/>
+                <a:cs typeface="Calibri" pitchFamily="34" charset="-120"/>
+              </a:rPr>
+              <a:t>Pred. BENIGN</a:t>
+            </a:r>
+            <a:endParaRPr lang="en-US" sz="900" dirty="0"/>
+          </a:p>
+        </p:txBody>
+      </p:sp>
+      <p:sp>
+        <p:nvSpPr>
+          <p:cNvPr id="25" name="Shape 23"/>
+          <p:cNvSpPr/>
+          <p:nvPr/>
+        </p:nvSpPr>
+        <p:spPr>
+          <a:xfrm>
+            <a:off x="1828800" y="3886200"/>
+            <a:ext cx="1828800" cy="777240"/>
+          </a:xfrm>
+          <a:prstGeom prst="roundRect">
+            <a:avLst>
+              <a:gd name="adj" fmla="val 9412"/>
             </a:avLst>
           </a:prstGeom>
           <a:solidFill>
@@ -7926,208 +9259,71 @@
       </p:sp>
       <p:sp>
         <p:nvSpPr>
-          <p:cNvPr id="7" name="Text 5"/>
-          <p:cNvSpPr/>
-          <p:nvPr/>
-        </p:nvSpPr>
-        <p:spPr>
-          <a:xfrm>
-            <a:off x="777240" y="2304288"/>
-            <a:ext cx="3291840" cy="731520"/>
-          </a:xfrm>
-          <a:prstGeom prst="rect">
-            <a:avLst/>
-          </a:prstGeom>
-          <a:noFill/>
-          <a:ln/>
-        </p:spPr>
-        <p:txBody>
-          <a:bodyPr wrap="square" rtlCol="0" anchor="ctr"/>
-          <a:lstStyle/>
-          <a:p>
-            <a:pPr indent="0" marL="0">
-              <a:buNone/>
-            </a:pPr>
-            <a:r>
-              <a:rPr lang="en-US" sz="1450" b="1" dirty="0">
-                <a:solidFill>
-                  <a:srgbClr val="3EA6FF"/>
-                </a:solidFill>
-                <a:latin typeface="Cambria" pitchFamily="34" charset="0"/>
-                <a:ea typeface="Cambria" pitchFamily="34" charset="-122"/>
-                <a:cs typeface="Cambria" pitchFamily="34" charset="-120"/>
-              </a:rPr>
-              <a:t>Business Impact (25%)</a:t>
-            </a:r>
-            <a:endParaRPr lang="en-US" sz="1450" dirty="0"/>
-          </a:p>
-        </p:txBody>
-      </p:sp>
-      <p:sp>
-        <p:nvSpPr>
-          <p:cNvPr id="8" name="Text 6"/>
-          <p:cNvSpPr/>
-          <p:nvPr/>
-        </p:nvSpPr>
-        <p:spPr>
-          <a:xfrm>
-            <a:off x="4114800" y="2304288"/>
-            <a:ext cx="7315200" cy="731520"/>
-          </a:xfrm>
-          <a:prstGeom prst="rect">
-            <a:avLst/>
-          </a:prstGeom>
-          <a:noFill/>
-          <a:ln/>
-        </p:spPr>
-        <p:txBody>
-          <a:bodyPr wrap="square" rtlCol="0" anchor="ctr"/>
-          <a:lstStyle/>
-          <a:p>
-            <a:pPr indent="0" marL="0">
-              <a:buNone/>
-            </a:pPr>
-            <a:r>
-              <a:rPr lang="en-US" sz="1300" dirty="0">
-                <a:solidFill>
-                  <a:srgbClr val="E6EDF6"/>
-                </a:solidFill>
-                <a:latin typeface="Calibri" pitchFamily="34" charset="0"/>
-                <a:ea typeface="Calibri" pitchFamily="34" charset="-122"/>
-                <a:cs typeface="Calibri" pitchFamily="34" charset="-120"/>
-              </a:rPr>
-              <a:t>Targets a ₹1,776 Cr/yr loss vector; protects banks, telcos, citizens &amp; courts.</a:t>
-            </a:r>
-            <a:endParaRPr lang="en-US" sz="1300" dirty="0"/>
-          </a:p>
-        </p:txBody>
-      </p:sp>
-      <p:sp>
-        <p:nvSpPr>
-          <p:cNvPr id="9" name="Shape 7"/>
-          <p:cNvSpPr/>
-          <p:nvPr/>
-        </p:nvSpPr>
-        <p:spPr>
-          <a:xfrm>
-            <a:off x="548640" y="3145536"/>
-            <a:ext cx="11064240" cy="731520"/>
+          <p:cNvPr id="26" name="Text 24"/>
+          <p:cNvSpPr/>
+          <p:nvPr/>
+        </p:nvSpPr>
+        <p:spPr>
+          <a:xfrm>
+            <a:off x="1828800" y="3886200"/>
+            <a:ext cx="1828800" cy="777240"/>
+          </a:xfrm>
+          <a:prstGeom prst="rect">
+            <a:avLst/>
+          </a:prstGeom>
+          <a:noFill/>
+          <a:ln/>
+        </p:spPr>
+        <p:txBody>
+          <a:bodyPr wrap="square" rtlCol="0" anchor="ctr"/>
+          <a:lstStyle/>
+          <a:p>
+            <a:pPr algn="ctr" indent="0" marL="0">
+              <a:buNone/>
+            </a:pPr>
+            <a:r>
+              <a:rPr lang="en-US" sz="1800" b="1" dirty="0">
+                <a:solidFill>
+                  <a:srgbClr val="2ECC71"/>
+                </a:solidFill>
+                <a:latin typeface="Calibri" pitchFamily="34" charset="0"/>
+                <a:ea typeface="Calibri" pitchFamily="34" charset="-122"/>
+                <a:cs typeface="Calibri" pitchFamily="34" charset="-120"/>
+              </a:rPr>
+              <a:t>24  </a:t>
+            </a:r>
+            <a:pPr algn="ctr" indent="0" marL="0">
+              <a:buNone/>
+            </a:pPr>
+            <a:r>
+              <a:rPr lang="en-US" sz="1000" dirty="0">
+                <a:solidFill>
+                  <a:srgbClr val="8C9BB5"/>
+                </a:solidFill>
+                <a:latin typeface="Calibri" pitchFamily="34" charset="0"/>
+                <a:ea typeface="Calibri" pitchFamily="34" charset="-122"/>
+                <a:cs typeface="Calibri" pitchFamily="34" charset="-120"/>
+              </a:rPr>
+              <a:t>true positive</a:t>
+            </a:r>
+            <a:endParaRPr lang="en-US" sz="1800" dirty="0"/>
+          </a:p>
+        </p:txBody>
+      </p:sp>
+      <p:sp>
+        <p:nvSpPr>
+          <p:cNvPr id="27" name="Shape 25"/>
+          <p:cNvSpPr/>
+          <p:nvPr/>
+        </p:nvSpPr>
+        <p:spPr>
+          <a:xfrm>
+            <a:off x="3794760" y="3886200"/>
+            <a:ext cx="1828800" cy="777240"/>
           </a:xfrm>
           <a:prstGeom prst="roundRect">
             <a:avLst>
-              <a:gd name="adj" fmla="val 10000"/>
-            </a:avLst>
-          </a:prstGeom>
-          <a:solidFill>
-            <a:srgbClr val="121826"/>
-          </a:solidFill>
-          <a:ln w="12700">
-            <a:solidFill>
-              <a:srgbClr val="1F2A3D"/>
-            </a:solidFill>
-            <a:prstDash val="solid"/>
-          </a:ln>
-          <a:effectLst>
-            <a:outerShdw sx="100000" sy="100000" kx="0" ky="0" algn="bl" rotWithShape="0" blurRad="88900" dist="38100" dir="5400000">
-              <a:srgbClr val="000000">
-                <a:alpha val="35000"/>
-              </a:srgbClr>
-            </a:outerShdw>
-          </a:effectLst>
-        </p:spPr>
-      </p:sp>
-      <p:sp>
-        <p:nvSpPr>
-          <p:cNvPr id="10" name="Text 8"/>
-          <p:cNvSpPr/>
-          <p:nvPr/>
-        </p:nvSpPr>
-        <p:spPr>
-          <a:xfrm>
-            <a:off x="777240" y="3145536"/>
-            <a:ext cx="3291840" cy="731520"/>
-          </a:xfrm>
-          <a:prstGeom prst="rect">
-            <a:avLst/>
-          </a:prstGeom>
-          <a:noFill/>
-          <a:ln/>
-        </p:spPr>
-        <p:txBody>
-          <a:bodyPr wrap="square" rtlCol="0" anchor="ctr"/>
-          <a:lstStyle/>
-          <a:p>
-            <a:pPr indent="0" marL="0">
-              <a:buNone/>
-            </a:pPr>
-            <a:r>
-              <a:rPr lang="en-US" sz="1450" b="1" dirty="0">
-                <a:solidFill>
-                  <a:srgbClr val="3EA6FF"/>
-                </a:solidFill>
-                <a:latin typeface="Cambria" pitchFamily="34" charset="0"/>
-                <a:ea typeface="Cambria" pitchFamily="34" charset="-122"/>
-                <a:cs typeface="Cambria" pitchFamily="34" charset="-120"/>
-              </a:rPr>
-              <a:t>Technical Excellence (20%)</a:t>
-            </a:r>
-            <a:endParaRPr lang="en-US" sz="1450" dirty="0"/>
-          </a:p>
-        </p:txBody>
-      </p:sp>
-      <p:sp>
-        <p:nvSpPr>
-          <p:cNvPr id="11" name="Text 9"/>
-          <p:cNvSpPr/>
-          <p:nvPr/>
-        </p:nvSpPr>
-        <p:spPr>
-          <a:xfrm>
-            <a:off x="4114800" y="3145536"/>
-            <a:ext cx="7315200" cy="731520"/>
-          </a:xfrm>
-          <a:prstGeom prst="rect">
-            <a:avLst/>
-          </a:prstGeom>
-          <a:noFill/>
-          <a:ln/>
-        </p:spPr>
-        <p:txBody>
-          <a:bodyPr wrap="square" rtlCol="0" anchor="ctr"/>
-          <a:lstStyle/>
-          <a:p>
-            <a:pPr indent="0" marL="0">
-              <a:buNone/>
-            </a:pPr>
-            <a:r>
-              <a:rPr lang="en-US" sz="1300" dirty="0">
-                <a:solidFill>
-                  <a:srgbClr val="E6EDF6"/>
-                </a:solidFill>
-                <a:latin typeface="Calibri" pitchFamily="34" charset="0"/>
-                <a:ea typeface="Calibri" pitchFamily="34" charset="-122"/>
-                <a:cs typeface="Calibri" pitchFamily="34" charset="-120"/>
-              </a:rPr>
-              <a:t>Graph AI, image forensics, explainable NLP, geospatial — in one API.</a:t>
-            </a:r>
-            <a:endParaRPr lang="en-US" sz="1300" dirty="0"/>
-          </a:p>
-        </p:txBody>
-      </p:sp>
-      <p:sp>
-        <p:nvSpPr>
-          <p:cNvPr id="12" name="Shape 10"/>
-          <p:cNvSpPr/>
-          <p:nvPr/>
-        </p:nvSpPr>
-        <p:spPr>
-          <a:xfrm>
-            <a:off x="548640" y="3986784"/>
-            <a:ext cx="11064240" cy="731520"/>
-          </a:xfrm>
-          <a:prstGeom prst="roundRect">
-            <a:avLst>
-              <a:gd name="adj" fmla="val 10000"/>
+              <a:gd name="adj" fmla="val 9412"/>
             </a:avLst>
           </a:prstGeom>
           <a:solidFill>
@@ -8150,100 +9346,75 @@
       </p:sp>
       <p:sp>
         <p:nvSpPr>
-          <p:cNvPr id="13" name="Text 11"/>
-          <p:cNvSpPr/>
-          <p:nvPr/>
-        </p:nvSpPr>
-        <p:spPr>
-          <a:xfrm>
-            <a:off x="777240" y="3986784"/>
-            <a:ext cx="3291840" cy="731520"/>
-          </a:xfrm>
-          <a:prstGeom prst="rect">
-            <a:avLst/>
-          </a:prstGeom>
-          <a:noFill/>
-          <a:ln/>
-        </p:spPr>
-        <p:txBody>
-          <a:bodyPr wrap="square" rtlCol="0" anchor="ctr"/>
-          <a:lstStyle/>
-          <a:p>
-            <a:pPr indent="0" marL="0">
-              <a:buNone/>
-            </a:pPr>
-            <a:r>
-              <a:rPr lang="en-US" sz="1450" b="1" dirty="0">
-                <a:solidFill>
-                  <a:srgbClr val="3EA6FF"/>
-                </a:solidFill>
-                <a:latin typeface="Cambria" pitchFamily="34" charset="0"/>
-                <a:ea typeface="Cambria" pitchFamily="34" charset="-122"/>
-                <a:cs typeface="Cambria" pitchFamily="34" charset="-120"/>
-              </a:rPr>
-              <a:t>Scalability (15%)</a:t>
-            </a:r>
-            <a:endParaRPr lang="en-US" sz="1450" dirty="0"/>
-          </a:p>
-        </p:txBody>
-      </p:sp>
-      <p:sp>
-        <p:nvSpPr>
-          <p:cNvPr id="14" name="Text 12"/>
-          <p:cNvSpPr/>
-          <p:nvPr/>
-        </p:nvSpPr>
-        <p:spPr>
-          <a:xfrm>
-            <a:off x="4114800" y="3986784"/>
-            <a:ext cx="7315200" cy="731520"/>
-          </a:xfrm>
-          <a:prstGeom prst="rect">
-            <a:avLst/>
-          </a:prstGeom>
-          <a:noFill/>
-          <a:ln/>
-        </p:spPr>
-        <p:txBody>
-          <a:bodyPr wrap="square" rtlCol="0" anchor="ctr"/>
-          <a:lstStyle/>
-          <a:p>
-            <a:pPr indent="0" marL="0">
-              <a:buNone/>
-            </a:pPr>
-            <a:r>
-              <a:rPr lang="en-US" sz="1300" dirty="0">
-                <a:solidFill>
-                  <a:srgbClr val="E6EDF6"/>
-                </a:solidFill>
-                <a:latin typeface="Calibri" pitchFamily="34" charset="0"/>
-                <a:ea typeface="Calibri" pitchFamily="34" charset="-122"/>
-                <a:cs typeface="Calibri" pitchFamily="34" charset="-120"/>
-              </a:rPr>
-              <a:t>Stateless services; add scam templates without retraining; per-module scale-out.</a:t>
-            </a:r>
-            <a:endParaRPr lang="en-US" sz="1300" dirty="0"/>
-          </a:p>
-        </p:txBody>
-      </p:sp>
-      <p:sp>
-        <p:nvSpPr>
-          <p:cNvPr id="15" name="Shape 13"/>
-          <p:cNvSpPr/>
-          <p:nvPr/>
-        </p:nvSpPr>
-        <p:spPr>
-          <a:xfrm>
-            <a:off x="548640" y="4828032"/>
-            <a:ext cx="11064240" cy="731520"/>
+          <p:cNvPr id="28" name="Text 26"/>
+          <p:cNvSpPr/>
+          <p:nvPr/>
+        </p:nvSpPr>
+        <p:spPr>
+          <a:xfrm>
+            <a:off x="3794760" y="3886200"/>
+            <a:ext cx="1828800" cy="777240"/>
+          </a:xfrm>
+          <a:prstGeom prst="rect">
+            <a:avLst/>
+          </a:prstGeom>
+          <a:noFill/>
+          <a:ln/>
+        </p:spPr>
+        <p:txBody>
+          <a:bodyPr wrap="square" rtlCol="0" anchor="ctr"/>
+          <a:lstStyle/>
+          <a:p>
+            <a:pPr algn="ctr" indent="0" marL="0">
+              <a:buNone/>
+            </a:pPr>
+            <a:r>
+              <a:rPr lang="en-US" sz="1800" b="1" dirty="0">
+                <a:solidFill>
+                  <a:srgbClr val="FF4D57"/>
+                </a:solidFill>
+                <a:latin typeface="Calibri" pitchFamily="34" charset="0"/>
+                <a:ea typeface="Calibri" pitchFamily="34" charset="-122"/>
+                <a:cs typeface="Calibri" pitchFamily="34" charset="-120"/>
+              </a:rPr>
+              <a:t>2  </a:t>
+            </a:r>
+            <a:pPr algn="ctr" indent="0" marL="0">
+              <a:buNone/>
+            </a:pPr>
+            <a:r>
+              <a:rPr lang="en-US" sz="1000" dirty="0">
+                <a:solidFill>
+                  <a:srgbClr val="8C9BB5"/>
+                </a:solidFill>
+                <a:latin typeface="Calibri" pitchFamily="34" charset="0"/>
+                <a:ea typeface="Calibri" pitchFamily="34" charset="-122"/>
+                <a:cs typeface="Calibri" pitchFamily="34" charset="-120"/>
+              </a:rPr>
+              <a:t>false negative</a:t>
+            </a:r>
+            <a:endParaRPr lang="en-US" sz="1800" dirty="0"/>
+          </a:p>
+        </p:txBody>
+      </p:sp>
+      <p:sp>
+        <p:nvSpPr>
+          <p:cNvPr id="29" name="Shape 27"/>
+          <p:cNvSpPr/>
+          <p:nvPr/>
+        </p:nvSpPr>
+        <p:spPr>
+          <a:xfrm>
+            <a:off x="1828800" y="4846320"/>
+            <a:ext cx="1828800" cy="777240"/>
           </a:xfrm>
           <a:prstGeom prst="roundRect">
             <a:avLst>
-              <a:gd name="adj" fmla="val 10000"/>
+              <a:gd name="adj" fmla="val 9412"/>
             </a:avLst>
           </a:prstGeom>
           <a:solidFill>
-            <a:srgbClr val="121826"/>
+            <a:srgbClr val="0F1420"/>
           </a:solidFill>
           <a:ln w="12700">
             <a:solidFill>
@@ -8262,14 +9433,188 @@
       </p:sp>
       <p:sp>
         <p:nvSpPr>
-          <p:cNvPr id="16" name="Text 14"/>
-          <p:cNvSpPr/>
-          <p:nvPr/>
-        </p:nvSpPr>
-        <p:spPr>
-          <a:xfrm>
-            <a:off x="777240" y="4828032"/>
-            <a:ext cx="3291840" cy="731520"/>
+          <p:cNvPr id="30" name="Text 28"/>
+          <p:cNvSpPr/>
+          <p:nvPr/>
+        </p:nvSpPr>
+        <p:spPr>
+          <a:xfrm>
+            <a:off x="1828800" y="4846320"/>
+            <a:ext cx="1828800" cy="777240"/>
+          </a:xfrm>
+          <a:prstGeom prst="rect">
+            <a:avLst/>
+          </a:prstGeom>
+          <a:noFill/>
+          <a:ln/>
+        </p:spPr>
+        <p:txBody>
+          <a:bodyPr wrap="square" rtlCol="0" anchor="ctr"/>
+          <a:lstStyle/>
+          <a:p>
+            <a:pPr algn="ctr" indent="0" marL="0">
+              <a:buNone/>
+            </a:pPr>
+            <a:r>
+              <a:rPr lang="en-US" sz="1800" b="1" dirty="0">
+                <a:solidFill>
+                  <a:srgbClr val="FF4D57"/>
+                </a:solidFill>
+                <a:latin typeface="Calibri" pitchFamily="34" charset="0"/>
+                <a:ea typeface="Calibri" pitchFamily="34" charset="-122"/>
+                <a:cs typeface="Calibri" pitchFamily="34" charset="-120"/>
+              </a:rPr>
+              <a:t>0  </a:t>
+            </a:r>
+            <a:pPr algn="ctr" indent="0" marL="0">
+              <a:buNone/>
+            </a:pPr>
+            <a:r>
+              <a:rPr lang="en-US" sz="1000" dirty="0">
+                <a:solidFill>
+                  <a:srgbClr val="8C9BB5"/>
+                </a:solidFill>
+                <a:latin typeface="Calibri" pitchFamily="34" charset="0"/>
+                <a:ea typeface="Calibri" pitchFamily="34" charset="-122"/>
+                <a:cs typeface="Calibri" pitchFamily="34" charset="-120"/>
+              </a:rPr>
+              <a:t>false positive</a:t>
+            </a:r>
+            <a:endParaRPr lang="en-US" sz="1800" dirty="0"/>
+          </a:p>
+        </p:txBody>
+      </p:sp>
+      <p:sp>
+        <p:nvSpPr>
+          <p:cNvPr id="31" name="Shape 29"/>
+          <p:cNvSpPr/>
+          <p:nvPr/>
+        </p:nvSpPr>
+        <p:spPr>
+          <a:xfrm>
+            <a:off x="3794760" y="4846320"/>
+            <a:ext cx="1828800" cy="777240"/>
+          </a:xfrm>
+          <a:prstGeom prst="roundRect">
+            <a:avLst>
+              <a:gd name="adj" fmla="val 9412"/>
+            </a:avLst>
+          </a:prstGeom>
+          <a:solidFill>
+            <a:srgbClr val="0F1420"/>
+          </a:solidFill>
+          <a:ln w="12700">
+            <a:solidFill>
+              <a:srgbClr val="1F2A3D"/>
+            </a:solidFill>
+            <a:prstDash val="solid"/>
+          </a:ln>
+          <a:effectLst>
+            <a:outerShdw sx="100000" sy="100000" kx="0" ky="0" algn="bl" rotWithShape="0" blurRad="88900" dist="38100" dir="5400000">
+              <a:srgbClr val="000000">
+                <a:alpha val="35000"/>
+              </a:srgbClr>
+            </a:outerShdw>
+          </a:effectLst>
+        </p:spPr>
+      </p:sp>
+      <p:sp>
+        <p:nvSpPr>
+          <p:cNvPr id="32" name="Text 30"/>
+          <p:cNvSpPr/>
+          <p:nvPr/>
+        </p:nvSpPr>
+        <p:spPr>
+          <a:xfrm>
+            <a:off x="3794760" y="4846320"/>
+            <a:ext cx="1828800" cy="777240"/>
+          </a:xfrm>
+          <a:prstGeom prst="rect">
+            <a:avLst/>
+          </a:prstGeom>
+          <a:noFill/>
+          <a:ln/>
+        </p:spPr>
+        <p:txBody>
+          <a:bodyPr wrap="square" rtlCol="0" anchor="ctr"/>
+          <a:lstStyle/>
+          <a:p>
+            <a:pPr algn="ctr" indent="0" marL="0">
+              <a:buNone/>
+            </a:pPr>
+            <a:r>
+              <a:rPr lang="en-US" sz="1800" b="1" dirty="0">
+                <a:solidFill>
+                  <a:srgbClr val="2ECC71"/>
+                </a:solidFill>
+                <a:latin typeface="Calibri" pitchFamily="34" charset="0"/>
+                <a:ea typeface="Calibri" pitchFamily="34" charset="-122"/>
+                <a:cs typeface="Calibri" pitchFamily="34" charset="-120"/>
+              </a:rPr>
+              <a:t>20  </a:t>
+            </a:r>
+            <a:pPr algn="ctr" indent="0" marL="0">
+              <a:buNone/>
+            </a:pPr>
+            <a:r>
+              <a:rPr lang="en-US" sz="1000" dirty="0">
+                <a:solidFill>
+                  <a:srgbClr val="8C9BB5"/>
+                </a:solidFill>
+                <a:latin typeface="Calibri" pitchFamily="34" charset="0"/>
+                <a:ea typeface="Calibri" pitchFamily="34" charset="-122"/>
+                <a:cs typeface="Calibri" pitchFamily="34" charset="-120"/>
+              </a:rPr>
+              <a:t>true negative</a:t>
+            </a:r>
+            <a:endParaRPr lang="en-US" sz="1800" dirty="0"/>
+          </a:p>
+        </p:txBody>
+      </p:sp>
+      <p:sp>
+        <p:nvSpPr>
+          <p:cNvPr id="33" name="Shape 31"/>
+          <p:cNvSpPr/>
+          <p:nvPr/>
+        </p:nvSpPr>
+        <p:spPr>
+          <a:xfrm>
+            <a:off x="6263640" y="3246120"/>
+            <a:ext cx="5349240" cy="2514600"/>
+          </a:xfrm>
+          <a:prstGeom prst="roundRect">
+            <a:avLst>
+              <a:gd name="adj" fmla="val 2909"/>
+            </a:avLst>
+          </a:prstGeom>
+          <a:solidFill>
+            <a:srgbClr val="0F1420"/>
+          </a:solidFill>
+          <a:ln w="12700">
+            <a:solidFill>
+              <a:srgbClr val="1F2A3D"/>
+            </a:solidFill>
+            <a:prstDash val="solid"/>
+          </a:ln>
+          <a:effectLst>
+            <a:outerShdw sx="100000" sy="100000" kx="0" ky="0" algn="bl" rotWithShape="0" blurRad="88900" dist="38100" dir="5400000">
+              <a:srgbClr val="000000">
+                <a:alpha val="35000"/>
+              </a:srgbClr>
+            </a:outerShdw>
+          </a:effectLst>
+        </p:spPr>
+      </p:sp>
+      <p:sp>
+        <p:nvSpPr>
+          <p:cNvPr id="34" name="Text 32"/>
+          <p:cNvSpPr/>
+          <p:nvPr/>
+        </p:nvSpPr>
+        <p:spPr>
+          <a:xfrm>
+            <a:off x="6492240" y="3401568"/>
+            <a:ext cx="4937760" cy="365760"/>
           </a:xfrm>
           <a:prstGeom prst="rect">
             <a:avLst/>
@@ -8285,7 +9630,7 @@
               <a:buNone/>
             </a:pPr>
             <a:r>
-              <a:rPr lang="en-US" sz="1450" b="1" dirty="0">
+              <a:rPr lang="en-US" sz="1400" b="1" dirty="0">
                 <a:solidFill>
                   <a:srgbClr val="3EA6FF"/>
                 </a:solidFill>
@@ -8293,38 +9638,42 @@
                 <a:ea typeface="Cambria" pitchFamily="34" charset="-122"/>
                 <a:cs typeface="Cambria" pitchFamily="34" charset="-120"/>
               </a:rPr>
-              <a:t>User Experience (15%)</a:t>
-            </a:r>
-            <a:endParaRPr lang="en-US" sz="1450" dirty="0"/>
-          </a:p>
-        </p:txBody>
-      </p:sp>
-      <p:sp>
-        <p:nvSpPr>
-          <p:cNvPr id="17" name="Text 15"/>
-          <p:cNvSpPr/>
-          <p:nvPr/>
-        </p:nvSpPr>
-        <p:spPr>
-          <a:xfrm>
-            <a:off x="4114800" y="4828032"/>
-            <a:ext cx="7315200" cy="731520"/>
-          </a:xfrm>
-          <a:prstGeom prst="rect">
-            <a:avLst/>
-          </a:prstGeom>
-          <a:noFill/>
-          <a:ln/>
-        </p:spPr>
-        <p:txBody>
-          <a:bodyPr wrap="square" rtlCol="0" anchor="ctr"/>
-          <a:lstStyle/>
-          <a:p>
-            <a:pPr indent="0" marL="0">
-              <a:buNone/>
-            </a:pPr>
-            <a:r>
-              <a:rPr lang="en-US" sz="1300" dirty="0">
+              <a:t>What the numbers prove</a:t>
+            </a:r>
+            <a:endParaRPr lang="en-US" sz="1400" dirty="0"/>
+          </a:p>
+        </p:txBody>
+      </p:sp>
+      <p:sp>
+        <p:nvSpPr>
+          <p:cNvPr id="35" name="Text 33"/>
+          <p:cNvSpPr/>
+          <p:nvPr/>
+        </p:nvSpPr>
+        <p:spPr>
+          <a:xfrm>
+            <a:off x="6492240" y="3840480"/>
+            <a:ext cx="4937760" cy="1828800"/>
+          </a:xfrm>
+          <a:prstGeom prst="rect">
+            <a:avLst/>
+          </a:prstGeom>
+          <a:noFill/>
+          <a:ln/>
+        </p:spPr>
+        <p:txBody>
+          <a:bodyPr wrap="square" rtlCol="0" anchor="ctr"/>
+          <a:lstStyle/>
+          <a:p>
+            <a:pPr marL="342900" indent="-342900">
+              <a:spcAft>
+                <a:spcPts val="900"/>
+              </a:spcAft>
+              <a:buSzPct val="100000"/>
+              <a:buChar char="•"/>
+            </a:pPr>
+            <a:r>
+              <a:rPr lang="en-US" sz="1250" dirty="0">
                 <a:solidFill>
                   <a:srgbClr val="E6EDF6"/>
                 </a:solidFill>
@@ -8332,15 +9681,78 @@
                 <a:ea typeface="Calibri" pitchFamily="34" charset="-122"/>
                 <a:cs typeface="Calibri" pitchFamily="34" charset="-120"/>
               </a:rPr>
-              <a:t>Command-centre dashboard + 12-language citizen chatbot on WhatsApp/IVR/app.</a:t>
-            </a:r>
-            <a:endParaRPr lang="en-US" sz="1300" dirty="0"/>
-          </a:p>
-        </p:txBody>
-      </p:sp>
-      <p:sp>
-        <p:nvSpPr>
-          <p:cNvPr id="18" name="Text 16"/>
+              <a:t>Zero false positives on benign traffic — the evaluation's hardest bar for a citizen-facing tool.</a:t>
+            </a:r>
+            <a:endParaRPr lang="en-US" sz="1250" dirty="0"/>
+          </a:p>
+          <a:p>
+            <a:pPr marL="342900" indent="-342900">
+              <a:spcAft>
+                <a:spcPts val="900"/>
+              </a:spcAft>
+              <a:buSzPct val="100000"/>
+              <a:buChar char="•"/>
+            </a:pPr>
+            <a:r>
+              <a:rPr lang="en-US" sz="1250" dirty="0">
+                <a:solidFill>
+                  <a:srgbClr val="E6EDF6"/>
+                </a:solidFill>
+                <a:latin typeface="Calibri" pitchFamily="34" charset="0"/>
+                <a:ea typeface="Calibri" pitchFamily="34" charset="-122"/>
+                <a:cs typeface="Calibri" pitchFamily="34" charset="-120"/>
+              </a:rPr>
+              <a:t>Covers 7 scam families, not just digital-arrest.</a:t>
+            </a:r>
+            <a:endParaRPr lang="en-US" sz="1250" dirty="0"/>
+          </a:p>
+          <a:p>
+            <a:pPr marL="342900" indent="-342900">
+              <a:spcAft>
+                <a:spcPts val="900"/>
+              </a:spcAft>
+              <a:buSzPct val="100000"/>
+              <a:buChar char="•"/>
+            </a:pPr>
+            <a:r>
+              <a:rPr lang="en-US" sz="1250" dirty="0">
+                <a:solidFill>
+                  <a:srgbClr val="E6EDF6"/>
+                </a:solidFill>
+                <a:latin typeface="Calibri" pitchFamily="34" charset="0"/>
+                <a:ea typeface="Calibri" pitchFamily="34" charset="-122"/>
+                <a:cs typeface="Calibri" pitchFamily="34" charset="-120"/>
+              </a:rPr>
+              <a:t>Only misses are deliberately vague messages — shown openly, no cherry-picking.</a:t>
+            </a:r>
+            <a:endParaRPr lang="en-US" sz="1250" dirty="0"/>
+          </a:p>
+          <a:p>
+            <a:pPr marL="342900" indent="-342900">
+              <a:spcAft>
+                <a:spcPts val="900"/>
+              </a:spcAft>
+              <a:buSzPct val="100000"/>
+              <a:buChar char="•"/>
+            </a:pPr>
+            <a:r>
+              <a:rPr lang="en-US" sz="1250" dirty="0">
+                <a:solidFill>
+                  <a:srgbClr val="E6EDF6"/>
+                </a:solidFill>
+                <a:latin typeface="Calibri" pitchFamily="34" charset="0"/>
+                <a:ea typeface="Calibri" pitchFamily="34" charset="-122"/>
+                <a:cs typeface="Calibri" pitchFamily="34" charset="-120"/>
+              </a:rPr>
+              <a:t>Glass-box: every score traces to a matched phrase (court-admissible).</a:t>
+            </a:r>
+            <a:endParaRPr lang="en-US" sz="1250" dirty="0"/>
+          </a:p>
+        </p:txBody>
+      </p:sp>
+      <p:sp>
+        <p:nvSpPr>
+          <p:cNvPr id="36" name="Text 34"/>
           <p:cNvSpPr/>
           <p:nvPr/>
         </p:nvSpPr>
@@ -8379,7 +9791,7 @@
       </p:sp>
       <p:sp>
         <p:nvSpPr>
-          <p:cNvPr id="19" name="Text 17"/>
+          <p:cNvPr id="37" name="Text 35"/>
           <p:cNvSpPr/>
           <p:nvPr/>
         </p:nvSpPr>
@@ -8481,7 +9893,7 @@
                 <a:ea typeface="Cambria" pitchFamily="34" charset="-122"/>
                 <a:cs typeface="Cambria" pitchFamily="34" charset="-120"/>
               </a:rPr>
-              <a:t>Built today · production tomorrow</a:t>
+              <a:t>Impact &amp; alignment to judging criteria</a:t>
             </a:r>
             <a:endParaRPr lang="en-US" sz="2800" dirty="0"/>
           </a:p>
@@ -8496,11 +9908,11 @@
         <p:spPr>
           <a:xfrm>
             <a:off x="548640" y="1463040"/>
-            <a:ext cx="5486400" cy="4114800"/>
+            <a:ext cx="11064240" cy="731520"/>
           </a:xfrm>
           <a:prstGeom prst="roundRect">
             <a:avLst>
-              <a:gd name="adj" fmla="val 1778"/>
+              <a:gd name="adj" fmla="val 10000"/>
             </a:avLst>
           </a:prstGeom>
           <a:solidFill>
@@ -8529,8 +9941,8 @@
         </p:nvSpPr>
         <p:spPr>
           <a:xfrm>
-            <a:off x="777240" y="1645920"/>
-            <a:ext cx="5029200" cy="365760"/>
+            <a:off x="777240" y="1463040"/>
+            <a:ext cx="3291840" cy="731520"/>
           </a:xfrm>
           <a:prstGeom prst="rect">
             <a:avLst/>
@@ -8546,17 +9958,17 @@
               <a:buNone/>
             </a:pPr>
             <a:r>
-              <a:rPr lang="en-US" sz="1600" b="1" dirty="0">
-                <a:solidFill>
-                  <a:srgbClr val="2ECC71"/>
+              <a:rPr lang="en-US" sz="1450" b="1" dirty="0">
+                <a:solidFill>
+                  <a:srgbClr val="3EA6FF"/>
                 </a:solidFill>
                 <a:latin typeface="Cambria" pitchFamily="34" charset="0"/>
                 <a:ea typeface="Cambria" pitchFamily="34" charset="-122"/>
                 <a:cs typeface="Cambria" pitchFamily="34" charset="-120"/>
               </a:rPr>
-              <a:t>Working prototype (this build)</a:t>
-            </a:r>
-            <a:endParaRPr lang="en-US" sz="1600" dirty="0"/>
+              <a:t>Innovation (25%)</a:t>
+            </a:r>
+            <a:endParaRPr lang="en-US" sz="1450" dirty="0"/>
           </a:p>
         </p:txBody>
       </p:sp>
@@ -8568,25 +9980,21 @@
         </p:nvSpPr>
         <p:spPr>
           <a:xfrm>
-            <a:off x="777240" y="2148840"/>
-            <a:ext cx="5029200" cy="3108960"/>
-          </a:xfrm>
-          <a:prstGeom prst="rect">
-            <a:avLst/>
-          </a:prstGeom>
-          <a:noFill/>
-          <a:ln/>
-        </p:spPr>
-        <p:txBody>
-          <a:bodyPr wrap="square" rtlCol="0" anchor="ctr"/>
-          <a:lstStyle/>
-          <a:p>
-            <a:pPr marL="342900" indent="-342900">
-              <a:spcAft>
-                <a:spcPts val="1000"/>
-              </a:spcAft>
-              <a:buSzPct val="100000"/>
-              <a:buChar char="•"/>
+            <a:off x="4114800" y="1463040"/>
+            <a:ext cx="7315200" cy="731520"/>
+          </a:xfrm>
+          <a:prstGeom prst="rect">
+            <a:avLst/>
+          </a:prstGeom>
+          <a:noFill/>
+          <a:ln/>
+        </p:spPr>
+        <p:txBody>
+          <a:bodyPr wrap="square" rtlCol="0" anchor="ctr"/>
+          <a:lstStyle/>
+          <a:p>
+            <a:pPr indent="0" marL="0">
+              <a:buNone/>
             </a:pPr>
             <a:r>
               <a:rPr lang="en-US" sz="1300" dirty="0">
@@ -8597,73 +10005,10 @@
                 <a:ea typeface="Calibri" pitchFamily="34" charset="-122"/>
                 <a:cs typeface="Calibri" pitchFamily="34" charset="-120"/>
               </a:rPr>
-              <a:t>FastAPI backend, 5 live modules, one command-centre UI.</a:t>
+              <a:t>Kill-chain scam modelling + lead-time KPI + cross-domain entity fusion.</a:t>
             </a:r>
             <a:endParaRPr lang="en-US" sz="1300" dirty="0"/>
           </a:p>
-          <a:p>
-            <a:pPr marL="342900" indent="-342900">
-              <a:spcAft>
-                <a:spcPts val="1000"/>
-              </a:spcAft>
-              <a:buSzPct val="100000"/>
-              <a:buChar char="•"/>
-            </a:pPr>
-            <a:r>
-              <a:rPr lang="en-US" sz="1300" dirty="0">
-                <a:solidFill>
-                  <a:srgbClr val="E6EDF6"/>
-                </a:solidFill>
-                <a:latin typeface="Calibri" pitchFamily="34" charset="0"/>
-                <a:ea typeface="Calibri" pitchFamily="34" charset="-122"/>
-                <a:cs typeface="Calibri" pitchFamily="34" charset="-120"/>
-              </a:rPr>
-              <a:t>Explainable scam scorer + 7-feature note forensics (PIL/numpy).</a:t>
-            </a:r>
-            <a:endParaRPr lang="en-US" sz="1300" dirty="0"/>
-          </a:p>
-          <a:p>
-            <a:pPr marL="342900" indent="-342900">
-              <a:spcAft>
-                <a:spcPts val="1000"/>
-              </a:spcAft>
-              <a:buSzPct val="100000"/>
-              <a:buChar char="•"/>
-            </a:pPr>
-            <a:r>
-              <a:rPr lang="en-US" sz="1300" dirty="0">
-                <a:solidFill>
-                  <a:srgbClr val="E6EDF6"/>
-                </a:solidFill>
-                <a:latin typeface="Calibri" pitchFamily="34" charset="0"/>
-                <a:ea typeface="Calibri" pitchFamily="34" charset="-122"/>
-                <a:cs typeface="Calibri" pitchFamily="34" charset="-120"/>
-              </a:rPr>
-              <a:t>networkx graph engine with hashed intelligence packages.</a:t>
-            </a:r>
-            <a:endParaRPr lang="en-US" sz="1300" dirty="0"/>
-          </a:p>
-          <a:p>
-            <a:pPr marL="342900" indent="-342900">
-              <a:spcAft>
-                <a:spcPts val="1000"/>
-              </a:spcAft>
-              <a:buSzPct val="100000"/>
-              <a:buChar char="•"/>
-            </a:pPr>
-            <a:r>
-              <a:rPr lang="en-US" sz="1300" dirty="0">
-                <a:solidFill>
-                  <a:srgbClr val="E6EDF6"/>
-                </a:solidFill>
-                <a:latin typeface="Calibri" pitchFamily="34" charset="0"/>
-                <a:ea typeface="Calibri" pitchFamily="34" charset="-122"/>
-                <a:cs typeface="Calibri" pitchFamily="34" charset="-120"/>
-              </a:rPr>
-              <a:t>Leaflet command map + multilingual citizen chatbot.</a:t>
-            </a:r>
-            <a:endParaRPr lang="en-US" sz="1300" dirty="0"/>
-          </a:p>
         </p:txBody>
       </p:sp>
       <p:sp>
@@ -8674,12 +10019,12 @@
         </p:nvSpPr>
         <p:spPr>
           <a:xfrm>
-            <a:off x="6263640" y="1463040"/>
-            <a:ext cx="5349240" cy="4114800"/>
+            <a:off x="548640" y="2304288"/>
+            <a:ext cx="11064240" cy="731520"/>
           </a:xfrm>
           <a:prstGeom prst="roundRect">
             <a:avLst>
-              <a:gd name="adj" fmla="val 1778"/>
+              <a:gd name="adj" fmla="val 10000"/>
             </a:avLst>
           </a:prstGeom>
           <a:solidFill>
@@ -8708,8 +10053,8 @@
         </p:nvSpPr>
         <p:spPr>
           <a:xfrm>
-            <a:off x="6492240" y="1645920"/>
-            <a:ext cx="4937760" cy="365760"/>
+            <a:off x="777240" y="2304288"/>
+            <a:ext cx="3291840" cy="731520"/>
           </a:xfrm>
           <a:prstGeom prst="rect">
             <a:avLst/>
@@ -8725,7 +10070,7 @@
               <a:buNone/>
             </a:pPr>
             <a:r>
-              <a:rPr lang="en-US" sz="1600" b="1" dirty="0">
+              <a:rPr lang="en-US" sz="1450" b="1" dirty="0">
                 <a:solidFill>
                   <a:srgbClr val="3EA6FF"/>
                 </a:solidFill>
@@ -8733,9 +10078,9 @@
                 <a:ea typeface="Cambria" pitchFamily="34" charset="-122"/>
                 <a:cs typeface="Cambria" pitchFamily="34" charset="-120"/>
               </a:rPr>
-              <a:t>Production roadmap</a:t>
-            </a:r>
-            <a:endParaRPr lang="en-US" sz="1600" dirty="0"/>
+              <a:t>Business Impact (25%)</a:t>
+            </a:r>
+            <a:endParaRPr lang="en-US" sz="1450" dirty="0"/>
           </a:p>
         </p:txBody>
       </p:sp>
@@ -8747,25 +10092,21 @@
         </p:nvSpPr>
         <p:spPr>
           <a:xfrm>
-            <a:off x="6492240" y="2148840"/>
-            <a:ext cx="4937760" cy="3200400"/>
-          </a:xfrm>
-          <a:prstGeom prst="rect">
-            <a:avLst/>
-          </a:prstGeom>
-          <a:noFill/>
-          <a:ln/>
-        </p:spPr>
-        <p:txBody>
-          <a:bodyPr wrap="square" rtlCol="0" anchor="ctr"/>
-          <a:lstStyle/>
-          <a:p>
-            <a:pPr marL="342900" indent="-342900">
-              <a:spcAft>
-                <a:spcPts val="1000"/>
-              </a:spcAft>
-              <a:buSzPct val="100000"/>
-              <a:buChar char="•"/>
+            <a:off x="4114800" y="2304288"/>
+            <a:ext cx="7315200" cy="731520"/>
+          </a:xfrm>
+          <a:prstGeom prst="rect">
+            <a:avLst/>
+          </a:prstGeom>
+          <a:noFill/>
+          <a:ln/>
+        </p:spPr>
+        <p:txBody>
+          <a:bodyPr wrap="square" rtlCol="0" anchor="ctr"/>
+          <a:lstStyle/>
+          <a:p>
+            <a:pPr indent="0" marL="0">
+              <a:buNone/>
             </a:pPr>
             <a:r>
               <a:rPr lang="en-US" sz="1300" dirty="0">
@@ -8776,17 +10117,108 @@
                 <a:ea typeface="Calibri" pitchFamily="34" charset="-122"/>
                 <a:cs typeface="Calibri" pitchFamily="34" charset="-120"/>
               </a:rPr>
-              <a:t>Swap heuristics for fine-tuned models: transformer scam classifier, CNN/ViT per security ROI.</a:t>
+              <a:t>Targets a ₹1,776 Cr/yr loss vector; protects banks, telcos, citizens &amp; courts.</a:t>
             </a:r>
             <a:endParaRPr lang="en-US" sz="1300" dirty="0"/>
           </a:p>
-          <a:p>
-            <a:pPr marL="342900" indent="-342900">
-              <a:spcAft>
-                <a:spcPts val="1000"/>
-              </a:spcAft>
-              <a:buSzPct val="100000"/>
-              <a:buChar char="•"/>
+        </p:txBody>
+      </p:sp>
+      <p:sp>
+        <p:nvSpPr>
+          <p:cNvPr id="9" name="Shape 7"/>
+          <p:cNvSpPr/>
+          <p:nvPr/>
+        </p:nvSpPr>
+        <p:spPr>
+          <a:xfrm>
+            <a:off x="548640" y="3145536"/>
+            <a:ext cx="11064240" cy="731520"/>
+          </a:xfrm>
+          <a:prstGeom prst="roundRect">
+            <a:avLst>
+              <a:gd name="adj" fmla="val 10000"/>
+            </a:avLst>
+          </a:prstGeom>
+          <a:solidFill>
+            <a:srgbClr val="121826"/>
+          </a:solidFill>
+          <a:ln w="12700">
+            <a:solidFill>
+              <a:srgbClr val="1F2A3D"/>
+            </a:solidFill>
+            <a:prstDash val="solid"/>
+          </a:ln>
+          <a:effectLst>
+            <a:outerShdw sx="100000" sy="100000" kx="0" ky="0" algn="bl" rotWithShape="0" blurRad="88900" dist="38100" dir="5400000">
+              <a:srgbClr val="000000">
+                <a:alpha val="35000"/>
+              </a:srgbClr>
+            </a:outerShdw>
+          </a:effectLst>
+        </p:spPr>
+      </p:sp>
+      <p:sp>
+        <p:nvSpPr>
+          <p:cNvPr id="10" name="Text 8"/>
+          <p:cNvSpPr/>
+          <p:nvPr/>
+        </p:nvSpPr>
+        <p:spPr>
+          <a:xfrm>
+            <a:off x="777240" y="3145536"/>
+            <a:ext cx="3291840" cy="731520"/>
+          </a:xfrm>
+          <a:prstGeom prst="rect">
+            <a:avLst/>
+          </a:prstGeom>
+          <a:noFill/>
+          <a:ln/>
+        </p:spPr>
+        <p:txBody>
+          <a:bodyPr wrap="square" rtlCol="0" anchor="ctr"/>
+          <a:lstStyle/>
+          <a:p>
+            <a:pPr indent="0" marL="0">
+              <a:buNone/>
+            </a:pPr>
+            <a:r>
+              <a:rPr lang="en-US" sz="1450" b="1" dirty="0">
+                <a:solidFill>
+                  <a:srgbClr val="3EA6FF"/>
+                </a:solidFill>
+                <a:latin typeface="Cambria" pitchFamily="34" charset="0"/>
+                <a:ea typeface="Cambria" pitchFamily="34" charset="-122"/>
+                <a:cs typeface="Cambria" pitchFamily="34" charset="-120"/>
+              </a:rPr>
+              <a:t>Technical Excellence (20%)</a:t>
+            </a:r>
+            <a:endParaRPr lang="en-US" sz="1450" dirty="0"/>
+          </a:p>
+        </p:txBody>
+      </p:sp>
+      <p:sp>
+        <p:nvSpPr>
+          <p:cNvPr id="11" name="Text 9"/>
+          <p:cNvSpPr/>
+          <p:nvPr/>
+        </p:nvSpPr>
+        <p:spPr>
+          <a:xfrm>
+            <a:off x="4114800" y="3145536"/>
+            <a:ext cx="7315200" cy="731520"/>
+          </a:xfrm>
+          <a:prstGeom prst="rect">
+            <a:avLst/>
+          </a:prstGeom>
+          <a:noFill/>
+          <a:ln/>
+        </p:spPr>
+        <p:txBody>
+          <a:bodyPr wrap="square" rtlCol="0" anchor="ctr"/>
+          <a:lstStyle/>
+          <a:p>
+            <a:pPr indent="0" marL="0">
+              <a:buNone/>
             </a:pPr>
             <a:r>
               <a:rPr lang="en-US" sz="1300" dirty="0">
@@ -8797,17 +10229,108 @@
                 <a:ea typeface="Calibri" pitchFamily="34" charset="-122"/>
                 <a:cs typeface="Calibri" pitchFamily="34" charset="-120"/>
               </a:rPr>
-              <a:t>Speech-AI front-end for live synthetic-voice detection.</a:t>
+              <a:t>Graph AI, image forensics, explainable NLP, geospatial — in one API.</a:t>
             </a:r>
             <a:endParaRPr lang="en-US" sz="1300" dirty="0"/>
           </a:p>
-          <a:p>
-            <a:pPr marL="342900" indent="-342900">
-              <a:spcAft>
-                <a:spcPts val="1000"/>
-              </a:spcAft>
-              <a:buSzPct val="100000"/>
-              <a:buChar char="•"/>
+        </p:txBody>
+      </p:sp>
+      <p:sp>
+        <p:nvSpPr>
+          <p:cNvPr id="12" name="Shape 10"/>
+          <p:cNvSpPr/>
+          <p:nvPr/>
+        </p:nvSpPr>
+        <p:spPr>
+          <a:xfrm>
+            <a:off x="548640" y="3986784"/>
+            <a:ext cx="11064240" cy="731520"/>
+          </a:xfrm>
+          <a:prstGeom prst="roundRect">
+            <a:avLst>
+              <a:gd name="adj" fmla="val 10000"/>
+            </a:avLst>
+          </a:prstGeom>
+          <a:solidFill>
+            <a:srgbClr val="0F1420"/>
+          </a:solidFill>
+          <a:ln w="12700">
+            <a:solidFill>
+              <a:srgbClr val="1F2A3D"/>
+            </a:solidFill>
+            <a:prstDash val="solid"/>
+          </a:ln>
+          <a:effectLst>
+            <a:outerShdw sx="100000" sy="100000" kx="0" ky="0" algn="bl" rotWithShape="0" blurRad="88900" dist="38100" dir="5400000">
+              <a:srgbClr val="000000">
+                <a:alpha val="35000"/>
+              </a:srgbClr>
+            </a:outerShdw>
+          </a:effectLst>
+        </p:spPr>
+      </p:sp>
+      <p:sp>
+        <p:nvSpPr>
+          <p:cNvPr id="13" name="Text 11"/>
+          <p:cNvSpPr/>
+          <p:nvPr/>
+        </p:nvSpPr>
+        <p:spPr>
+          <a:xfrm>
+            <a:off x="777240" y="3986784"/>
+            <a:ext cx="3291840" cy="731520"/>
+          </a:xfrm>
+          <a:prstGeom prst="rect">
+            <a:avLst/>
+          </a:prstGeom>
+          <a:noFill/>
+          <a:ln/>
+        </p:spPr>
+        <p:txBody>
+          <a:bodyPr wrap="square" rtlCol="0" anchor="ctr"/>
+          <a:lstStyle/>
+          <a:p>
+            <a:pPr indent="0" marL="0">
+              <a:buNone/>
+            </a:pPr>
+            <a:r>
+              <a:rPr lang="en-US" sz="1450" b="1" dirty="0">
+                <a:solidFill>
+                  <a:srgbClr val="3EA6FF"/>
+                </a:solidFill>
+                <a:latin typeface="Cambria" pitchFamily="34" charset="0"/>
+                <a:ea typeface="Cambria" pitchFamily="34" charset="-122"/>
+                <a:cs typeface="Cambria" pitchFamily="34" charset="-120"/>
+              </a:rPr>
+              <a:t>Scalability (15%)</a:t>
+            </a:r>
+            <a:endParaRPr lang="en-US" sz="1450" dirty="0"/>
+          </a:p>
+        </p:txBody>
+      </p:sp>
+      <p:sp>
+        <p:nvSpPr>
+          <p:cNvPr id="14" name="Text 12"/>
+          <p:cNvSpPr/>
+          <p:nvPr/>
+        </p:nvSpPr>
+        <p:spPr>
+          <a:xfrm>
+            <a:off x="4114800" y="3986784"/>
+            <a:ext cx="7315200" cy="731520"/>
+          </a:xfrm>
+          <a:prstGeom prst="rect">
+            <a:avLst/>
+          </a:prstGeom>
+          <a:noFill/>
+          <a:ln/>
+        </p:spPr>
+        <p:txBody>
+          <a:bodyPr wrap="square" rtlCol="0" anchor="ctr"/>
+          <a:lstStyle/>
+          <a:p>
+            <a:pPr indent="0" marL="0">
+              <a:buNone/>
             </a:pPr>
             <a:r>
               <a:rPr lang="en-US" sz="1300" dirty="0">
@@ -8818,17 +10341,108 @@
                 <a:ea typeface="Calibri" pitchFamily="34" charset="-122"/>
                 <a:cs typeface="Calibri" pitchFamily="34" charset="-120"/>
               </a:rPr>
-              <a:t>IndicTrans + LLM for full 12-language NLG.</a:t>
+              <a:t>Stateless services; add scam templates without retraining; per-module scale-out.</a:t>
             </a:r>
             <a:endParaRPr lang="en-US" sz="1300" dirty="0"/>
           </a:p>
-          <a:p>
-            <a:pPr marL="342900" indent="-342900">
-              <a:spcAft>
-                <a:spcPts val="1000"/>
-              </a:spcAft>
-              <a:buSzPct val="100000"/>
-              <a:buChar char="•"/>
+        </p:txBody>
+      </p:sp>
+      <p:sp>
+        <p:nvSpPr>
+          <p:cNvPr id="15" name="Shape 13"/>
+          <p:cNvSpPr/>
+          <p:nvPr/>
+        </p:nvSpPr>
+        <p:spPr>
+          <a:xfrm>
+            <a:off x="548640" y="4828032"/>
+            <a:ext cx="11064240" cy="731520"/>
+          </a:xfrm>
+          <a:prstGeom prst="roundRect">
+            <a:avLst>
+              <a:gd name="adj" fmla="val 10000"/>
+            </a:avLst>
+          </a:prstGeom>
+          <a:solidFill>
+            <a:srgbClr val="121826"/>
+          </a:solidFill>
+          <a:ln w="12700">
+            <a:solidFill>
+              <a:srgbClr val="1F2A3D"/>
+            </a:solidFill>
+            <a:prstDash val="solid"/>
+          </a:ln>
+          <a:effectLst>
+            <a:outerShdw sx="100000" sy="100000" kx="0" ky="0" algn="bl" rotWithShape="0" blurRad="88900" dist="38100" dir="5400000">
+              <a:srgbClr val="000000">
+                <a:alpha val="35000"/>
+              </a:srgbClr>
+            </a:outerShdw>
+          </a:effectLst>
+        </p:spPr>
+      </p:sp>
+      <p:sp>
+        <p:nvSpPr>
+          <p:cNvPr id="16" name="Text 14"/>
+          <p:cNvSpPr/>
+          <p:nvPr/>
+        </p:nvSpPr>
+        <p:spPr>
+          <a:xfrm>
+            <a:off x="777240" y="4828032"/>
+            <a:ext cx="3291840" cy="731520"/>
+          </a:xfrm>
+          <a:prstGeom prst="rect">
+            <a:avLst/>
+          </a:prstGeom>
+          <a:noFill/>
+          <a:ln/>
+        </p:spPr>
+        <p:txBody>
+          <a:bodyPr wrap="square" rtlCol="0" anchor="ctr"/>
+          <a:lstStyle/>
+          <a:p>
+            <a:pPr indent="0" marL="0">
+              <a:buNone/>
+            </a:pPr>
+            <a:r>
+              <a:rPr lang="en-US" sz="1450" b="1" dirty="0">
+                <a:solidFill>
+                  <a:srgbClr val="3EA6FF"/>
+                </a:solidFill>
+                <a:latin typeface="Cambria" pitchFamily="34" charset="0"/>
+                <a:ea typeface="Cambria" pitchFamily="34" charset="-122"/>
+                <a:cs typeface="Cambria" pitchFamily="34" charset="-120"/>
+              </a:rPr>
+              <a:t>User Experience (15%)</a:t>
+            </a:r>
+            <a:endParaRPr lang="en-US" sz="1450" dirty="0"/>
+          </a:p>
+        </p:txBody>
+      </p:sp>
+      <p:sp>
+        <p:nvSpPr>
+          <p:cNvPr id="17" name="Text 15"/>
+          <p:cNvSpPr/>
+          <p:nvPr/>
+        </p:nvSpPr>
+        <p:spPr>
+          <a:xfrm>
+            <a:off x="4114800" y="4828032"/>
+            <a:ext cx="7315200" cy="731520"/>
+          </a:xfrm>
+          <a:prstGeom prst="rect">
+            <a:avLst/>
+          </a:prstGeom>
+          <a:noFill/>
+          <a:ln/>
+        </p:spPr>
+        <p:txBody>
+          <a:bodyPr wrap="square" rtlCol="0" anchor="ctr"/>
+          <a:lstStyle/>
+          <a:p>
+            <a:pPr indent="0" marL="0">
+              <a:buNone/>
             </a:pPr>
             <a:r>
               <a:rPr lang="en-US" sz="1300" dirty="0">
@@ -8839,36 +10453,15 @@
                 <a:ea typeface="Calibri" pitchFamily="34" charset="-122"/>
                 <a:cs typeface="Calibri" pitchFamily="34" charset="-120"/>
               </a:rPr>
-              <a:t>Real connectors: TSP CDR, NPCI/UPI, bank STR, NCRP/1930, I4C.</a:t>
+              <a:t>Command-centre dashboard + 12-language citizen chatbot on WhatsApp/IVR/app.</a:t>
             </a:r>
             <a:endParaRPr lang="en-US" sz="1300" dirty="0"/>
           </a:p>
-          <a:p>
-            <a:pPr marL="342900" indent="-342900">
-              <a:spcAft>
-                <a:spcPts val="1000"/>
-              </a:spcAft>
-              <a:buSzPct val="100000"/>
-              <a:buChar char="•"/>
-            </a:pPr>
-            <a:r>
-              <a:rPr lang="en-US" sz="1300" dirty="0">
-                <a:solidFill>
-                  <a:srgbClr val="E6EDF6"/>
-                </a:solidFill>
-                <a:latin typeface="Calibri" pitchFamily="34" charset="0"/>
-                <a:ea typeface="Calibri" pitchFamily="34" charset="-122"/>
-                <a:cs typeface="Calibri" pitchFamily="34" charset="-120"/>
-              </a:rPr>
-              <a:t>PII tokenisation at ingest; signed append-only audit ledger.</a:t>
-            </a:r>
-            <a:endParaRPr lang="en-US" sz="1300" dirty="0"/>
-          </a:p>
-        </p:txBody>
-      </p:sp>
-      <p:sp>
-        <p:nvSpPr>
-          <p:cNvPr id="9" name="Text 7"/>
+        </p:txBody>
+      </p:sp>
+      <p:sp>
+        <p:nvSpPr>
+          <p:cNvPr id="18" name="Text 16"/>
           <p:cNvSpPr/>
           <p:nvPr/>
         </p:nvSpPr>
@@ -8907,7 +10500,7 @@
       </p:sp>
       <p:sp>
         <p:nvSpPr>
-          <p:cNvPr id="10" name="Text 8"/>
+          <p:cNvPr id="19" name="Text 17"/>
           <p:cNvSpPr/>
           <p:nvPr/>
         </p:nvSpPr>

--- a/docs/Prahari_Pitch_Deck.pptx
+++ b/docs/Prahari_Pitch_Deck.pptx
@@ -9758,6 +9758,59 @@
         </p:nvSpPr>
         <p:spPr>
           <a:xfrm>
+            <a:off x="548640" y="5897880"/>
+            <a:ext cx="11064240" cy="411480"/>
+          </a:xfrm>
+          <a:prstGeom prst="rect">
+            <a:avLst/>
+          </a:prstGeom>
+          <a:noFill/>
+          <a:ln/>
+        </p:spPr>
+        <p:txBody>
+          <a:bodyPr wrap="square" rtlCol="0" anchor="ctr"/>
+          <a:lstStyle/>
+          <a:p>
+            <a:pPr algn="ctr" indent="0" marL="0">
+              <a:buNone/>
+            </a:pPr>
+            <a:r>
+              <a:rPr lang="en-US" sz="1250" b="1" dirty="0">
+                <a:solidFill>
+                  <a:srgbClr val="F5A623"/>
+                </a:solidFill>
+                <a:latin typeface="Calibri" pitchFamily="34" charset="0"/>
+                <a:ea typeface="Calibri" pitchFamily="34" charset="-122"/>
+                <a:cs typeface="Calibri" pitchFamily="34" charset="-120"/>
+              </a:rPr>
+              <a:t>Counterfeit agent:  </a:t>
+            </a:r>
+            <a:pPr algn="ctr" indent="0" marL="0">
+              <a:buNone/>
+            </a:pPr>
+            <a:r>
+              <a:rPr lang="en-US" sz="1250" dirty="0">
+                <a:solidFill>
+                  <a:srgbClr val="E6EDF6"/>
+                </a:solidFill>
+                <a:latin typeface="Calibri" pitchFamily="34" charset="0"/>
+                <a:ea typeface="Calibri" pitchFamily="34" charset="-122"/>
+                <a:cs typeface="Calibri" pitchFamily="34" charset="-120"/>
+              </a:rPr>
+              <a:t>100% genuine-acceptance · 0% false-rejection across all 6 denominations (12 genuine RBI notes) · synthetic fake detected.</a:t>
+            </a:r>
+            <a:endParaRPr lang="en-US" sz="1250" dirty="0"/>
+          </a:p>
+        </p:txBody>
+      </p:sp>
+      <p:sp>
+        <p:nvSpPr>
+          <p:cNvPr id="37" name="Text 35"/>
+          <p:cNvSpPr/>
+          <p:nvPr/>
+        </p:nvSpPr>
+        <p:spPr>
+          <a:xfrm>
             <a:off x="457200" y="6473952"/>
             <a:ext cx="7315200" cy="274320"/>
           </a:xfrm>
@@ -9791,7 +9844,7 @@
       </p:sp>
       <p:sp>
         <p:nvSpPr>
-          <p:cNvPr id="37" name="Text 35"/>
+          <p:cNvPr id="38" name="Text 36"/>
           <p:cNvSpPr/>
           <p:nvPr/>
         </p:nvSpPr>

--- a/docs/Prahari_Pitch_Deck.pptx
+++ b/docs/Prahari_Pitch_Deck.pptx
@@ -2575,13 +2575,13 @@
           <a:p>
             <a:pPr marL="342900" indent="-342900">
               <a:spcAft>
-                <a:spcPts val="1000"/>
+                <a:spcPts val="700"/>
               </a:spcAft>
               <a:buSzPct val="100000"/>
               <a:buChar char="•"/>
             </a:pPr>
             <a:r>
-              <a:rPr lang="en-US" sz="1300" dirty="0">
+              <a:rPr lang="en-US" sz="1250" dirty="0">
                 <a:solidFill>
                   <a:srgbClr val="E6EDF6"/>
                 </a:solidFill>
@@ -2591,18 +2591,18 @@
               </a:rPr>
               <a:t>FastAPI backend, 5 live modules, one command-centre UI.</a:t>
             </a:r>
-            <a:endParaRPr lang="en-US" sz="1300" dirty="0"/>
+            <a:endParaRPr lang="en-US" sz="1250" dirty="0"/>
           </a:p>
           <a:p>
             <a:pPr marL="342900" indent="-342900">
               <a:spcAft>
-                <a:spcPts val="1000"/>
+                <a:spcPts val="700"/>
               </a:spcAft>
               <a:buSzPct val="100000"/>
               <a:buChar char="•"/>
             </a:pPr>
             <a:r>
-              <a:rPr lang="en-US" sz="1300" dirty="0">
+              <a:rPr lang="en-US" sz="1250" dirty="0">
                 <a:solidFill>
                   <a:srgbClr val="E6EDF6"/>
                 </a:solidFill>
@@ -2610,20 +2610,20 @@
                 <a:ea typeface="Calibri" pitchFamily="34" charset="-122"/>
                 <a:cs typeface="Calibri" pitchFamily="34" charset="-120"/>
               </a:rPr>
-              <a:t>Explainable scam scorer + 7-feature note forensics (PIL/numpy).</a:t>
-            </a:r>
-            <a:endParaRPr lang="en-US" sz="1300" dirty="0"/>
+              <a:t>Explainable scam scorer (7 families) with exact per-signal attribution.</a:t>
+            </a:r>
+            <a:endParaRPr lang="en-US" sz="1250" dirty="0"/>
           </a:p>
           <a:p>
             <a:pPr marL="342900" indent="-342900">
               <a:spcAft>
-                <a:spcPts val="1000"/>
+                <a:spcPts val="700"/>
               </a:spcAft>
               <a:buSzPct val="100000"/>
               <a:buChar char="•"/>
             </a:pPr>
             <a:r>
-              <a:rPr lang="en-US" sz="1300" dirty="0">
+              <a:rPr lang="en-US" sz="1250" dirty="0">
                 <a:solidFill>
                   <a:srgbClr val="E6EDF6"/>
                 </a:solidFill>
@@ -2631,20 +2631,20 @@
                 <a:ea typeface="Calibri" pitchFamily="34" charset="-122"/>
                 <a:cs typeface="Calibri" pitchFamily="34" charset="-120"/>
               </a:rPr>
-              <a:t>networkx graph engine with hashed intelligence packages.</a:t>
-            </a:r>
-            <a:endParaRPr lang="en-US" sz="1300" dirty="0"/>
+              <a:t>9-feature note forensics across ₹10–₹2000, calibrated on genuine notes.</a:t>
+            </a:r>
+            <a:endParaRPr lang="en-US" sz="1250" dirty="0"/>
           </a:p>
           <a:p>
             <a:pPr marL="342900" indent="-342900">
               <a:spcAft>
-                <a:spcPts val="1000"/>
+                <a:spcPts val="700"/>
               </a:spcAft>
               <a:buSzPct val="100000"/>
               <a:buChar char="•"/>
             </a:pPr>
             <a:r>
-              <a:rPr lang="en-US" sz="1300" dirty="0">
+              <a:rPr lang="en-US" sz="1250" dirty="0">
                 <a:solidFill>
                   <a:srgbClr val="E6EDF6"/>
                 </a:solidFill>
@@ -2652,9 +2652,51 @@
                 <a:ea typeface="Calibri" pitchFamily="34" charset="-122"/>
                 <a:cs typeface="Calibri" pitchFamily="34" charset="-120"/>
               </a:rPr>
-              <a:t>Leaflet command map + multilingual citizen chatbot.</a:t>
-            </a:r>
-            <a:endParaRPr lang="en-US" sz="1300" dirty="0"/>
+              <a:t>Graph community detection (modularity) + lead-time KPI.</a:t>
+            </a:r>
+            <a:endParaRPr lang="en-US" sz="1250" dirty="0"/>
+          </a:p>
+          <a:p>
+            <a:pPr marL="342900" indent="-342900">
+              <a:spcAft>
+                <a:spcPts val="700"/>
+              </a:spcAft>
+              <a:buSzPct val="100000"/>
+              <a:buChar char="•"/>
+            </a:pPr>
+            <a:r>
+              <a:rPr lang="en-US" sz="1250" dirty="0">
+                <a:solidFill>
+                  <a:srgbClr val="E6EDF6"/>
+                </a:solidFill>
+                <a:latin typeface="Calibri" pitchFamily="34" charset="0"/>
+                <a:ea typeface="Calibri" pitchFamily="34" charset="-122"/>
+                <a:cs typeface="Calibri" pitchFamily="34" charset="-120"/>
+              </a:rPr>
+              <a:t>On-device OCR screenshot intake + 12-language citizen chatbot.</a:t>
+            </a:r>
+            <a:endParaRPr lang="en-US" sz="1250" dirty="0"/>
+          </a:p>
+          <a:p>
+            <a:pPr marL="342900" indent="-342900">
+              <a:spcAft>
+                <a:spcPts val="700"/>
+              </a:spcAft>
+              <a:buSzPct val="100000"/>
+              <a:buChar char="•"/>
+            </a:pPr>
+            <a:r>
+              <a:rPr lang="en-US" sz="1250" dirty="0">
+                <a:solidFill>
+                  <a:srgbClr val="E6EDF6"/>
+                </a:solidFill>
+                <a:latin typeface="Calibri" pitchFamily="34" charset="0"/>
+                <a:ea typeface="Calibri" pitchFamily="34" charset="-122"/>
+                <a:cs typeface="Calibri" pitchFamily="34" charset="-120"/>
+              </a:rPr>
+              <a:t>Tamper-evident hash-chained audit ledger for admissibility.</a:t>
+            </a:r>
+            <a:endParaRPr lang="en-US" sz="1250" dirty="0"/>
           </a:p>
         </p:txBody>
       </p:sp>

--- a/docs/Prahari_Pitch_Deck.pptx
+++ b/docs/Prahari_Pitch_Deck.pptx
@@ -2610,7 +2610,7 @@
                 <a:ea typeface="Calibri" pitchFamily="34" charset="-122"/>
                 <a:cs typeface="Calibri" pitchFamily="34" charset="-120"/>
               </a:rPr>
-              <a:t>Explainable scam scorer (7 families) with exact per-signal attribution.</a:t>
+              <a:t>Explainable scam scorer (12 categories) with exact per-signal attribution.</a:t>
             </a:r>
             <a:endParaRPr lang="en-US" sz="1250" dirty="0"/>
           </a:p>
@@ -2652,7 +2652,28 @@
                 <a:ea typeface="Calibri" pitchFamily="34" charset="-122"/>
                 <a:cs typeface="Calibri" pitchFamily="34" charset="-120"/>
               </a:rPr>
-              <a:t>Graph community detection (modularity) + lead-time KPI.</a:t>
+              <a:t>Indian-context graph (UPI/wallet/crypto) + modularity community detection + lead-time.</a:t>
+            </a:r>
+            <a:endParaRPr lang="en-US" sz="1250" dirty="0"/>
+          </a:p>
+          <a:p>
+            <a:pPr marL="342900" indent="-342900">
+              <a:spcAft>
+                <a:spcPts val="700"/>
+              </a:spcAft>
+              <a:buSzPct val="100000"/>
+              <a:buChar char="•"/>
+            </a:pPr>
+            <a:r>
+              <a:rPr lang="en-US" sz="1250" dirty="0">
+                <a:solidFill>
+                  <a:srgbClr val="E6EDF6"/>
+                </a:solidFill>
+                <a:latin typeface="Calibri" pitchFamily="34" charset="0"/>
+                <a:ea typeface="Calibri" pitchFamily="34" charset="-122"/>
+                <a:cs typeface="Calibri" pitchFamily="34" charset="-120"/>
+              </a:rPr>
+              <a:t>Real NCRB state cybercrime data on the geospatial layer.</a:t>
             </a:r>
             <a:endParaRPr lang="en-US" sz="1250" dirty="0"/>
           </a:p>
@@ -8655,7 +8676,7 @@
                 <a:ea typeface="Cambria" pitchFamily="34" charset="-122"/>
                 <a:cs typeface="Cambria" pitchFamily="34" charset="-120"/>
               </a:rPr>
-              <a:t>92.3%</a:t>
+              <a:t>96.9%</a:t>
             </a:r>
             <a:endParaRPr lang="en-US" sz="3000" dirty="0"/>
           </a:p>
@@ -8767,7 +8788,7 @@
                 <a:ea typeface="Cambria" pitchFamily="34" charset="-122"/>
                 <a:cs typeface="Cambria" pitchFamily="34" charset="-120"/>
               </a:rPr>
-              <a:t>96.0%</a:t>
+              <a:t>98.4%</a:t>
             </a:r>
             <a:endParaRPr lang="en-US" sz="3000" dirty="0"/>
           </a:p>
@@ -8879,7 +8900,7 @@
                 <a:ea typeface="Cambria" pitchFamily="34" charset="-122"/>
                 <a:cs typeface="Cambria" pitchFamily="34" charset="-120"/>
               </a:rPr>
-              <a:t>95.7%</a:t>
+              <a:t>97.8%</a:t>
             </a:r>
             <a:endParaRPr lang="en-US" sz="3000" dirty="0"/>
           </a:p>
@@ -9079,7 +9100,7 @@
         <p:spPr>
           <a:xfrm>
             <a:off x="777240" y="3401568"/>
-            <a:ext cx="5029200" cy="365760"/>
+            <a:ext cx="5212080" cy="365760"/>
           </a:xfrm>
           <a:prstGeom prst="rect">
             <a:avLst/>
@@ -9095,7 +9116,7 @@
               <a:buNone/>
             </a:pPr>
             <a:r>
-              <a:rPr lang="en-US" sz="1400" b="1" dirty="0">
+              <a:rPr lang="en-US" sz="1300" b="1" dirty="0">
                 <a:solidFill>
                   <a:srgbClr val="3EA6FF"/>
                 </a:solidFill>
@@ -9103,9 +9124,9 @@
                 <a:ea typeface="Cambria" pitchFamily="34" charset="-122"/>
                 <a:cs typeface="Cambria" pitchFamily="34" charset="-120"/>
               </a:rPr>
-              <a:t>Confusion matrix (46 messages)</a:t>
-            </a:r>
-            <a:endParaRPr lang="en-US" sz="1400" dirty="0"/>
+              <a:t>Confusion matrix (92 messages · 12 scam categories)</a:t>
+            </a:r>
+            <a:endParaRPr lang="en-US" sz="1300" dirty="0"/>
           </a:p>
         </p:txBody>
       </p:sp>
@@ -9332,7 +9353,7 @@
                 <a:ea typeface="Calibri" pitchFamily="34" charset="-122"/>
                 <a:cs typeface="Calibri" pitchFamily="34" charset="-120"/>
               </a:rPr>
-              <a:t>24  </a:t>
+              <a:t>63  </a:t>
             </a:r>
             <a:pPr algn="ctr" indent="0" marL="0">
               <a:buNone/>
@@ -9593,7 +9614,7 @@
                 <a:ea typeface="Calibri" pitchFamily="34" charset="-122"/>
                 <a:cs typeface="Calibri" pitchFamily="34" charset="-120"/>
               </a:rPr>
-              <a:t>20  </a:t>
+              <a:t>27  </a:t>
             </a:r>
             <a:pPr algn="ctr" indent="0" marL="0">
               <a:buNone/>

--- a/docs/Prahari_Pitch_Deck.pptx
+++ b/docs/Prahari_Pitch_Deck.pptx
@@ -8676,7 +8676,7 @@
                 <a:ea typeface="Cambria" pitchFamily="34" charset="-122"/>
                 <a:cs typeface="Cambria" pitchFamily="34" charset="-120"/>
               </a:rPr>
-              <a:t>96.9%</a:t>
+              <a:t>97.1%</a:t>
             </a:r>
             <a:endParaRPr lang="en-US" sz="3000" dirty="0"/>
           </a:p>
@@ -8788,7 +8788,7 @@
                 <a:ea typeface="Cambria" pitchFamily="34" charset="-122"/>
                 <a:cs typeface="Cambria" pitchFamily="34" charset="-120"/>
               </a:rPr>
-              <a:t>98.4%</a:t>
+              <a:t>98.5%</a:t>
             </a:r>
             <a:endParaRPr lang="en-US" sz="3000" dirty="0"/>
           </a:p>
@@ -8900,7 +8900,7 @@
                 <a:ea typeface="Cambria" pitchFamily="34" charset="-122"/>
                 <a:cs typeface="Cambria" pitchFamily="34" charset="-120"/>
               </a:rPr>
-              <a:t>97.8%</a:t>
+              <a:t>97.9%</a:t>
             </a:r>
             <a:endParaRPr lang="en-US" sz="3000" dirty="0"/>
           </a:p>
@@ -9124,7 +9124,7 @@
                 <a:ea typeface="Cambria" pitchFamily="34" charset="-122"/>
                 <a:cs typeface="Cambria" pitchFamily="34" charset="-120"/>
               </a:rPr>
-              <a:t>Confusion matrix (92 messages · 12 scam categories)</a:t>
+              <a:t>Confusion matrix (96 messages · 13 scam categories)</a:t>
             </a:r>
             <a:endParaRPr lang="en-US" sz="1300" dirty="0"/>
           </a:p>
@@ -9353,7 +9353,7 @@
                 <a:ea typeface="Calibri" pitchFamily="34" charset="-122"/>
                 <a:cs typeface="Calibri" pitchFamily="34" charset="-120"/>
               </a:rPr>
-              <a:t>63  </a:t>
+              <a:t>67  </a:t>
             </a:r>
             <a:pPr algn="ctr" indent="0" marL="0">
               <a:buNone/>

--- a/docs/Prahari_Pitch_Deck.pptx
+++ b/docs/Prahari_Pitch_Deck.pptx
@@ -9730,13 +9730,13 @@
           <a:p>
             <a:pPr marL="342900" indent="-342900">
               <a:spcAft>
-                <a:spcPts val="900"/>
+                <a:spcPts val="700"/>
               </a:spcAft>
               <a:buSzPct val="100000"/>
               <a:buChar char="•"/>
             </a:pPr>
             <a:r>
-              <a:rPr lang="en-US" sz="1250" dirty="0">
+              <a:rPr lang="en-US" sz="1200" dirty="0">
                 <a:solidFill>
                   <a:srgbClr val="E6EDF6"/>
                 </a:solidFill>
@@ -9746,18 +9746,18 @@
               </a:rPr>
               <a:t>Zero false positives on benign traffic — the evaluation's hardest bar for a citizen-facing tool.</a:t>
             </a:r>
-            <a:endParaRPr lang="en-US" sz="1250" dirty="0"/>
+            <a:endParaRPr lang="en-US" sz="1200" dirty="0"/>
           </a:p>
           <a:p>
             <a:pPr marL="342900" indent="-342900">
               <a:spcAft>
-                <a:spcPts val="900"/>
+                <a:spcPts val="700"/>
               </a:spcAft>
               <a:buSzPct val="100000"/>
               <a:buChar char="•"/>
             </a:pPr>
             <a:r>
-              <a:rPr lang="en-US" sz="1250" dirty="0">
+              <a:rPr lang="en-US" sz="1200" dirty="0">
                 <a:solidFill>
                   <a:srgbClr val="E6EDF6"/>
                 </a:solidFill>
@@ -9767,18 +9767,18 @@
               </a:rPr>
               <a:t>Covers 7 scam families, not just digital-arrest.</a:t>
             </a:r>
-            <a:endParaRPr lang="en-US" sz="1250" dirty="0"/>
+            <a:endParaRPr lang="en-US" sz="1200" dirty="0"/>
           </a:p>
           <a:p>
             <a:pPr marL="342900" indent="-342900">
               <a:spcAft>
-                <a:spcPts val="900"/>
+                <a:spcPts val="700"/>
               </a:spcAft>
               <a:buSzPct val="100000"/>
               <a:buChar char="•"/>
             </a:pPr>
             <a:r>
-              <a:rPr lang="en-US" sz="1250" dirty="0">
+              <a:rPr lang="en-US" sz="1200" dirty="0">
                 <a:solidFill>
                   <a:srgbClr val="E6EDF6"/>
                 </a:solidFill>
@@ -9788,18 +9788,18 @@
               </a:rPr>
               <a:t>Only misses are deliberately vague messages — shown openly, no cherry-picking.</a:t>
             </a:r>
-            <a:endParaRPr lang="en-US" sz="1250" dirty="0"/>
+            <a:endParaRPr lang="en-US" sz="1200" dirty="0"/>
           </a:p>
           <a:p>
             <a:pPr marL="342900" indent="-342900">
               <a:spcAft>
-                <a:spcPts val="900"/>
+                <a:spcPts val="700"/>
               </a:spcAft>
               <a:buSzPct val="100000"/>
               <a:buChar char="•"/>
             </a:pPr>
             <a:r>
-              <a:rPr lang="en-US" sz="1250" dirty="0">
+              <a:rPr lang="en-US" sz="1200" dirty="0">
                 <a:solidFill>
                   <a:srgbClr val="E6EDF6"/>
                 </a:solidFill>
@@ -9807,9 +9807,30 @@
                 <a:ea typeface="Calibri" pitchFamily="34" charset="-122"/>
                 <a:cs typeface="Calibri" pitchFamily="34" charset="-120"/>
               </a:rPr>
+              <a:t>Validated on real data: 0.10% false-positive rate on 4,827 genuine SMS (UCI corpus).</a:t>
+            </a:r>
+            <a:endParaRPr lang="en-US" sz="1200" dirty="0"/>
+          </a:p>
+          <a:p>
+            <a:pPr marL="342900" indent="-342900">
+              <a:spcAft>
+                <a:spcPts val="700"/>
+              </a:spcAft>
+              <a:buSzPct val="100000"/>
+              <a:buChar char="•"/>
+            </a:pPr>
+            <a:r>
+              <a:rPr lang="en-US" sz="1200" dirty="0">
+                <a:solidFill>
+                  <a:srgbClr val="E6EDF6"/>
+                </a:solidFill>
+                <a:latin typeface="Calibri" pitchFamily="34" charset="0"/>
+                <a:ea typeface="Calibri" pitchFamily="34" charset="-122"/>
+                <a:cs typeface="Calibri" pitchFamily="34" charset="-120"/>
+              </a:rPr>
               <a:t>Glass-box: every score traces to a matched phrase (court-admissible).</a:t>
             </a:r>
-            <a:endParaRPr lang="en-US" sz="1250" dirty="0"/>
+            <a:endParaRPr lang="en-US" sz="1200" dirty="0"/>
           </a:p>
         </p:txBody>
       </p:sp>

--- a/docs/Prahari_Pitch_Deck.pptx
+++ b/docs/Prahari_Pitch_Deck.pptx
@@ -9807,7 +9807,7 @@
                 <a:ea typeface="Calibri" pitchFamily="34" charset="-122"/>
                 <a:cs typeface="Calibri" pitchFamily="34" charset="-120"/>
               </a:rPr>
-              <a:t>Validated on real data: 0.10% false-positive rate on 4,827 genuine SMS (UCI corpus).</a:t>
+              <a:t>Real India UPI fraud data: 1,000 cases (₹1.59 cr) by type / lure / app / state.</a:t>
             </a:r>
             <a:endParaRPr lang="en-US" sz="1200" dirty="0"/>
           </a:p>

--- a/docs/Prahari_Pitch_Deck.pptx
+++ b/docs/Prahari_Pitch_Deck.pptx
@@ -3347,7 +3347,7 @@
                 <a:ea typeface="Cambria" pitchFamily="34" charset="-122"/>
                 <a:cs typeface="Cambria" pitchFamily="34" charset="-120"/>
               </a:rPr>
-              <a:t>1.14M</a:t>
+              <a:t>₹22,845 Cr</a:t>
             </a:r>
             <a:endParaRPr lang="en-US" sz="4000" dirty="0"/>
           </a:p>
@@ -3386,7 +3386,7 @@
                 <a:ea typeface="Calibri" pitchFamily="34" charset="-122"/>
                 <a:cs typeface="Calibri" pitchFamily="34" charset="-120"/>
               </a:rPr>
-              <a:t>cybercrime complaints in India, 2023</a:t>
+              <a:t>lost to cybercrime in 2024 — 22.68 lakh complaints</a:t>
             </a:r>
             <a:endParaRPr lang="en-US" sz="1400" dirty="0"/>
           </a:p>
@@ -3425,7 +3425,7 @@
                 <a:ea typeface="Calibri" pitchFamily="34" charset="-122"/>
                 <a:cs typeface="Calibri" pitchFamily="34" charset="-120"/>
               </a:rPr>
-              <a:t>▲ 60% vs 2022</a:t>
+              <a:t>▲ 42% YoY (I4C / MHA, 2024)</a:t>
             </a:r>
             <a:endParaRPr lang="en-US" sz="1100" dirty="0"/>
           </a:p>
@@ -3498,7 +3498,7 @@
                 <a:ea typeface="Cambria" pitchFamily="34" charset="-122"/>
                 <a:cs typeface="Cambria" pitchFamily="34" charset="-120"/>
               </a:rPr>
-              <a:t>₹1,776 Cr</a:t>
+              <a:t>₹1,935 Cr</a:t>
             </a:r>
             <a:endParaRPr lang="en-US" sz="4000" dirty="0"/>
           </a:p>
@@ -3537,7 +3537,7 @@
                 <a:ea typeface="Calibri" pitchFamily="34" charset="-122"/>
                 <a:cs typeface="Calibri" pitchFamily="34" charset="-120"/>
               </a:rPr>
-              <a:t>lost to 'digital arrest' scams</a:t>
+              <a:t>lost to 'digital arrest' scams in 2024</a:t>
             </a:r>
             <a:endParaRPr lang="en-US" sz="1400" dirty="0"/>
           </a:p>
@@ -3576,7 +3576,7 @@
                 <a:ea typeface="Calibri" pitchFamily="34" charset="-122"/>
                 <a:cs typeface="Calibri" pitchFamily="34" charset="-120"/>
               </a:rPr>
-              <a:t>first 9 months of 2024 (MHA / I4C)</a:t>
+              <a:t>21× the 2022 figure (MHA / I4C)</a:t>
             </a:r>
             <a:endParaRPr lang="en-US" sz="1100" dirty="0"/>
           </a:p>
@@ -3649,7 +3649,7 @@
                 <a:ea typeface="Cambria" pitchFamily="34" charset="-122"/>
                 <a:cs typeface="Cambria" pitchFamily="34" charset="-120"/>
               </a:rPr>
-              <a:t>Record</a:t>
+              <a:t>1.42 lakh</a:t>
             </a:r>
             <a:endParaRPr lang="en-US" sz="4000" dirty="0"/>
           </a:p>
@@ -3688,7 +3688,7 @@
                 <a:ea typeface="Calibri" pitchFamily="34" charset="-122"/>
                 <a:cs typeface="Calibri" pitchFamily="34" charset="-120"/>
               </a:rPr>
-              <a:t>FICN ₹500 fake-note seizures</a:t>
+              <a:t>fake ₹500 notes detected in FY26 (+20.5%)</a:t>
             </a:r>
             <a:endParaRPr lang="en-US" sz="1400" dirty="0"/>
           </a:p>
@@ -3727,7 +3727,7 @@
                 <a:ea typeface="Calibri" pitchFamily="34" charset="-122"/>
                 <a:cs typeface="Calibri" pitchFamily="34" charset="-120"/>
               </a:rPr>
-              <a:t>RBI Annual Report 2025</a:t>
+              <a:t>97.6% caught by banks, not RBI (RBI FY26)</a:t>
             </a:r>
             <a:endParaRPr lang="en-US" sz="1100" dirty="0"/>
           </a:p>
@@ -10254,7 +10254,7 @@
                 <a:ea typeface="Calibri" pitchFamily="34" charset="-122"/>
                 <a:cs typeface="Calibri" pitchFamily="34" charset="-120"/>
               </a:rPr>
-              <a:t>Targets a ₹1,776 Cr/yr loss vector; protects banks, telcos, citizens &amp; courts.</a:t>
+              <a:t>Targets a ₹22,845 Cr/yr cybercrime loss vector; protects banks, telcos, citizens &amp; courts.</a:t>
             </a:r>
             <a:endParaRPr lang="en-US" sz="1300" dirty="0"/>
           </a:p>

--- a/docs/Prahari_Pitch_Deck.pptx
+++ b/docs/Prahari_Pitch_Deck.pptx
@@ -10044,12 +10044,12 @@
         </p:nvSpPr>
         <p:spPr>
           <a:xfrm>
-            <a:off x="548640" y="1463040"/>
-            <a:ext cx="11064240" cy="731520"/>
+            <a:off x="548640" y="1417320"/>
+            <a:ext cx="11064240" cy="676656"/>
           </a:xfrm>
           <a:prstGeom prst="roundRect">
             <a:avLst>
-              <a:gd name="adj" fmla="val 10000"/>
+              <a:gd name="adj" fmla="val 10811"/>
             </a:avLst>
           </a:prstGeom>
           <a:solidFill>
@@ -10078,8 +10078,8 @@
         </p:nvSpPr>
         <p:spPr>
           <a:xfrm>
-            <a:off x="777240" y="1463040"/>
-            <a:ext cx="3291840" cy="731520"/>
+            <a:off x="777240" y="1417320"/>
+            <a:ext cx="3291840" cy="676656"/>
           </a:xfrm>
           <a:prstGeom prst="rect">
             <a:avLst/>
@@ -10095,7 +10095,7 @@
               <a:buNone/>
             </a:pPr>
             <a:r>
-              <a:rPr lang="en-US" sz="1450" b="1" dirty="0">
+              <a:rPr lang="en-US" sz="1400" b="1" dirty="0">
                 <a:solidFill>
                   <a:srgbClr val="3EA6FF"/>
                 </a:solidFill>
@@ -10105,7 +10105,7 @@
               </a:rPr>
               <a:t>Innovation (25%)</a:t>
             </a:r>
-            <a:endParaRPr lang="en-US" sz="1450" dirty="0"/>
+            <a:endParaRPr lang="en-US" sz="1400" dirty="0"/>
           </a:p>
         </p:txBody>
       </p:sp>
@@ -10117,8 +10117,8 @@
         </p:nvSpPr>
         <p:spPr>
           <a:xfrm>
-            <a:off x="4114800" y="1463040"/>
-            <a:ext cx="7315200" cy="731520"/>
+            <a:off x="4114800" y="1417320"/>
+            <a:ext cx="7315200" cy="676656"/>
           </a:xfrm>
           <a:prstGeom prst="rect">
             <a:avLst/>
@@ -10134,7 +10134,7 @@
               <a:buNone/>
             </a:pPr>
             <a:r>
-              <a:rPr lang="en-US" sz="1300" dirty="0">
+              <a:rPr lang="en-US" sz="1250" dirty="0">
                 <a:solidFill>
                   <a:srgbClr val="E6EDF6"/>
                 </a:solidFill>
@@ -10144,7 +10144,7 @@
               </a:rPr>
               <a:t>Kill-chain scam modelling + lead-time KPI + cross-domain entity fusion.</a:t>
             </a:r>
-            <a:endParaRPr lang="en-US" sz="1300" dirty="0"/>
+            <a:endParaRPr lang="en-US" sz="1250" dirty="0"/>
           </a:p>
         </p:txBody>
       </p:sp>
@@ -10156,12 +10156,12 @@
         </p:nvSpPr>
         <p:spPr>
           <a:xfrm>
-            <a:off x="548640" y="2304288"/>
-            <a:ext cx="11064240" cy="731520"/>
+            <a:off x="548640" y="2203704"/>
+            <a:ext cx="11064240" cy="676656"/>
           </a:xfrm>
           <a:prstGeom prst="roundRect">
             <a:avLst>
-              <a:gd name="adj" fmla="val 10000"/>
+              <a:gd name="adj" fmla="val 10811"/>
             </a:avLst>
           </a:prstGeom>
           <a:solidFill>
@@ -10190,8 +10190,8 @@
         </p:nvSpPr>
         <p:spPr>
           <a:xfrm>
-            <a:off x="777240" y="2304288"/>
-            <a:ext cx="3291840" cy="731520"/>
+            <a:off x="777240" y="2203704"/>
+            <a:ext cx="3291840" cy="676656"/>
           </a:xfrm>
           <a:prstGeom prst="rect">
             <a:avLst/>
@@ -10207,7 +10207,7 @@
               <a:buNone/>
             </a:pPr>
             <a:r>
-              <a:rPr lang="en-US" sz="1450" b="1" dirty="0">
+              <a:rPr lang="en-US" sz="1400" b="1" dirty="0">
                 <a:solidFill>
                   <a:srgbClr val="3EA6FF"/>
                 </a:solidFill>
@@ -10217,7 +10217,7 @@
               </a:rPr>
               <a:t>Business Impact (25%)</a:t>
             </a:r>
-            <a:endParaRPr lang="en-US" sz="1450" dirty="0"/>
+            <a:endParaRPr lang="en-US" sz="1400" dirty="0"/>
           </a:p>
         </p:txBody>
       </p:sp>
@@ -10229,8 +10229,8 @@
         </p:nvSpPr>
         <p:spPr>
           <a:xfrm>
-            <a:off x="4114800" y="2304288"/>
-            <a:ext cx="7315200" cy="731520"/>
+            <a:off x="4114800" y="2203704"/>
+            <a:ext cx="7315200" cy="676656"/>
           </a:xfrm>
           <a:prstGeom prst="rect">
             <a:avLst/>
@@ -10246,7 +10246,7 @@
               <a:buNone/>
             </a:pPr>
             <a:r>
-              <a:rPr lang="en-US" sz="1300" dirty="0">
+              <a:rPr lang="en-US" sz="1250" dirty="0">
                 <a:solidFill>
                   <a:srgbClr val="E6EDF6"/>
                 </a:solidFill>
@@ -10256,7 +10256,7 @@
               </a:rPr>
               <a:t>Targets a ₹22,845 Cr/yr cybercrime loss vector; protects banks, telcos, citizens &amp; courts.</a:t>
             </a:r>
-            <a:endParaRPr lang="en-US" sz="1300" dirty="0"/>
+            <a:endParaRPr lang="en-US" sz="1250" dirty="0"/>
           </a:p>
         </p:txBody>
       </p:sp>
@@ -10268,12 +10268,12 @@
         </p:nvSpPr>
         <p:spPr>
           <a:xfrm>
-            <a:off x="548640" y="3145536"/>
-            <a:ext cx="11064240" cy="731520"/>
+            <a:off x="548640" y="2990088"/>
+            <a:ext cx="11064240" cy="676656"/>
           </a:xfrm>
           <a:prstGeom prst="roundRect">
             <a:avLst>
-              <a:gd name="adj" fmla="val 10000"/>
+              <a:gd name="adj" fmla="val 10811"/>
             </a:avLst>
           </a:prstGeom>
           <a:solidFill>
@@ -10302,8 +10302,8 @@
         </p:nvSpPr>
         <p:spPr>
           <a:xfrm>
-            <a:off x="777240" y="3145536"/>
-            <a:ext cx="3291840" cy="731520"/>
+            <a:off x="777240" y="2990088"/>
+            <a:ext cx="3291840" cy="676656"/>
           </a:xfrm>
           <a:prstGeom prst="rect">
             <a:avLst/>
@@ -10319,7 +10319,7 @@
               <a:buNone/>
             </a:pPr>
             <a:r>
-              <a:rPr lang="en-US" sz="1450" b="1" dirty="0">
+              <a:rPr lang="en-US" sz="1400" b="1" dirty="0">
                 <a:solidFill>
                   <a:srgbClr val="3EA6FF"/>
                 </a:solidFill>
@@ -10329,7 +10329,7 @@
               </a:rPr>
               <a:t>Technical Excellence (20%)</a:t>
             </a:r>
-            <a:endParaRPr lang="en-US" sz="1450" dirty="0"/>
+            <a:endParaRPr lang="en-US" sz="1400" dirty="0"/>
           </a:p>
         </p:txBody>
       </p:sp>
@@ -10341,8 +10341,8 @@
         </p:nvSpPr>
         <p:spPr>
           <a:xfrm>
-            <a:off x="4114800" y="3145536"/>
-            <a:ext cx="7315200" cy="731520"/>
+            <a:off x="4114800" y="2990088"/>
+            <a:ext cx="7315200" cy="676656"/>
           </a:xfrm>
           <a:prstGeom prst="rect">
             <a:avLst/>
@@ -10358,7 +10358,7 @@
               <a:buNone/>
             </a:pPr>
             <a:r>
-              <a:rPr lang="en-US" sz="1300" dirty="0">
+              <a:rPr lang="en-US" sz="1250" dirty="0">
                 <a:solidFill>
                   <a:srgbClr val="E6EDF6"/>
                 </a:solidFill>
@@ -10368,7 +10368,7 @@
               </a:rPr>
               <a:t>Graph AI, image forensics, explainable NLP, geospatial — in one API.</a:t>
             </a:r>
-            <a:endParaRPr lang="en-US" sz="1300" dirty="0"/>
+            <a:endParaRPr lang="en-US" sz="1250" dirty="0"/>
           </a:p>
         </p:txBody>
       </p:sp>
@@ -10380,12 +10380,12 @@
         </p:nvSpPr>
         <p:spPr>
           <a:xfrm>
-            <a:off x="548640" y="3986784"/>
-            <a:ext cx="11064240" cy="731520"/>
+            <a:off x="548640" y="3776472"/>
+            <a:ext cx="11064240" cy="676656"/>
           </a:xfrm>
           <a:prstGeom prst="roundRect">
             <a:avLst>
-              <a:gd name="adj" fmla="val 10000"/>
+              <a:gd name="adj" fmla="val 10811"/>
             </a:avLst>
           </a:prstGeom>
           <a:solidFill>
@@ -10414,8 +10414,8 @@
         </p:nvSpPr>
         <p:spPr>
           <a:xfrm>
-            <a:off x="777240" y="3986784"/>
-            <a:ext cx="3291840" cy="731520"/>
+            <a:off x="777240" y="3776472"/>
+            <a:ext cx="3291840" cy="676656"/>
           </a:xfrm>
           <a:prstGeom prst="rect">
             <a:avLst/>
@@ -10431,7 +10431,7 @@
               <a:buNone/>
             </a:pPr>
             <a:r>
-              <a:rPr lang="en-US" sz="1450" b="1" dirty="0">
+              <a:rPr lang="en-US" sz="1400" b="1" dirty="0">
                 <a:solidFill>
                   <a:srgbClr val="3EA6FF"/>
                 </a:solidFill>
@@ -10441,7 +10441,7 @@
               </a:rPr>
               <a:t>Scalability (15%)</a:t>
             </a:r>
-            <a:endParaRPr lang="en-US" sz="1450" dirty="0"/>
+            <a:endParaRPr lang="en-US" sz="1400" dirty="0"/>
           </a:p>
         </p:txBody>
       </p:sp>
@@ -10453,8 +10453,8 @@
         </p:nvSpPr>
         <p:spPr>
           <a:xfrm>
-            <a:off x="4114800" y="3986784"/>
-            <a:ext cx="7315200" cy="731520"/>
+            <a:off x="4114800" y="3776472"/>
+            <a:ext cx="7315200" cy="676656"/>
           </a:xfrm>
           <a:prstGeom prst="rect">
             <a:avLst/>
@@ -10470,7 +10470,7 @@
               <a:buNone/>
             </a:pPr>
             <a:r>
-              <a:rPr lang="en-US" sz="1300" dirty="0">
+              <a:rPr lang="en-US" sz="1250" dirty="0">
                 <a:solidFill>
                   <a:srgbClr val="E6EDF6"/>
                 </a:solidFill>
@@ -10480,7 +10480,7 @@
               </a:rPr>
               <a:t>Stateless services; add scam templates without retraining; per-module scale-out.</a:t>
             </a:r>
-            <a:endParaRPr lang="en-US" sz="1300" dirty="0"/>
+            <a:endParaRPr lang="en-US" sz="1250" dirty="0"/>
           </a:p>
         </p:txBody>
       </p:sp>
@@ -10492,12 +10492,12 @@
         </p:nvSpPr>
         <p:spPr>
           <a:xfrm>
-            <a:off x="548640" y="4828032"/>
-            <a:ext cx="11064240" cy="731520"/>
+            <a:off x="548640" y="4562856"/>
+            <a:ext cx="11064240" cy="676656"/>
           </a:xfrm>
           <a:prstGeom prst="roundRect">
             <a:avLst>
-              <a:gd name="adj" fmla="val 10000"/>
+              <a:gd name="adj" fmla="val 10811"/>
             </a:avLst>
           </a:prstGeom>
           <a:solidFill>
@@ -10526,8 +10526,8 @@
         </p:nvSpPr>
         <p:spPr>
           <a:xfrm>
-            <a:off x="777240" y="4828032"/>
-            <a:ext cx="3291840" cy="731520"/>
+            <a:off x="777240" y="4562856"/>
+            <a:ext cx="3291840" cy="676656"/>
           </a:xfrm>
           <a:prstGeom prst="rect">
             <a:avLst/>
@@ -10543,7 +10543,7 @@
               <a:buNone/>
             </a:pPr>
             <a:r>
-              <a:rPr lang="en-US" sz="1450" b="1" dirty="0">
+              <a:rPr lang="en-US" sz="1400" b="1" dirty="0">
                 <a:solidFill>
                   <a:srgbClr val="3EA6FF"/>
                 </a:solidFill>
@@ -10553,7 +10553,7 @@
               </a:rPr>
               <a:t>User Experience (15%)</a:t>
             </a:r>
-            <a:endParaRPr lang="en-US" sz="1450" dirty="0"/>
+            <a:endParaRPr lang="en-US" sz="1400" dirty="0"/>
           </a:p>
         </p:txBody>
       </p:sp>
@@ -10565,8 +10565,8 @@
         </p:nvSpPr>
         <p:spPr>
           <a:xfrm>
-            <a:off x="4114800" y="4828032"/>
-            <a:ext cx="7315200" cy="731520"/>
+            <a:off x="4114800" y="4562856"/>
+            <a:ext cx="7315200" cy="676656"/>
           </a:xfrm>
           <a:prstGeom prst="rect">
             <a:avLst/>
@@ -10582,7 +10582,7 @@
               <a:buNone/>
             </a:pPr>
             <a:r>
-              <a:rPr lang="en-US" sz="1300" dirty="0">
+              <a:rPr lang="en-US" sz="1250" dirty="0">
                 <a:solidFill>
                   <a:srgbClr val="E6EDF6"/>
                 </a:solidFill>
@@ -10590,15 +10590,123 @@
                 <a:ea typeface="Calibri" pitchFamily="34" charset="-122"/>
                 <a:cs typeface="Calibri" pitchFamily="34" charset="-120"/>
               </a:rPr>
-              <a:t>Command-centre dashboard + 12-language citizen chatbot on WhatsApp/IVR/app.</a:t>
-            </a:r>
-            <a:endParaRPr lang="en-US" sz="1300" dirty="0"/>
-          </a:p>
-        </p:txBody>
-      </p:sp>
-      <p:sp>
-        <p:nvSpPr>
-          <p:cNvPr id="18" name="Text 16"/>
+              <a:t>Command-centre dashboard + citizen chatbot (12-language interface, verdicts localised in 5 today).</a:t>
+            </a:r>
+            <a:endParaRPr lang="en-US" sz="1250" dirty="0"/>
+          </a:p>
+        </p:txBody>
+      </p:sp>
+      <p:sp>
+        <p:nvSpPr>
+          <p:cNvPr id="18" name="Shape 16"/>
+          <p:cNvSpPr/>
+          <p:nvPr/>
+        </p:nvSpPr>
+        <p:spPr>
+          <a:xfrm>
+            <a:off x="548640" y="5532120"/>
+            <a:ext cx="11064240" cy="749808"/>
+          </a:xfrm>
+          <a:prstGeom prst="roundRect">
+            <a:avLst>
+              <a:gd name="adj" fmla="val 10976"/>
+            </a:avLst>
+          </a:prstGeom>
+          <a:solidFill>
+            <a:srgbClr val="0F2A1C"/>
+          </a:solidFill>
+          <a:ln w="12700">
+            <a:solidFill>
+              <a:srgbClr val="1F3A2A"/>
+            </a:solidFill>
+            <a:prstDash val="solid"/>
+          </a:ln>
+        </p:spPr>
+      </p:sp>
+      <p:sp>
+        <p:nvSpPr>
+          <p:cNvPr id="19" name="Text 17"/>
+          <p:cNvSpPr/>
+          <p:nvPr/>
+        </p:nvSpPr>
+        <p:spPr>
+          <a:xfrm>
+            <a:off x="868680" y="5532120"/>
+            <a:ext cx="10424160" cy="749808"/>
+          </a:xfrm>
+          <a:prstGeom prst="rect">
+            <a:avLst/>
+          </a:prstGeom>
+          <a:noFill/>
+          <a:ln/>
+        </p:spPr>
+        <p:txBody>
+          <a:bodyPr wrap="square" rtlCol="0" anchor="ctr"/>
+          <a:lstStyle/>
+          <a:p>
+            <a:pPr indent="0" marL="0">
+              <a:buNone/>
+            </a:pPr>
+            <a:r>
+              <a:rPr lang="en-US" sz="1400" b="1" dirty="0">
+                <a:solidFill>
+                  <a:srgbClr val="2ECC71"/>
+                </a:solidFill>
+                <a:latin typeface="Calibri" pitchFamily="34" charset="0"/>
+                <a:ea typeface="Calibri" pitchFamily="34" charset="-122"/>
+                <a:cs typeface="Calibri" pitchFamily="34" charset="-120"/>
+              </a:rPr>
+              <a:t>Projected ROI:  </a:t>
+            </a:r>
+            <a:pPr indent="0" marL="0">
+              <a:buNone/>
+            </a:pPr>
+            <a:r>
+              <a:rPr lang="en-US" sz="1400" dirty="0">
+                <a:solidFill>
+                  <a:srgbClr val="E6EDF6"/>
+                </a:solidFill>
+                <a:latin typeface="Calibri" pitchFamily="34" charset="0"/>
+                <a:ea typeface="Calibri" pitchFamily="34" charset="-122"/>
+                <a:cs typeface="Calibri" pitchFamily="34" charset="-120"/>
+              </a:rPr>
+              <a:t>at 1930-helpline scale (22.68 lakh complaints/yr), a 10% pre-transfer interception rate saves </a:t>
+            </a:r>
+            <a:pPr indent="0" marL="0">
+              <a:buNone/>
+            </a:pPr>
+            <a:r>
+              <a:rPr lang="en-US" sz="1400" b="1" dirty="0">
+                <a:solidFill>
+                  <a:srgbClr val="2ECC71"/>
+                </a:solidFill>
+                <a:latin typeface="Calibri" pitchFamily="34" charset="0"/>
+                <a:ea typeface="Calibri" pitchFamily="34" charset="-122"/>
+                <a:cs typeface="Calibri" pitchFamily="34" charset="-120"/>
+              </a:rPr>
+              <a:t>₹2,284 Cr every year</a:t>
+            </a:r>
+            <a:pPr indent="0" marL="0">
+              <a:buNone/>
+            </a:pPr>
+            <a:r>
+              <a:rPr lang="en-US" sz="1400" dirty="0">
+                <a:solidFill>
+                  <a:srgbClr val="E6EDF6"/>
+                </a:solidFill>
+                <a:latin typeface="Calibri" pitchFamily="34" charset="0"/>
+                <a:ea typeface="Calibri" pitchFamily="34" charset="-122"/>
+                <a:cs typeface="Calibri" pitchFamily="34" charset="-120"/>
+              </a:rPr>
+              <a:t>.</a:t>
+            </a:r>
+            <a:endParaRPr lang="en-US" sz="1400" dirty="0"/>
+          </a:p>
+        </p:txBody>
+      </p:sp>
+      <p:sp>
+        <p:nvSpPr>
+          <p:cNvPr id="20" name="Text 18"/>
           <p:cNvSpPr/>
           <p:nvPr/>
         </p:nvSpPr>
@@ -10637,7 +10745,7 @@
       </p:sp>
       <p:sp>
         <p:nvSpPr>
-          <p:cNvPr id="19" name="Text 17"/>
+          <p:cNvPr id="21" name="Text 19"/>
           <p:cNvSpPr/>
           <p:nvPr/>
         </p:nvSpPr>

--- a/docs/Prahari_Pitch_Deck.pptx
+++ b/docs/Prahari_Pitch_Deck.pptx
@@ -16,9 +16,13 @@
     <p:sldId id="264" r:id="rId10"/>
     <p:sldId id="265" r:id="rId11"/>
     <p:sldId id="266" r:id="rId12"/>
+    <p:sldId id="267" r:id="rId13"/>
+    <p:sldId id="268" r:id="rId14"/>
+    <p:sldId id="269" r:id="rId15"/>
+    <p:sldId id="270" r:id="rId16"/>
   </p:sldIdLst>
   <p:notesMasterIdLst>
-    <p:notesMasterId r:id="rId13"/>
+    <p:notesMasterId r:id="rId17"/>
   </p:notesMasterIdLst>
   <p:sldSz cx="12188952" cy="6858000"/>
   <p:notesSz cx="6858000" cy="12188952"/>
@@ -939,6 +943,358 @@
             <a:fld id="{F7021451-1387-4CA6-816F-3879F97B5CBC}" type="slidenum">
               <a:rPr lang="en-US"/>
               <a:t>11</a:t>
+            </a:fld>
+            <a:endParaRPr lang="en-US"/>
+          </a:p>
+        </p:txBody>
+      </p:sp>
+    </p:spTree>
+    <p:extLst>
+      <p:ext uri="{BB962C8B-B14F-4D97-AF65-F5344CB8AC3E}">
+        <p14:creationId xmlns:p14="http://schemas.microsoft.com/office/powerpoint/2010/main" val="1024086991"/>
+      </p:ext>
+    </p:extLst>
+  </p:cSld>
+  <p:clrMapOvr>
+    <a:masterClrMapping/>
+  </p:clrMapOvr>
+</p:notes>
+</file>
+
+<file path=ppt/notesSlides/notesSlide12.xml><?xml version="1.0" encoding="utf-8"?>
+<p:notes xmlns:a="http://schemas.openxmlformats.org/drawingml/2006/main" xmlns:r="http://schemas.openxmlformats.org/officeDocument/2006/relationships" xmlns:p="http://schemas.openxmlformats.org/presentationml/2006/main">
+  <p:cSld>
+    <p:spTree>
+      <p:nvGrpSpPr>
+        <p:cNvPr id="1" name=""/>
+        <p:cNvGrpSpPr/>
+        <p:nvPr/>
+      </p:nvGrpSpPr>
+      <p:grpSpPr>
+        <a:xfrm>
+          <a:off x="0" y="0"/>
+          <a:ext cx="0" cy="0"/>
+          <a:chOff x="0" y="0"/>
+          <a:chExt cx="0" cy="0"/>
+        </a:xfrm>
+      </p:grpSpPr>
+      <p:sp>
+        <p:nvSpPr>
+          <p:cNvPr id="2" name="Slide Image Placeholder 1"/>
+          <p:cNvSpPr>
+            <a:spLocks noGrp="1" noRot="1" noChangeAspect="1"/>
+          </p:cNvSpPr>
+          <p:nvPr>
+            <p:ph type="sldImg"/>
+          </p:nvPr>
+        </p:nvSpPr>
+        <p:spPr/>
+      </p:sp>
+      <p:sp>
+        <p:nvSpPr>
+          <p:cNvPr id="3" name="Notes Placeholder 2"/>
+          <p:cNvSpPr>
+            <a:spLocks noGrp="1"/>
+          </p:cNvSpPr>
+          <p:nvPr>
+            <p:ph type="body" idx="1"/>
+          </p:nvPr>
+        </p:nvSpPr>
+        <p:spPr/>
+        <p:txBody>
+          <a:bodyPr/>
+          <a:lstStyle/>
+          <a:p>
+            <a:r>
+              <a:rPr lang="en-US" dirty="0"/>
+              <a:t/>
+            </a:r>
+            <a:endParaRPr lang="en-US" dirty="0"/>
+          </a:p>
+        </p:txBody>
+      </p:sp>
+      <p:sp>
+        <p:nvSpPr>
+          <p:cNvPr id="4" name="Slide Number Placeholder 3"/>
+          <p:cNvSpPr>
+            <a:spLocks noGrp="1"/>
+          </p:cNvSpPr>
+          <p:nvPr>
+            <p:ph type="sldNum" sz="quarter" idx="10"/>
+          </p:nvPr>
+        </p:nvSpPr>
+        <p:spPr/>
+        <p:txBody>
+          <a:bodyPr/>
+          <a:lstStyle/>
+          <a:p>
+            <a:fld id="{F7021451-1387-4CA6-816F-3879F97B5CBC}" type="slidenum">
+              <a:rPr lang="en-US"/>
+              <a:t>12</a:t>
+            </a:fld>
+            <a:endParaRPr lang="en-US"/>
+          </a:p>
+        </p:txBody>
+      </p:sp>
+    </p:spTree>
+    <p:extLst>
+      <p:ext uri="{BB962C8B-B14F-4D97-AF65-F5344CB8AC3E}">
+        <p14:creationId xmlns:p14="http://schemas.microsoft.com/office/powerpoint/2010/main" val="1024086991"/>
+      </p:ext>
+    </p:extLst>
+  </p:cSld>
+  <p:clrMapOvr>
+    <a:masterClrMapping/>
+  </p:clrMapOvr>
+</p:notes>
+</file>
+
+<file path=ppt/notesSlides/notesSlide13.xml><?xml version="1.0" encoding="utf-8"?>
+<p:notes xmlns:a="http://schemas.openxmlformats.org/drawingml/2006/main" xmlns:r="http://schemas.openxmlformats.org/officeDocument/2006/relationships" xmlns:p="http://schemas.openxmlformats.org/presentationml/2006/main">
+  <p:cSld>
+    <p:spTree>
+      <p:nvGrpSpPr>
+        <p:cNvPr id="1" name=""/>
+        <p:cNvGrpSpPr/>
+        <p:nvPr/>
+      </p:nvGrpSpPr>
+      <p:grpSpPr>
+        <a:xfrm>
+          <a:off x="0" y="0"/>
+          <a:ext cx="0" cy="0"/>
+          <a:chOff x="0" y="0"/>
+          <a:chExt cx="0" cy="0"/>
+        </a:xfrm>
+      </p:grpSpPr>
+      <p:sp>
+        <p:nvSpPr>
+          <p:cNvPr id="2" name="Slide Image Placeholder 1"/>
+          <p:cNvSpPr>
+            <a:spLocks noGrp="1" noRot="1" noChangeAspect="1"/>
+          </p:cNvSpPr>
+          <p:nvPr>
+            <p:ph type="sldImg"/>
+          </p:nvPr>
+        </p:nvSpPr>
+        <p:spPr/>
+      </p:sp>
+      <p:sp>
+        <p:nvSpPr>
+          <p:cNvPr id="3" name="Notes Placeholder 2"/>
+          <p:cNvSpPr>
+            <a:spLocks noGrp="1"/>
+          </p:cNvSpPr>
+          <p:nvPr>
+            <p:ph type="body" idx="1"/>
+          </p:nvPr>
+        </p:nvSpPr>
+        <p:spPr/>
+        <p:txBody>
+          <a:bodyPr/>
+          <a:lstStyle/>
+          <a:p>
+            <a:r>
+              <a:rPr lang="en-US" dirty="0"/>
+              <a:t/>
+            </a:r>
+            <a:endParaRPr lang="en-US" dirty="0"/>
+          </a:p>
+        </p:txBody>
+      </p:sp>
+      <p:sp>
+        <p:nvSpPr>
+          <p:cNvPr id="4" name="Slide Number Placeholder 3"/>
+          <p:cNvSpPr>
+            <a:spLocks noGrp="1"/>
+          </p:cNvSpPr>
+          <p:nvPr>
+            <p:ph type="sldNum" sz="quarter" idx="10"/>
+          </p:nvPr>
+        </p:nvSpPr>
+        <p:spPr/>
+        <p:txBody>
+          <a:bodyPr/>
+          <a:lstStyle/>
+          <a:p>
+            <a:fld id="{F7021451-1387-4CA6-816F-3879F97B5CBC}" type="slidenum">
+              <a:rPr lang="en-US"/>
+              <a:t>13</a:t>
+            </a:fld>
+            <a:endParaRPr lang="en-US"/>
+          </a:p>
+        </p:txBody>
+      </p:sp>
+    </p:spTree>
+    <p:extLst>
+      <p:ext uri="{BB962C8B-B14F-4D97-AF65-F5344CB8AC3E}">
+        <p14:creationId xmlns:p14="http://schemas.microsoft.com/office/powerpoint/2010/main" val="1024086991"/>
+      </p:ext>
+    </p:extLst>
+  </p:cSld>
+  <p:clrMapOvr>
+    <a:masterClrMapping/>
+  </p:clrMapOvr>
+</p:notes>
+</file>
+
+<file path=ppt/notesSlides/notesSlide14.xml><?xml version="1.0" encoding="utf-8"?>
+<p:notes xmlns:a="http://schemas.openxmlformats.org/drawingml/2006/main" xmlns:r="http://schemas.openxmlformats.org/officeDocument/2006/relationships" xmlns:p="http://schemas.openxmlformats.org/presentationml/2006/main">
+  <p:cSld>
+    <p:spTree>
+      <p:nvGrpSpPr>
+        <p:cNvPr id="1" name=""/>
+        <p:cNvGrpSpPr/>
+        <p:nvPr/>
+      </p:nvGrpSpPr>
+      <p:grpSpPr>
+        <a:xfrm>
+          <a:off x="0" y="0"/>
+          <a:ext cx="0" cy="0"/>
+          <a:chOff x="0" y="0"/>
+          <a:chExt cx="0" cy="0"/>
+        </a:xfrm>
+      </p:grpSpPr>
+      <p:sp>
+        <p:nvSpPr>
+          <p:cNvPr id="2" name="Slide Image Placeholder 1"/>
+          <p:cNvSpPr>
+            <a:spLocks noGrp="1" noRot="1" noChangeAspect="1"/>
+          </p:cNvSpPr>
+          <p:nvPr>
+            <p:ph type="sldImg"/>
+          </p:nvPr>
+        </p:nvSpPr>
+        <p:spPr/>
+      </p:sp>
+      <p:sp>
+        <p:nvSpPr>
+          <p:cNvPr id="3" name="Notes Placeholder 2"/>
+          <p:cNvSpPr>
+            <a:spLocks noGrp="1"/>
+          </p:cNvSpPr>
+          <p:nvPr>
+            <p:ph type="body" idx="1"/>
+          </p:nvPr>
+        </p:nvSpPr>
+        <p:spPr/>
+        <p:txBody>
+          <a:bodyPr/>
+          <a:lstStyle/>
+          <a:p>
+            <a:r>
+              <a:rPr lang="en-US" dirty="0"/>
+              <a:t/>
+            </a:r>
+            <a:endParaRPr lang="en-US" dirty="0"/>
+          </a:p>
+        </p:txBody>
+      </p:sp>
+      <p:sp>
+        <p:nvSpPr>
+          <p:cNvPr id="4" name="Slide Number Placeholder 3"/>
+          <p:cNvSpPr>
+            <a:spLocks noGrp="1"/>
+          </p:cNvSpPr>
+          <p:nvPr>
+            <p:ph type="sldNum" sz="quarter" idx="10"/>
+          </p:nvPr>
+        </p:nvSpPr>
+        <p:spPr/>
+        <p:txBody>
+          <a:bodyPr/>
+          <a:lstStyle/>
+          <a:p>
+            <a:fld id="{F7021451-1387-4CA6-816F-3879F97B5CBC}" type="slidenum">
+              <a:rPr lang="en-US"/>
+              <a:t>14</a:t>
+            </a:fld>
+            <a:endParaRPr lang="en-US"/>
+          </a:p>
+        </p:txBody>
+      </p:sp>
+    </p:spTree>
+    <p:extLst>
+      <p:ext uri="{BB962C8B-B14F-4D97-AF65-F5344CB8AC3E}">
+        <p14:creationId xmlns:p14="http://schemas.microsoft.com/office/powerpoint/2010/main" val="1024086991"/>
+      </p:ext>
+    </p:extLst>
+  </p:cSld>
+  <p:clrMapOvr>
+    <a:masterClrMapping/>
+  </p:clrMapOvr>
+</p:notes>
+</file>
+
+<file path=ppt/notesSlides/notesSlide15.xml><?xml version="1.0" encoding="utf-8"?>
+<p:notes xmlns:a="http://schemas.openxmlformats.org/drawingml/2006/main" xmlns:r="http://schemas.openxmlformats.org/officeDocument/2006/relationships" xmlns:p="http://schemas.openxmlformats.org/presentationml/2006/main">
+  <p:cSld>
+    <p:spTree>
+      <p:nvGrpSpPr>
+        <p:cNvPr id="1" name=""/>
+        <p:cNvGrpSpPr/>
+        <p:nvPr/>
+      </p:nvGrpSpPr>
+      <p:grpSpPr>
+        <a:xfrm>
+          <a:off x="0" y="0"/>
+          <a:ext cx="0" cy="0"/>
+          <a:chOff x="0" y="0"/>
+          <a:chExt cx="0" cy="0"/>
+        </a:xfrm>
+      </p:grpSpPr>
+      <p:sp>
+        <p:nvSpPr>
+          <p:cNvPr id="2" name="Slide Image Placeholder 1"/>
+          <p:cNvSpPr>
+            <a:spLocks noGrp="1" noRot="1" noChangeAspect="1"/>
+          </p:cNvSpPr>
+          <p:nvPr>
+            <p:ph type="sldImg"/>
+          </p:nvPr>
+        </p:nvSpPr>
+        <p:spPr/>
+      </p:sp>
+      <p:sp>
+        <p:nvSpPr>
+          <p:cNvPr id="3" name="Notes Placeholder 2"/>
+          <p:cNvSpPr>
+            <a:spLocks noGrp="1"/>
+          </p:cNvSpPr>
+          <p:nvPr>
+            <p:ph type="body" idx="1"/>
+          </p:nvPr>
+        </p:nvSpPr>
+        <p:spPr/>
+        <p:txBody>
+          <a:bodyPr/>
+          <a:lstStyle/>
+          <a:p>
+            <a:r>
+              <a:rPr lang="en-US" dirty="0"/>
+              <a:t/>
+            </a:r>
+            <a:endParaRPr lang="en-US" dirty="0"/>
+          </a:p>
+        </p:txBody>
+      </p:sp>
+      <p:sp>
+        <p:nvSpPr>
+          <p:cNvPr id="4" name="Slide Number Placeholder 3"/>
+          <p:cNvSpPr>
+            <a:spLocks noGrp="1"/>
+          </p:cNvSpPr>
+          <p:nvPr>
+            <p:ph type="sldNum" sz="quarter" idx="10"/>
+          </p:nvPr>
+        </p:nvSpPr>
+        <p:spPr/>
+        <p:txBody>
+          <a:bodyPr/>
+          <a:lstStyle/>
+          <a:p>
+            <a:fld id="{F7021451-1387-4CA6-816F-3879F97B5CBC}" type="slidenum">
+              <a:rPr lang="en-US"/>
+              <a:t>15</a:t>
             </a:fld>
             <a:endParaRPr lang="en-US"/>
           </a:p>
@@ -2694,7 +3050,7 @@
                 <a:ea typeface="Calibri" pitchFamily="34" charset="-122"/>
                 <a:cs typeface="Calibri" pitchFamily="34" charset="-120"/>
               </a:rPr>
-              <a:t>On-device OCR screenshot intake + 12-language citizen chatbot.</a:t>
+              <a:t>On-device OCR screenshot intake + citizen chatbot answering fully in EN/HI/TA/BN.</a:t>
             </a:r>
             <a:endParaRPr lang="en-US" sz="1250" dirty="0"/>
           </a:p>
@@ -2873,7 +3229,7 @@
                 <a:ea typeface="Calibri" pitchFamily="34" charset="-122"/>
                 <a:cs typeface="Calibri" pitchFamily="34" charset="-120"/>
               </a:rPr>
-              <a:t>IndicTrans + LLM for full 12-language NLG.</a:t>
+              <a:t>Verified native strings (or IndicTrans + LLM) for the remaining 8 of 12 languages.</a:t>
             </a:r>
             <a:endParaRPr lang="en-US" sz="1300" dirty="0"/>
           </a:p>
@@ -3033,6 +3389,3196 @@
       </p:grpSpPr>
       <p:sp>
         <p:nvSpPr>
+          <p:cNvPr id="2" name="Text 0"/>
+          <p:cNvSpPr/>
+          <p:nvPr/>
+        </p:nvSpPr>
+        <p:spPr>
+          <a:xfrm>
+            <a:off x="548640" y="457200"/>
+            <a:ext cx="10972800" cy="640080"/>
+          </a:xfrm>
+          <a:prstGeom prst="rect">
+            <a:avLst/>
+          </a:prstGeom>
+          <a:noFill/>
+          <a:ln/>
+        </p:spPr>
+        <p:txBody>
+          <a:bodyPr wrap="square" rtlCol="0" anchor="ctr"/>
+          <a:lstStyle/>
+          <a:p>
+            <a:pPr indent="0" marL="0">
+              <a:buNone/>
+            </a:pPr>
+            <a:r>
+              <a:rPr lang="en-US" sz="2800" b="1" dirty="0">
+                <a:solidFill>
+                  <a:srgbClr val="E6EDF6"/>
+                </a:solidFill>
+                <a:latin typeface="Cambria" pitchFamily="34" charset="0"/>
+                <a:ea typeface="Cambria" pitchFamily="34" charset="-122"/>
+                <a:cs typeface="Cambria" pitchFamily="34" charset="-120"/>
+              </a:rPr>
+              <a:t>Why the verdict-of-record is a glass box</a:t>
+            </a:r>
+            <a:endParaRPr lang="en-US" sz="2800" dirty="0"/>
+          </a:p>
+        </p:txBody>
+      </p:sp>
+      <p:sp>
+        <p:nvSpPr>
+          <p:cNvPr id="3" name="Text 1"/>
+          <p:cNvSpPr/>
+          <p:nvPr/>
+        </p:nvSpPr>
+        <p:spPr>
+          <a:xfrm>
+            <a:off x="548640" y="1051560"/>
+            <a:ext cx="10972800" cy="365760"/>
+          </a:xfrm>
+          <a:prstGeom prst="rect">
+            <a:avLst/>
+          </a:prstGeom>
+          <a:noFill/>
+          <a:ln/>
+        </p:spPr>
+        <p:txBody>
+          <a:bodyPr wrap="square" rtlCol="0" anchor="ctr"/>
+          <a:lstStyle/>
+          <a:p>
+            <a:pPr indent="0" marL="0">
+              <a:buNone/>
+            </a:pPr>
+            <a:r>
+              <a:rPr lang="en-US" sz="1400" i="1" dirty="0">
+                <a:solidFill>
+                  <a:srgbClr val="8C9BB5"/>
+                </a:solidFill>
+                <a:latin typeface="Calibri" pitchFamily="34" charset="0"/>
+                <a:ea typeface="Calibri" pitchFamily="34" charset="-122"/>
+                <a:cs typeface="Calibri" pitchFamily="34" charset="-120"/>
+              </a:rPr>
+              <a:t>A deliberate design choice for law enforcement — not a shortcut around ML.</a:t>
+            </a:r>
+            <a:endParaRPr lang="en-US" sz="1400" dirty="0"/>
+          </a:p>
+        </p:txBody>
+      </p:sp>
+      <p:sp>
+        <p:nvSpPr>
+          <p:cNvPr id="4" name="Shape 2"/>
+          <p:cNvSpPr/>
+          <p:nvPr/>
+        </p:nvSpPr>
+        <p:spPr>
+          <a:xfrm>
+            <a:off x="548640" y="1600200"/>
+            <a:ext cx="11064240" cy="1691640"/>
+          </a:xfrm>
+          <a:prstGeom prst="roundRect">
+            <a:avLst>
+              <a:gd name="adj" fmla="val 4324"/>
+            </a:avLst>
+          </a:prstGeom>
+          <a:solidFill>
+            <a:srgbClr val="0F1420"/>
+          </a:solidFill>
+          <a:ln w="12700">
+            <a:solidFill>
+              <a:srgbClr val="1F2A3D"/>
+            </a:solidFill>
+            <a:prstDash val="solid"/>
+          </a:ln>
+          <a:effectLst>
+            <a:outerShdw sx="100000" sy="100000" kx="0" ky="0" algn="bl" rotWithShape="0" blurRad="88900" dist="38100" dir="5400000">
+              <a:srgbClr val="000000">
+                <a:alpha val="35000"/>
+              </a:srgbClr>
+            </a:outerShdw>
+          </a:effectLst>
+        </p:spPr>
+      </p:sp>
+      <p:sp>
+        <p:nvSpPr>
+          <p:cNvPr id="5" name="Text 3"/>
+          <p:cNvSpPr/>
+          <p:nvPr/>
+        </p:nvSpPr>
+        <p:spPr>
+          <a:xfrm>
+            <a:off x="868680" y="1783080"/>
+            <a:ext cx="10424160" cy="1371600"/>
+          </a:xfrm>
+          <a:prstGeom prst="rect">
+            <a:avLst/>
+          </a:prstGeom>
+          <a:noFill/>
+          <a:ln/>
+        </p:spPr>
+        <p:txBody>
+          <a:bodyPr wrap="square" rtlCol="0" anchor="ctr"/>
+          <a:lstStyle/>
+          <a:p>
+            <a:pPr indent="0" marL="0">
+              <a:lnSpc>
+                <a:spcPct val="108000"/>
+              </a:lnSpc>
+              <a:buNone/>
+            </a:pPr>
+            <a:r>
+              <a:rPr lang="en-US" sz="1350" dirty="0">
+                <a:solidFill>
+                  <a:srgbClr val="E6EDF6"/>
+                </a:solidFill>
+                <a:latin typeface="Calibri" pitchFamily="34" charset="0"/>
+                <a:ea typeface="Calibri" pitchFamily="34" charset="-122"/>
+                <a:cs typeface="Calibri" pitchFamily="34" charset="-120"/>
+              </a:rPr>
+              <a:t>“An intelligence package that reaches court must survive the question </a:t>
+            </a:r>
+            <a:pPr indent="0" marL="0">
+              <a:lnSpc>
+                <a:spcPct val="108000"/>
+              </a:lnSpc>
+              <a:buNone/>
+            </a:pPr>
+            <a:r>
+              <a:rPr lang="en-US" sz="1350" b="1" dirty="0">
+                <a:solidFill>
+                  <a:srgbClr val="3EA6FF"/>
+                </a:solidFill>
+                <a:latin typeface="Calibri" pitchFamily="34" charset="0"/>
+                <a:ea typeface="Calibri" pitchFamily="34" charset="-122"/>
+                <a:cs typeface="Calibri" pitchFamily="34" charset="-120"/>
+              </a:rPr>
+              <a:t>‘why was this flagged?’</a:t>
+            </a:r>
+            <a:pPr indent="0" marL="0">
+              <a:lnSpc>
+                <a:spcPct val="108000"/>
+              </a:lnSpc>
+              <a:buNone/>
+            </a:pPr>
+            <a:r>
+              <a:rPr lang="en-US" sz="1350" dirty="0">
+                <a:solidFill>
+                  <a:srgbClr val="E6EDF6"/>
+                </a:solidFill>
+                <a:latin typeface="Calibri" pitchFamily="34" charset="0"/>
+                <a:ea typeface="Calibri" pitchFamily="34" charset="-122"/>
+                <a:cs typeface="Calibri" pitchFamily="34" charset="-120"/>
+              </a:rPr>
+              <a:t>  A glass-box engine answers at phrase level: this exact sentence triggered authority-impersonation, weight 18, contributing 15.8% of the score. A black-box transformer cannot, without a separate contestable explainability layer — and a defence counsel can attack a saliency map far more easily than a quoted phrase.”</a:t>
+            </a:r>
+            <a:endParaRPr lang="en-US" sz="1350" dirty="0"/>
+          </a:p>
+        </p:txBody>
+      </p:sp>
+      <p:sp>
+        <p:nvSpPr>
+          <p:cNvPr id="6" name="Shape 4"/>
+          <p:cNvSpPr/>
+          <p:nvPr/>
+        </p:nvSpPr>
+        <p:spPr>
+          <a:xfrm>
+            <a:off x="548640" y="3520440"/>
+            <a:ext cx="3520440" cy="2103120"/>
+          </a:xfrm>
+          <a:prstGeom prst="roundRect">
+            <a:avLst>
+              <a:gd name="adj" fmla="val 3478"/>
+            </a:avLst>
+          </a:prstGeom>
+          <a:solidFill>
+            <a:srgbClr val="121826"/>
+          </a:solidFill>
+          <a:ln w="12700">
+            <a:solidFill>
+              <a:srgbClr val="1F2A3D"/>
+            </a:solidFill>
+            <a:prstDash val="solid"/>
+          </a:ln>
+          <a:effectLst>
+            <a:outerShdw sx="100000" sy="100000" kx="0" ky="0" algn="bl" rotWithShape="0" blurRad="88900" dist="38100" dir="5400000">
+              <a:srgbClr val="000000">
+                <a:alpha val="35000"/>
+              </a:srgbClr>
+            </a:outerShdw>
+          </a:effectLst>
+        </p:spPr>
+      </p:sp>
+      <p:sp>
+        <p:nvSpPr>
+          <p:cNvPr id="7" name="Text 5"/>
+          <p:cNvSpPr/>
+          <p:nvPr/>
+        </p:nvSpPr>
+        <p:spPr>
+          <a:xfrm>
+            <a:off x="777240" y="3703320"/>
+            <a:ext cx="3108960" cy="365760"/>
+          </a:xfrm>
+          <a:prstGeom prst="rect">
+            <a:avLst/>
+          </a:prstGeom>
+          <a:noFill/>
+          <a:ln/>
+        </p:spPr>
+        <p:txBody>
+          <a:bodyPr wrap="square" rtlCol="0" anchor="ctr"/>
+          <a:lstStyle/>
+          <a:p>
+            <a:pPr indent="0" marL="0">
+              <a:buNone/>
+            </a:pPr>
+            <a:r>
+              <a:rPr lang="en-US" sz="1500" b="1" dirty="0">
+                <a:solidFill>
+                  <a:srgbClr val="2ECC71"/>
+                </a:solidFill>
+                <a:latin typeface="Cambria" pitchFamily="34" charset="0"/>
+                <a:ea typeface="Cambria" pitchFamily="34" charset="-122"/>
+                <a:cs typeface="Cambria" pitchFamily="34" charset="-120"/>
+              </a:rPr>
+              <a:t>Verdict of record</a:t>
+            </a:r>
+            <a:endParaRPr lang="en-US" sz="1500" dirty="0"/>
+          </a:p>
+        </p:txBody>
+      </p:sp>
+      <p:sp>
+        <p:nvSpPr>
+          <p:cNvPr id="8" name="Text 6"/>
+          <p:cNvSpPr/>
+          <p:nvPr/>
+        </p:nvSpPr>
+        <p:spPr>
+          <a:xfrm>
+            <a:off x="777240" y="4160520"/>
+            <a:ext cx="3108960" cy="1280160"/>
+          </a:xfrm>
+          <a:prstGeom prst="rect">
+            <a:avLst/>
+          </a:prstGeom>
+          <a:noFill/>
+          <a:ln/>
+        </p:spPr>
+        <p:txBody>
+          <a:bodyPr wrap="square" rtlCol="0" anchor="ctr"/>
+          <a:lstStyle/>
+          <a:p>
+            <a:pPr indent="0" marL="0">
+              <a:lnSpc>
+                <a:spcPct val="105000"/>
+              </a:lnSpc>
+              <a:buNone/>
+            </a:pPr>
+            <a:r>
+              <a:rPr lang="en-US" sz="1200" dirty="0">
+                <a:solidFill>
+                  <a:srgbClr val="E6EDF6"/>
+                </a:solidFill>
+                <a:latin typeface="Calibri" pitchFamily="34" charset="0"/>
+                <a:ea typeface="Calibri" pitchFamily="34" charset="-122"/>
+                <a:cs typeface="Calibri" pitchFamily="34" charset="-120"/>
+              </a:rPr>
+              <a:t>Explainable signal engine — auditable, hash-sealed, phrase-level evidence.</a:t>
+            </a:r>
+            <a:endParaRPr lang="en-US" sz="1200" dirty="0"/>
+          </a:p>
+        </p:txBody>
+      </p:sp>
+      <p:sp>
+        <p:nvSpPr>
+          <p:cNvPr id="9" name="Shape 7"/>
+          <p:cNvSpPr/>
+          <p:nvPr/>
+        </p:nvSpPr>
+        <p:spPr>
+          <a:xfrm>
+            <a:off x="4343400" y="3520440"/>
+            <a:ext cx="3520440" cy="2103120"/>
+          </a:xfrm>
+          <a:prstGeom prst="roundRect">
+            <a:avLst>
+              <a:gd name="adj" fmla="val 3478"/>
+            </a:avLst>
+          </a:prstGeom>
+          <a:solidFill>
+            <a:srgbClr val="121826"/>
+          </a:solidFill>
+          <a:ln w="12700">
+            <a:solidFill>
+              <a:srgbClr val="1F2A3D"/>
+            </a:solidFill>
+            <a:prstDash val="solid"/>
+          </a:ln>
+          <a:effectLst>
+            <a:outerShdw sx="100000" sy="100000" kx="0" ky="0" algn="bl" rotWithShape="0" blurRad="88900" dist="38100" dir="5400000">
+              <a:srgbClr val="000000">
+                <a:alpha val="35000"/>
+              </a:srgbClr>
+            </a:outerShdw>
+          </a:effectLst>
+        </p:spPr>
+      </p:sp>
+      <p:sp>
+        <p:nvSpPr>
+          <p:cNvPr id="10" name="Text 8"/>
+          <p:cNvSpPr/>
+          <p:nvPr/>
+        </p:nvSpPr>
+        <p:spPr>
+          <a:xfrm>
+            <a:off x="4572000" y="3703320"/>
+            <a:ext cx="3108960" cy="365760"/>
+          </a:xfrm>
+          <a:prstGeom prst="rect">
+            <a:avLst/>
+          </a:prstGeom>
+          <a:noFill/>
+          <a:ln/>
+        </p:spPr>
+        <p:txBody>
+          <a:bodyPr wrap="square" rtlCol="0" anchor="ctr"/>
+          <a:lstStyle/>
+          <a:p>
+            <a:pPr indent="0" marL="0">
+              <a:buNone/>
+            </a:pPr>
+            <a:r>
+              <a:rPr lang="en-US" sz="1500" b="1" dirty="0">
+                <a:solidFill>
+                  <a:srgbClr val="3EA6FF"/>
+                </a:solidFill>
+                <a:latin typeface="Cambria" pitchFamily="34" charset="0"/>
+                <a:ea typeface="Cambria" pitchFamily="34" charset="-122"/>
+                <a:cs typeface="Cambria" pitchFamily="34" charset="-120"/>
+              </a:rPr>
+              <a:t>Layered on top</a:t>
+            </a:r>
+            <a:endParaRPr lang="en-US" sz="1500" dirty="0"/>
+          </a:p>
+        </p:txBody>
+      </p:sp>
+      <p:sp>
+        <p:nvSpPr>
+          <p:cNvPr id="11" name="Text 9"/>
+          <p:cNvSpPr/>
+          <p:nvPr/>
+        </p:nvSpPr>
+        <p:spPr>
+          <a:xfrm>
+            <a:off x="4572000" y="4160520"/>
+            <a:ext cx="3108960" cy="1280160"/>
+          </a:xfrm>
+          <a:prstGeom prst="rect">
+            <a:avLst/>
+          </a:prstGeom>
+          <a:noFill/>
+          <a:ln/>
+        </p:spPr>
+        <p:txBody>
+          <a:bodyPr wrap="square" rtlCol="0" anchor="ctr"/>
+          <a:lstStyle/>
+          <a:p>
+            <a:pPr indent="0" marL="0">
+              <a:lnSpc>
+                <a:spcPct val="105000"/>
+              </a:lnSpc>
+              <a:buNone/>
+            </a:pPr>
+            <a:r>
+              <a:rPr lang="en-US" sz="1200" dirty="0">
+                <a:solidFill>
+                  <a:srgbClr val="E6EDF6"/>
+                </a:solidFill>
+                <a:latin typeface="Calibri" pitchFamily="34" charset="0"/>
+                <a:ea typeface="Calibri" pitchFamily="34" charset="-122"/>
+                <a:cs typeface="Calibri" pitchFamily="34" charset="-120"/>
+              </a:rPr>
+              <a:t>Optional LLM second opinion + CNN/ViT roadmap add breadth, never replace the core.</a:t>
+            </a:r>
+            <a:endParaRPr lang="en-US" sz="1200" dirty="0"/>
+          </a:p>
+        </p:txBody>
+      </p:sp>
+      <p:sp>
+        <p:nvSpPr>
+          <p:cNvPr id="12" name="Shape 10"/>
+          <p:cNvSpPr/>
+          <p:nvPr/>
+        </p:nvSpPr>
+        <p:spPr>
+          <a:xfrm>
+            <a:off x="8138160" y="3520440"/>
+            <a:ext cx="3520440" cy="2103120"/>
+          </a:xfrm>
+          <a:prstGeom prst="roundRect">
+            <a:avLst>
+              <a:gd name="adj" fmla="val 3478"/>
+            </a:avLst>
+          </a:prstGeom>
+          <a:solidFill>
+            <a:srgbClr val="121826"/>
+          </a:solidFill>
+          <a:ln w="12700">
+            <a:solidFill>
+              <a:srgbClr val="1F2A3D"/>
+            </a:solidFill>
+            <a:prstDash val="solid"/>
+          </a:ln>
+          <a:effectLst>
+            <a:outerShdw sx="100000" sy="100000" kx="0" ky="0" algn="bl" rotWithShape="0" blurRad="88900" dist="38100" dir="5400000">
+              <a:srgbClr val="000000">
+                <a:alpha val="35000"/>
+              </a:srgbClr>
+            </a:outerShdw>
+          </a:effectLst>
+        </p:spPr>
+      </p:sp>
+      <p:sp>
+        <p:nvSpPr>
+          <p:cNvPr id="13" name="Text 11"/>
+          <p:cNvSpPr/>
+          <p:nvPr/>
+        </p:nvSpPr>
+        <p:spPr>
+          <a:xfrm>
+            <a:off x="8366760" y="3703320"/>
+            <a:ext cx="3108960" cy="365760"/>
+          </a:xfrm>
+          <a:prstGeom prst="rect">
+            <a:avLst/>
+          </a:prstGeom>
+          <a:noFill/>
+          <a:ln/>
+        </p:spPr>
+        <p:txBody>
+          <a:bodyPr wrap="square" rtlCol="0" anchor="ctr"/>
+          <a:lstStyle/>
+          <a:p>
+            <a:pPr indent="0" marL="0">
+              <a:buNone/>
+            </a:pPr>
+            <a:r>
+              <a:rPr lang="en-US" sz="1500" b="1" dirty="0">
+                <a:solidFill>
+                  <a:srgbClr val="8B5CF6"/>
+                </a:solidFill>
+                <a:latin typeface="Cambria" pitchFamily="34" charset="0"/>
+                <a:ea typeface="Cambria" pitchFamily="34" charset="-122"/>
+                <a:cs typeface="Cambria" pitchFamily="34" charset="-120"/>
+              </a:rPr>
+              <a:t>Exact attribution</a:t>
+            </a:r>
+            <a:endParaRPr lang="en-US" sz="1500" dirty="0"/>
+          </a:p>
+        </p:txBody>
+      </p:sp>
+      <p:sp>
+        <p:nvSpPr>
+          <p:cNvPr id="14" name="Text 12"/>
+          <p:cNvSpPr/>
+          <p:nvPr/>
+        </p:nvSpPr>
+        <p:spPr>
+          <a:xfrm>
+            <a:off x="8366760" y="4160520"/>
+            <a:ext cx="3108960" cy="1280160"/>
+          </a:xfrm>
+          <a:prstGeom prst="rect">
+            <a:avLst/>
+          </a:prstGeom>
+          <a:noFill/>
+          <a:ln/>
+        </p:spPr>
+        <p:txBody>
+          <a:bodyPr wrap="square" rtlCol="0" anchor="ctr"/>
+          <a:lstStyle/>
+          <a:p>
+            <a:pPr indent="0" marL="0">
+              <a:lnSpc>
+                <a:spcPct val="105000"/>
+              </a:lnSpc>
+              <a:buNone/>
+            </a:pPr>
+            <a:r>
+              <a:rPr lang="en-US" sz="1200" dirty="0">
+                <a:solidFill>
+                  <a:srgbClr val="E6EDF6"/>
+                </a:solidFill>
+                <a:latin typeface="Calibri" pitchFamily="34" charset="0"/>
+                <a:ea typeface="Calibri" pitchFamily="34" charset="-122"/>
+                <a:cs typeface="Calibri" pitchFamily="34" charset="-120"/>
+              </a:rPr>
+              <a:t>Model is linear → each signal’s contribution is its true Shapley value. No SHAP/LIME approximation.</a:t>
+            </a:r>
+            <a:endParaRPr lang="en-US" sz="1200" dirty="0"/>
+          </a:p>
+        </p:txBody>
+      </p:sp>
+      <p:sp>
+        <p:nvSpPr>
+          <p:cNvPr id="15" name="Text 13"/>
+          <p:cNvSpPr/>
+          <p:nvPr/>
+        </p:nvSpPr>
+        <p:spPr>
+          <a:xfrm>
+            <a:off x="548640" y="5806440"/>
+            <a:ext cx="11064240" cy="365760"/>
+          </a:xfrm>
+          <a:prstGeom prst="rect">
+            <a:avLst/>
+          </a:prstGeom>
+          <a:noFill/>
+          <a:ln/>
+        </p:spPr>
+        <p:txBody>
+          <a:bodyPr wrap="square" rtlCol="0" anchor="ctr"/>
+          <a:lstStyle/>
+          <a:p>
+            <a:pPr algn="ctr" indent="0" marL="0">
+              <a:buNone/>
+            </a:pPr>
+            <a:r>
+              <a:rPr lang="en-US" sz="1250" i="1" dirty="0">
+                <a:solidFill>
+                  <a:srgbClr val="2ECC71"/>
+                </a:solidFill>
+                <a:latin typeface="Calibri" pitchFamily="34" charset="0"/>
+                <a:ea typeface="Calibri" pitchFamily="34" charset="-122"/>
+                <a:cs typeface="Calibri" pitchFamily="34" charset="-120"/>
+              </a:rPr>
+              <a:t>Directly serves the stated evaluation criterion: “auditability of intelligence packages for legal admissibility.”</a:t>
+            </a:r>
+            <a:endParaRPr lang="en-US" sz="1250" dirty="0"/>
+          </a:p>
+        </p:txBody>
+      </p:sp>
+      <p:sp>
+        <p:nvSpPr>
+          <p:cNvPr id="16" name="Text 14"/>
+          <p:cNvSpPr/>
+          <p:nvPr/>
+        </p:nvSpPr>
+        <p:spPr>
+          <a:xfrm>
+            <a:off x="457200" y="6473952"/>
+            <a:ext cx="7315200" cy="274320"/>
+          </a:xfrm>
+          <a:prstGeom prst="rect">
+            <a:avLst/>
+          </a:prstGeom>
+          <a:noFill/>
+          <a:ln/>
+        </p:spPr>
+        <p:txBody>
+          <a:bodyPr wrap="square" rtlCol="0" anchor="ctr"/>
+          <a:lstStyle/>
+          <a:p>
+            <a:pPr indent="0" marL="0">
+              <a:buNone/>
+            </a:pPr>
+            <a:r>
+              <a:rPr lang="en-US" sz="900" dirty="0">
+                <a:solidFill>
+                  <a:srgbClr val="8C9BB5"/>
+                </a:solidFill>
+                <a:latin typeface="Calibri" pitchFamily="34" charset="0"/>
+                <a:ea typeface="Calibri" pitchFamily="34" charset="-122"/>
+                <a:cs typeface="Calibri" pitchFamily="34" charset="-120"/>
+              </a:rPr>
+              <a:t>PRAHARI · Digital Public Safety Intelligence</a:t>
+            </a:r>
+            <a:endParaRPr lang="en-US" sz="900" dirty="0"/>
+          </a:p>
+        </p:txBody>
+      </p:sp>
+      <p:sp>
+        <p:nvSpPr>
+          <p:cNvPr id="17" name="Text 15"/>
+          <p:cNvSpPr/>
+          <p:nvPr/>
+        </p:nvSpPr>
+        <p:spPr>
+          <a:xfrm>
+            <a:off x="11274552" y="6473952"/>
+            <a:ext cx="457200" cy="274320"/>
+          </a:xfrm>
+          <a:prstGeom prst="rect">
+            <a:avLst/>
+          </a:prstGeom>
+          <a:noFill/>
+          <a:ln/>
+        </p:spPr>
+        <p:txBody>
+          <a:bodyPr wrap="square" rtlCol="0" anchor="ctr"/>
+          <a:lstStyle/>
+          <a:p>
+            <a:pPr algn="r" indent="0" marL="0">
+              <a:buNone/>
+            </a:pPr>
+            <a:r>
+              <a:rPr lang="en-US" sz="900" dirty="0">
+                <a:solidFill>
+                  <a:srgbClr val="8C9BB5"/>
+                </a:solidFill>
+                <a:latin typeface="Calibri" pitchFamily="34" charset="0"/>
+                <a:ea typeface="Calibri" pitchFamily="34" charset="-122"/>
+                <a:cs typeface="Calibri" pitchFamily="34" charset="-120"/>
+              </a:rPr>
+              <a:t>11</a:t>
+            </a:r>
+            <a:endParaRPr lang="en-US" sz="900" dirty="0"/>
+          </a:p>
+        </p:txBody>
+      </p:sp>
+    </p:spTree>
+  </p:cSld>
+  <p:clrMapOvr>
+    <a:masterClrMapping/>
+  </p:clrMapOvr>
+</p:sld>
+</file>
+
+<file path=ppt/slides/slide12.xml><?xml version="1.0" encoding="utf-8"?>
+<p:sld xmlns:a="http://schemas.openxmlformats.org/drawingml/2006/main" xmlns:r="http://schemas.openxmlformats.org/officeDocument/2006/relationships" xmlns:p="http://schemas.openxmlformats.org/presentationml/2006/main">
+  <p:cSld name="Slide 12">
+    <p:bg>
+      <p:bgPr>
+        <a:solidFill>
+          <a:srgbClr val="0A0E17"/>
+        </a:solidFill>
+      </p:bgPr>
+    </p:bg>
+    <p:spTree>
+      <p:nvGrpSpPr>
+        <p:cNvPr id="1" name=""/>
+        <p:cNvGrpSpPr/>
+        <p:nvPr/>
+      </p:nvGrpSpPr>
+      <p:grpSpPr>
+        <a:xfrm>
+          <a:off x="0" y="0"/>
+          <a:ext cx="0" cy="0"/>
+          <a:chOff x="0" y="0"/>
+          <a:chExt cx="0" cy="0"/>
+        </a:xfrm>
+      </p:grpSpPr>
+      <p:sp>
+        <p:nvSpPr>
+          <p:cNvPr id="2" name="Text 0"/>
+          <p:cNvSpPr/>
+          <p:nvPr/>
+        </p:nvSpPr>
+        <p:spPr>
+          <a:xfrm>
+            <a:off x="548640" y="457200"/>
+            <a:ext cx="10972800" cy="640080"/>
+          </a:xfrm>
+          <a:prstGeom prst="rect">
+            <a:avLst/>
+          </a:prstGeom>
+          <a:noFill/>
+          <a:ln/>
+        </p:spPr>
+        <p:txBody>
+          <a:bodyPr wrap="square" rtlCol="0" anchor="ctr"/>
+          <a:lstStyle/>
+          <a:p>
+            <a:pPr indent="0" marL="0">
+              <a:buNone/>
+            </a:pPr>
+            <a:r>
+              <a:rPr lang="en-US" sz="2700" b="1" dirty="0">
+                <a:solidFill>
+                  <a:srgbClr val="E6EDF6"/>
+                </a:solidFill>
+                <a:latin typeface="Cambria" pitchFamily="34" charset="0"/>
+                <a:ea typeface="Cambria" pitchFamily="34" charset="-122"/>
+                <a:cs typeface="Cambria" pitchFamily="34" charset="-120"/>
+              </a:rPr>
+              <a:t>Lead time — the KPI that turns forensics into prevention</a:t>
+            </a:r>
+            <a:endParaRPr lang="en-US" sz="2700" dirty="0"/>
+          </a:p>
+        </p:txBody>
+      </p:sp>
+      <p:sp>
+        <p:nvSpPr>
+          <p:cNvPr id="3" name="Text 1"/>
+          <p:cNvSpPr/>
+          <p:nvPr/>
+        </p:nvSpPr>
+        <p:spPr>
+          <a:xfrm>
+            <a:off x="548640" y="1051560"/>
+            <a:ext cx="10972800" cy="365760"/>
+          </a:xfrm>
+          <a:prstGeom prst="rect">
+            <a:avLst/>
+          </a:prstGeom>
+          <a:noFill/>
+          <a:ln/>
+        </p:spPr>
+        <p:txBody>
+          <a:bodyPr wrap="square" rtlCol="0" anchor="ctr"/>
+          <a:lstStyle/>
+          <a:p>
+            <a:pPr indent="0" marL="0">
+              <a:buNone/>
+            </a:pPr>
+            <a:r>
+              <a:rPr lang="en-US" sz="1400" dirty="0">
+                <a:solidFill>
+                  <a:srgbClr val="8C9BB5"/>
+                </a:solidFill>
+                <a:latin typeface="Calibri" pitchFamily="34" charset="0"/>
+                <a:ea typeface="Calibri" pitchFamily="34" charset="-122"/>
+                <a:cs typeface="Calibri" pitchFamily="34" charset="-120"/>
+              </a:rPr>
+              <a:t>Worked example from the live graph (CAMP-001, this build):</a:t>
+            </a:r>
+            <a:endParaRPr lang="en-US" sz="1400" dirty="0"/>
+          </a:p>
+        </p:txBody>
+      </p:sp>
+      <p:sp>
+        <p:nvSpPr>
+          <p:cNvPr id="4" name="Shape 2"/>
+          <p:cNvSpPr/>
+          <p:nvPr/>
+        </p:nvSpPr>
+        <p:spPr>
+          <a:xfrm>
+            <a:off x="548640" y="1554480"/>
+            <a:ext cx="2606040" cy="1691640"/>
+          </a:xfrm>
+          <a:prstGeom prst="roundRect">
+            <a:avLst>
+              <a:gd name="adj" fmla="val 4324"/>
+            </a:avLst>
+          </a:prstGeom>
+          <a:solidFill>
+            <a:srgbClr val="121826"/>
+          </a:solidFill>
+          <a:ln w="12700">
+            <a:solidFill>
+              <a:srgbClr val="1F2A3D"/>
+            </a:solidFill>
+            <a:prstDash val="solid"/>
+          </a:ln>
+          <a:effectLst>
+            <a:outerShdw sx="100000" sy="100000" kx="0" ky="0" algn="bl" rotWithShape="0" blurRad="88900" dist="38100" dir="5400000">
+              <a:srgbClr val="000000">
+                <a:alpha val="35000"/>
+              </a:srgbClr>
+            </a:outerShdw>
+          </a:effectLst>
+        </p:spPr>
+      </p:sp>
+      <p:sp>
+        <p:nvSpPr>
+          <p:cNvPr id="5" name="Text 3"/>
+          <p:cNvSpPr/>
+          <p:nvPr/>
+        </p:nvSpPr>
+        <p:spPr>
+          <a:xfrm>
+            <a:off x="731520" y="1783080"/>
+            <a:ext cx="2240280" cy="731520"/>
+          </a:xfrm>
+          <a:prstGeom prst="rect">
+            <a:avLst/>
+          </a:prstGeom>
+          <a:noFill/>
+          <a:ln/>
+        </p:spPr>
+        <p:txBody>
+          <a:bodyPr wrap="square" rtlCol="0" anchor="ctr"/>
+          <a:lstStyle/>
+          <a:p>
+            <a:pPr algn="ctr" indent="0" marL="0">
+              <a:buNone/>
+            </a:pPr>
+            <a:r>
+              <a:rPr lang="en-US" sz="3200" b="1" dirty="0">
+                <a:solidFill>
+                  <a:srgbClr val="E6EDF6"/>
+                </a:solidFill>
+                <a:latin typeface="Cambria" pitchFamily="34" charset="0"/>
+                <a:ea typeface="Cambria" pitchFamily="34" charset="-122"/>
+                <a:cs typeface="Cambria" pitchFamily="34" charset="-120"/>
+              </a:rPr>
+              <a:t>5</a:t>
+            </a:r>
+            <a:endParaRPr lang="en-US" sz="3200" dirty="0"/>
+          </a:p>
+        </p:txBody>
+      </p:sp>
+      <p:sp>
+        <p:nvSpPr>
+          <p:cNvPr id="6" name="Text 4"/>
+          <p:cNvSpPr/>
+          <p:nvPr/>
+        </p:nvSpPr>
+        <p:spPr>
+          <a:xfrm>
+            <a:off x="731520" y="2560320"/>
+            <a:ext cx="2240280" cy="548640"/>
+          </a:xfrm>
+          <a:prstGeom prst="rect">
+            <a:avLst/>
+          </a:prstGeom>
+          <a:noFill/>
+          <a:ln/>
+        </p:spPr>
+        <p:txBody>
+          <a:bodyPr wrap="square" rtlCol="0" anchor="ctr"/>
+          <a:lstStyle/>
+          <a:p>
+            <a:pPr algn="ctr" indent="0" marL="0">
+              <a:buNone/>
+            </a:pPr>
+            <a:r>
+              <a:rPr lang="en-US" sz="1150" dirty="0">
+                <a:solidFill>
+                  <a:srgbClr val="8C9BB5"/>
+                </a:solidFill>
+                <a:latin typeface="Calibri" pitchFamily="34" charset="0"/>
+                <a:ea typeface="Calibri" pitchFamily="34" charset="-122"/>
+                <a:cs typeface="Calibri" pitchFamily="34" charset="-120"/>
+              </a:rPr>
+              <a:t>victims already linked</a:t>
+            </a:r>
+            <a:endParaRPr lang="en-US" sz="1150" dirty="0"/>
+          </a:p>
+        </p:txBody>
+      </p:sp>
+      <p:sp>
+        <p:nvSpPr>
+          <p:cNvPr id="7" name="Shape 5"/>
+          <p:cNvSpPr/>
+          <p:nvPr/>
+        </p:nvSpPr>
+        <p:spPr>
+          <a:xfrm>
+            <a:off x="3364992" y="1554480"/>
+            <a:ext cx="2606040" cy="1691640"/>
+          </a:xfrm>
+          <a:prstGeom prst="roundRect">
+            <a:avLst>
+              <a:gd name="adj" fmla="val 4324"/>
+            </a:avLst>
+          </a:prstGeom>
+          <a:solidFill>
+            <a:srgbClr val="121826"/>
+          </a:solidFill>
+          <a:ln w="12700">
+            <a:solidFill>
+              <a:srgbClr val="1F2A3D"/>
+            </a:solidFill>
+            <a:prstDash val="solid"/>
+          </a:ln>
+          <a:effectLst>
+            <a:outerShdw sx="100000" sy="100000" kx="0" ky="0" algn="bl" rotWithShape="0" blurRad="88900" dist="38100" dir="5400000">
+              <a:srgbClr val="000000">
+                <a:alpha val="35000"/>
+              </a:srgbClr>
+            </a:outerShdw>
+          </a:effectLst>
+        </p:spPr>
+      </p:sp>
+      <p:sp>
+        <p:nvSpPr>
+          <p:cNvPr id="8" name="Text 6"/>
+          <p:cNvSpPr/>
+          <p:nvPr/>
+        </p:nvSpPr>
+        <p:spPr>
+          <a:xfrm>
+            <a:off x="3547872" y="1783080"/>
+            <a:ext cx="2240280" cy="731520"/>
+          </a:xfrm>
+          <a:prstGeom prst="rect">
+            <a:avLst/>
+          </a:prstGeom>
+          <a:noFill/>
+          <a:ln/>
+        </p:spPr>
+        <p:txBody>
+          <a:bodyPr wrap="square" rtlCol="0" anchor="ctr"/>
+          <a:lstStyle/>
+          <a:p>
+            <a:pPr algn="ctr" indent="0" marL="0">
+              <a:buNone/>
+            </a:pPr>
+            <a:r>
+              <a:rPr lang="en-US" sz="3200" b="1" dirty="0">
+                <a:solidFill>
+                  <a:srgbClr val="F5A623"/>
+                </a:solidFill>
+                <a:latin typeface="Cambria" pitchFamily="34" charset="0"/>
+                <a:ea typeface="Cambria" pitchFamily="34" charset="-122"/>
+                <a:cs typeface="Cambria" pitchFamily="34" charset="-120"/>
+              </a:rPr>
+              <a:t>0.71</a:t>
+            </a:r>
+            <a:endParaRPr lang="en-US" sz="3200" dirty="0"/>
+          </a:p>
+        </p:txBody>
+      </p:sp>
+      <p:sp>
+        <p:nvSpPr>
+          <p:cNvPr id="9" name="Text 7"/>
+          <p:cNvSpPr/>
+          <p:nvPr/>
+        </p:nvSpPr>
+        <p:spPr>
+          <a:xfrm>
+            <a:off x="3547872" y="2560320"/>
+            <a:ext cx="2240280" cy="548640"/>
+          </a:xfrm>
+          <a:prstGeom prst="rect">
+            <a:avLst/>
+          </a:prstGeom>
+          <a:noFill/>
+          <a:ln/>
+        </p:spPr>
+        <p:txBody>
+          <a:bodyPr wrap="square" rtlCol="0" anchor="ctr"/>
+          <a:lstStyle/>
+          <a:p>
+            <a:pPr algn="ctr" indent="0" marL="0">
+              <a:buNone/>
+            </a:pPr>
+            <a:r>
+              <a:rPr lang="en-US" sz="1150" dirty="0">
+                <a:solidFill>
+                  <a:srgbClr val="8C9BB5"/>
+                </a:solidFill>
+                <a:latin typeface="Calibri" pitchFamily="34" charset="0"/>
+                <a:ea typeface="Calibri" pitchFamily="34" charset="-122"/>
+                <a:cs typeface="Calibri" pitchFamily="34" charset="-120"/>
+              </a:rPr>
+              <a:t>new victims / day (observed velocity)</a:t>
+            </a:r>
+            <a:endParaRPr lang="en-US" sz="1150" dirty="0"/>
+          </a:p>
+        </p:txBody>
+      </p:sp>
+      <p:sp>
+        <p:nvSpPr>
+          <p:cNvPr id="10" name="Shape 8"/>
+          <p:cNvSpPr/>
+          <p:nvPr/>
+        </p:nvSpPr>
+        <p:spPr>
+          <a:xfrm>
+            <a:off x="6181344" y="1554480"/>
+            <a:ext cx="2606040" cy="1691640"/>
+          </a:xfrm>
+          <a:prstGeom prst="roundRect">
+            <a:avLst>
+              <a:gd name="adj" fmla="val 4324"/>
+            </a:avLst>
+          </a:prstGeom>
+          <a:solidFill>
+            <a:srgbClr val="121826"/>
+          </a:solidFill>
+          <a:ln w="12700">
+            <a:solidFill>
+              <a:srgbClr val="1F2A3D"/>
+            </a:solidFill>
+            <a:prstDash val="solid"/>
+          </a:ln>
+          <a:effectLst>
+            <a:outerShdw sx="100000" sy="100000" kx="0" ky="0" algn="bl" rotWithShape="0" blurRad="88900" dist="38100" dir="5400000">
+              <a:srgbClr val="000000">
+                <a:alpha val="35000"/>
+              </a:srgbClr>
+            </a:outerShdw>
+          </a:effectLst>
+        </p:spPr>
+      </p:sp>
+      <p:sp>
+        <p:nvSpPr>
+          <p:cNvPr id="11" name="Text 9"/>
+          <p:cNvSpPr/>
+          <p:nvPr/>
+        </p:nvSpPr>
+        <p:spPr>
+          <a:xfrm>
+            <a:off x="6364224" y="1783080"/>
+            <a:ext cx="2240280" cy="731520"/>
+          </a:xfrm>
+          <a:prstGeom prst="rect">
+            <a:avLst/>
+          </a:prstGeom>
+          <a:noFill/>
+          <a:ln/>
+        </p:spPr>
+        <p:txBody>
+          <a:bodyPr wrap="square" rtlCol="0" anchor="ctr"/>
+          <a:lstStyle/>
+          <a:p>
+            <a:pPr algn="ctr" indent="0" marL="0">
+              <a:buNone/>
+            </a:pPr>
+            <a:r>
+              <a:rPr lang="en-US" sz="3200" b="1" dirty="0">
+                <a:solidFill>
+                  <a:srgbClr val="FF4D57"/>
+                </a:solidFill>
+                <a:latin typeface="Cambria" pitchFamily="34" charset="0"/>
+                <a:ea typeface="Cambria" pitchFamily="34" charset="-122"/>
+                <a:cs typeface="Cambria" pitchFamily="34" charset="-120"/>
+              </a:rPr>
+              <a:t>≈133</a:t>
+            </a:r>
+            <a:endParaRPr lang="en-US" sz="3200" dirty="0"/>
+          </a:p>
+        </p:txBody>
+      </p:sp>
+      <p:sp>
+        <p:nvSpPr>
+          <p:cNvPr id="12" name="Text 10"/>
+          <p:cNvSpPr/>
+          <p:nvPr/>
+        </p:nvSpPr>
+        <p:spPr>
+          <a:xfrm>
+            <a:off x="6364224" y="2560320"/>
+            <a:ext cx="2240280" cy="548640"/>
+          </a:xfrm>
+          <a:prstGeom prst="rect">
+            <a:avLst/>
+          </a:prstGeom>
+          <a:noFill/>
+          <a:ln/>
+        </p:spPr>
+        <p:txBody>
+          <a:bodyPr wrap="square" rtlCol="0" anchor="ctr"/>
+          <a:lstStyle/>
+          <a:p>
+            <a:pPr algn="ctr" indent="0" marL="0">
+              <a:buNone/>
+            </a:pPr>
+            <a:r>
+              <a:rPr lang="en-US" sz="1150" dirty="0">
+                <a:solidFill>
+                  <a:srgbClr val="8C9BB5"/>
+                </a:solidFill>
+                <a:latin typeface="Calibri" pitchFamily="34" charset="0"/>
+                <a:ea typeface="Calibri" pitchFamily="34" charset="-122"/>
+                <a:cs typeface="Calibri" pitchFamily="34" charset="-120"/>
+              </a:rPr>
+              <a:t>days to 100 victims</a:t>
+            </a:r>
+            <a:endParaRPr lang="en-US" sz="1150" dirty="0"/>
+          </a:p>
+        </p:txBody>
+      </p:sp>
+      <p:sp>
+        <p:nvSpPr>
+          <p:cNvPr id="13" name="Shape 11"/>
+          <p:cNvSpPr/>
+          <p:nvPr/>
+        </p:nvSpPr>
+        <p:spPr>
+          <a:xfrm>
+            <a:off x="8997696" y="1554480"/>
+            <a:ext cx="2606040" cy="1691640"/>
+          </a:xfrm>
+          <a:prstGeom prst="roundRect">
+            <a:avLst>
+              <a:gd name="adj" fmla="val 4324"/>
+            </a:avLst>
+          </a:prstGeom>
+          <a:solidFill>
+            <a:srgbClr val="121826"/>
+          </a:solidFill>
+          <a:ln w="12700">
+            <a:solidFill>
+              <a:srgbClr val="1F2A3D"/>
+            </a:solidFill>
+            <a:prstDash val="solid"/>
+          </a:ln>
+          <a:effectLst>
+            <a:outerShdw sx="100000" sy="100000" kx="0" ky="0" algn="bl" rotWithShape="0" blurRad="88900" dist="38100" dir="5400000">
+              <a:srgbClr val="000000">
+                <a:alpha val="35000"/>
+              </a:srgbClr>
+            </a:outerShdw>
+          </a:effectLst>
+        </p:spPr>
+      </p:sp>
+      <p:sp>
+        <p:nvSpPr>
+          <p:cNvPr id="14" name="Text 12"/>
+          <p:cNvSpPr/>
+          <p:nvPr/>
+        </p:nvSpPr>
+        <p:spPr>
+          <a:xfrm>
+            <a:off x="9180576" y="1783080"/>
+            <a:ext cx="2240280" cy="731520"/>
+          </a:xfrm>
+          <a:prstGeom prst="rect">
+            <a:avLst/>
+          </a:prstGeom>
+          <a:noFill/>
+          <a:ln/>
+        </p:spPr>
+        <p:txBody>
+          <a:bodyPr wrap="square" rtlCol="0" anchor="ctr"/>
+          <a:lstStyle/>
+          <a:p>
+            <a:pPr algn="ctr" indent="0" marL="0">
+              <a:buNone/>
+            </a:pPr>
+            <a:r>
+              <a:rPr lang="en-US" sz="3200" b="1" dirty="0">
+                <a:solidFill>
+                  <a:srgbClr val="FF2D95"/>
+                </a:solidFill>
+                <a:latin typeface="Cambria" pitchFamily="34" charset="0"/>
+                <a:ea typeface="Cambria" pitchFamily="34" charset="-122"/>
+                <a:cs typeface="Cambria" pitchFamily="34" charset="-120"/>
+              </a:rPr>
+              <a:t>₹88.3 L</a:t>
+            </a:r>
+            <a:endParaRPr lang="en-US" sz="3200" dirty="0"/>
+          </a:p>
+        </p:txBody>
+      </p:sp>
+      <p:sp>
+        <p:nvSpPr>
+          <p:cNvPr id="15" name="Text 13"/>
+          <p:cNvSpPr/>
+          <p:nvPr/>
+        </p:nvSpPr>
+        <p:spPr>
+          <a:xfrm>
+            <a:off x="9180576" y="2560320"/>
+            <a:ext cx="2240280" cy="548640"/>
+          </a:xfrm>
+          <a:prstGeom prst="rect">
+            <a:avLst/>
+          </a:prstGeom>
+          <a:noFill/>
+          <a:ln/>
+        </p:spPr>
+        <p:txBody>
+          <a:bodyPr wrap="square" rtlCol="0" anchor="ctr"/>
+          <a:lstStyle/>
+          <a:p>
+            <a:pPr algn="ctr" indent="0" marL="0">
+              <a:buNone/>
+            </a:pPr>
+            <a:r>
+              <a:rPr lang="en-US" sz="1150" dirty="0">
+                <a:solidFill>
+                  <a:srgbClr val="8C9BB5"/>
+                </a:solidFill>
+                <a:latin typeface="Calibri" pitchFamily="34" charset="0"/>
+                <a:ea typeface="Calibri" pitchFamily="34" charset="-122"/>
+                <a:cs typeface="Calibri" pitchFamily="34" charset="-120"/>
+              </a:rPr>
+              <a:t>exposure if unchecked</a:t>
+            </a:r>
+            <a:endParaRPr lang="en-US" sz="1150" dirty="0"/>
+          </a:p>
+        </p:txBody>
+      </p:sp>
+      <p:sp>
+        <p:nvSpPr>
+          <p:cNvPr id="16" name="Shape 14"/>
+          <p:cNvSpPr/>
+          <p:nvPr/>
+        </p:nvSpPr>
+        <p:spPr>
+          <a:xfrm>
+            <a:off x="548640" y="3429000"/>
+            <a:ext cx="11064240" cy="1371600"/>
+          </a:xfrm>
+          <a:prstGeom prst="roundRect">
+            <a:avLst>
+              <a:gd name="adj" fmla="val 5333"/>
+            </a:avLst>
+          </a:prstGeom>
+          <a:solidFill>
+            <a:srgbClr val="0F1420"/>
+          </a:solidFill>
+          <a:ln w="12700">
+            <a:solidFill>
+              <a:srgbClr val="1F2A3D"/>
+            </a:solidFill>
+            <a:prstDash val="solid"/>
+          </a:ln>
+          <a:effectLst>
+            <a:outerShdw sx="100000" sy="100000" kx="0" ky="0" algn="bl" rotWithShape="0" blurRad="88900" dist="38100" dir="5400000">
+              <a:srgbClr val="000000">
+                <a:alpha val="35000"/>
+              </a:srgbClr>
+            </a:outerShdw>
+          </a:effectLst>
+        </p:spPr>
+      </p:sp>
+      <p:sp>
+        <p:nvSpPr>
+          <p:cNvPr id="17" name="Text 15"/>
+          <p:cNvSpPr/>
+          <p:nvPr/>
+        </p:nvSpPr>
+        <p:spPr>
+          <a:xfrm>
+            <a:off x="822960" y="3611880"/>
+            <a:ext cx="10515600" cy="457200"/>
+          </a:xfrm>
+          <a:prstGeom prst="rect">
+            <a:avLst/>
+          </a:prstGeom>
+          <a:noFill/>
+          <a:ln/>
+        </p:spPr>
+        <p:txBody>
+          <a:bodyPr wrap="square" rtlCol="0" anchor="ctr"/>
+          <a:lstStyle/>
+          <a:p>
+            <a:pPr indent="0" marL="0">
+              <a:buNone/>
+            </a:pPr>
+            <a:r>
+              <a:rPr lang="en-US" sz="1500" b="1" dirty="0">
+                <a:solidFill>
+                  <a:srgbClr val="3EA6FF"/>
+                </a:solidFill>
+                <a:latin typeface="Courier New" pitchFamily="34" charset="0"/>
+                <a:ea typeface="Courier New" pitchFamily="34" charset="-122"/>
+                <a:cs typeface="Courier New" pitchFamily="34" charset="-120"/>
+              </a:rPr>
+              <a:t>(100 − 5 victims) ÷ 0.71 victims/day  ≈  133 days of actionable warning</a:t>
+            </a:r>
+            <a:endParaRPr lang="en-US" sz="1500" dirty="0"/>
+          </a:p>
+        </p:txBody>
+      </p:sp>
+      <p:sp>
+        <p:nvSpPr>
+          <p:cNvPr id="18" name="Text 16"/>
+          <p:cNvSpPr/>
+          <p:nvPr/>
+        </p:nvSpPr>
+        <p:spPr>
+          <a:xfrm>
+            <a:off x="822960" y="4114800"/>
+            <a:ext cx="10515600" cy="548640"/>
+          </a:xfrm>
+          <a:prstGeom prst="rect">
+            <a:avLst/>
+          </a:prstGeom>
+          <a:noFill/>
+          <a:ln/>
+        </p:spPr>
+        <p:txBody>
+          <a:bodyPr wrap="square" rtlCol="0" anchor="ctr"/>
+          <a:lstStyle/>
+          <a:p>
+            <a:pPr indent="0" marL="0">
+              <a:buNone/>
+            </a:pPr>
+            <a:r>
+              <a:rPr lang="en-US" sz="1300" dirty="0">
+                <a:solidFill>
+                  <a:srgbClr val="E6EDF6"/>
+                </a:solidFill>
+                <a:latin typeface="Calibri" pitchFamily="34" charset="0"/>
+                <a:ea typeface="Calibri" pitchFamily="34" charset="-122"/>
+                <a:cs typeface="Calibri" pitchFamily="34" charset="-120"/>
+              </a:rPr>
+              <a:t>Every other tool tells you a gang existed. Prahari tells you how long you have before it scales — the difference between a case file and an intervention window.</a:t>
+            </a:r>
+            <a:endParaRPr lang="en-US" sz="1300" dirty="0"/>
+          </a:p>
+        </p:txBody>
+      </p:sp>
+      <p:sp>
+        <p:nvSpPr>
+          <p:cNvPr id="19" name="Text 17"/>
+          <p:cNvSpPr/>
+          <p:nvPr/>
+        </p:nvSpPr>
+        <p:spPr>
+          <a:xfrm>
+            <a:off x="548640" y="4983480"/>
+            <a:ext cx="11064240" cy="365760"/>
+          </a:xfrm>
+          <a:prstGeom prst="rect">
+            <a:avLst/>
+          </a:prstGeom>
+          <a:noFill/>
+          <a:ln/>
+        </p:spPr>
+        <p:txBody>
+          <a:bodyPr wrap="square" rtlCol="0" anchor="ctr"/>
+          <a:lstStyle/>
+          <a:p>
+            <a:pPr algn="ctr" indent="0" marL="0">
+              <a:buNone/>
+            </a:pPr>
+            <a:r>
+              <a:rPr lang="en-US" sz="1200" dirty="0">
+                <a:solidFill>
+                  <a:srgbClr val="8C9BB5"/>
+                </a:solidFill>
+                <a:latin typeface="Calibri" pitchFamily="34" charset="0"/>
+                <a:ea typeface="Calibri" pitchFamily="34" charset="-122"/>
+                <a:cs typeface="Calibri" pitchFamily="34" charset="-120"/>
+              </a:rPr>
+              <a:t>Kingpin ranked by centrality  •  cells found by Clauset-Newman-Moore modularity  •  every package SHA-256 sealed for court</a:t>
+            </a:r>
+            <a:endParaRPr lang="en-US" sz="1200" dirty="0"/>
+          </a:p>
+        </p:txBody>
+      </p:sp>
+      <p:sp>
+        <p:nvSpPr>
+          <p:cNvPr id="20" name="Text 18"/>
+          <p:cNvSpPr/>
+          <p:nvPr/>
+        </p:nvSpPr>
+        <p:spPr>
+          <a:xfrm>
+            <a:off x="548640" y="5486400"/>
+            <a:ext cx="11064240" cy="365760"/>
+          </a:xfrm>
+          <a:prstGeom prst="rect">
+            <a:avLst/>
+          </a:prstGeom>
+          <a:noFill/>
+          <a:ln/>
+        </p:spPr>
+        <p:txBody>
+          <a:bodyPr wrap="square" rtlCol="0" anchor="ctr"/>
+          <a:lstStyle/>
+          <a:p>
+            <a:pPr algn="ctr" indent="0" marL="0">
+              <a:buNone/>
+            </a:pPr>
+            <a:r>
+              <a:rPr lang="en-US" sz="1250" i="1" dirty="0">
+                <a:solidFill>
+                  <a:srgbClr val="2ECC71"/>
+                </a:solidFill>
+                <a:latin typeface="Calibri" pitchFamily="34" charset="0"/>
+                <a:ea typeface="Calibri" pitchFamily="34" charset="-122"/>
+                <a:cs typeface="Calibri" pitchFamily="34" charset="-120"/>
+              </a:rPr>
+              <a:t>Addresses the criterion: “fraud network detection lead time before mass victimisation.”</a:t>
+            </a:r>
+            <a:endParaRPr lang="en-US" sz="1250" dirty="0"/>
+          </a:p>
+        </p:txBody>
+      </p:sp>
+      <p:sp>
+        <p:nvSpPr>
+          <p:cNvPr id="21" name="Text 19"/>
+          <p:cNvSpPr/>
+          <p:nvPr/>
+        </p:nvSpPr>
+        <p:spPr>
+          <a:xfrm>
+            <a:off x="457200" y="6473952"/>
+            <a:ext cx="7315200" cy="274320"/>
+          </a:xfrm>
+          <a:prstGeom prst="rect">
+            <a:avLst/>
+          </a:prstGeom>
+          <a:noFill/>
+          <a:ln/>
+        </p:spPr>
+        <p:txBody>
+          <a:bodyPr wrap="square" rtlCol="0" anchor="ctr"/>
+          <a:lstStyle/>
+          <a:p>
+            <a:pPr indent="0" marL="0">
+              <a:buNone/>
+            </a:pPr>
+            <a:r>
+              <a:rPr lang="en-US" sz="900" dirty="0">
+                <a:solidFill>
+                  <a:srgbClr val="8C9BB5"/>
+                </a:solidFill>
+                <a:latin typeface="Calibri" pitchFamily="34" charset="0"/>
+                <a:ea typeface="Calibri" pitchFamily="34" charset="-122"/>
+                <a:cs typeface="Calibri" pitchFamily="34" charset="-120"/>
+              </a:rPr>
+              <a:t>PRAHARI · Digital Public Safety Intelligence</a:t>
+            </a:r>
+            <a:endParaRPr lang="en-US" sz="900" dirty="0"/>
+          </a:p>
+        </p:txBody>
+      </p:sp>
+      <p:sp>
+        <p:nvSpPr>
+          <p:cNvPr id="22" name="Text 20"/>
+          <p:cNvSpPr/>
+          <p:nvPr/>
+        </p:nvSpPr>
+        <p:spPr>
+          <a:xfrm>
+            <a:off x="11274552" y="6473952"/>
+            <a:ext cx="457200" cy="274320"/>
+          </a:xfrm>
+          <a:prstGeom prst="rect">
+            <a:avLst/>
+          </a:prstGeom>
+          <a:noFill/>
+          <a:ln/>
+        </p:spPr>
+        <p:txBody>
+          <a:bodyPr wrap="square" rtlCol="0" anchor="ctr"/>
+          <a:lstStyle/>
+          <a:p>
+            <a:pPr algn="r" indent="0" marL="0">
+              <a:buNone/>
+            </a:pPr>
+            <a:r>
+              <a:rPr lang="en-US" sz="900" dirty="0">
+                <a:solidFill>
+                  <a:srgbClr val="8C9BB5"/>
+                </a:solidFill>
+                <a:latin typeface="Calibri" pitchFamily="34" charset="0"/>
+                <a:ea typeface="Calibri" pitchFamily="34" charset="-122"/>
+                <a:cs typeface="Calibri" pitchFamily="34" charset="-120"/>
+              </a:rPr>
+              <a:t>12</a:t>
+            </a:r>
+            <a:endParaRPr lang="en-US" sz="900" dirty="0"/>
+          </a:p>
+        </p:txBody>
+      </p:sp>
+    </p:spTree>
+  </p:cSld>
+  <p:clrMapOvr>
+    <a:masterClrMapping/>
+  </p:clrMapOvr>
+</p:sld>
+</file>
+
+<file path=ppt/slides/slide13.xml><?xml version="1.0" encoding="utf-8"?>
+<p:sld xmlns:a="http://schemas.openxmlformats.org/drawingml/2006/main" xmlns:r="http://schemas.openxmlformats.org/officeDocument/2006/relationships" xmlns:p="http://schemas.openxmlformats.org/presentationml/2006/main">
+  <p:cSld name="Slide 13">
+    <p:bg>
+      <p:bgPr>
+        <a:solidFill>
+          <a:srgbClr val="0A0E17"/>
+        </a:solidFill>
+      </p:bgPr>
+    </p:bg>
+    <p:spTree>
+      <p:nvGrpSpPr>
+        <p:cNvPr id="1" name=""/>
+        <p:cNvGrpSpPr/>
+        <p:nvPr/>
+      </p:nvGrpSpPr>
+      <p:grpSpPr>
+        <a:xfrm>
+          <a:off x="0" y="0"/>
+          <a:ext cx="0" cy="0"/>
+          <a:chOff x="0" y="0"/>
+          <a:chExt cx="0" cy="0"/>
+        </a:xfrm>
+      </p:grpSpPr>
+      <p:sp>
+        <p:nvSpPr>
+          <p:cNvPr id="2" name="Text 0"/>
+          <p:cNvSpPr/>
+          <p:nvPr/>
+        </p:nvSpPr>
+        <p:spPr>
+          <a:xfrm>
+            <a:off x="548640" y="457200"/>
+            <a:ext cx="10972800" cy="640080"/>
+          </a:xfrm>
+          <a:prstGeom prst="rect">
+            <a:avLst/>
+          </a:prstGeom>
+          <a:noFill/>
+          <a:ln/>
+        </p:spPr>
+        <p:txBody>
+          <a:bodyPr wrap="square" rtlCol="0" anchor="ctr"/>
+          <a:lstStyle/>
+          <a:p>
+            <a:pPr indent="0" marL="0">
+              <a:buNone/>
+            </a:pPr>
+            <a:r>
+              <a:rPr lang="en-US" sz="2700" b="1" dirty="0">
+                <a:solidFill>
+                  <a:srgbClr val="E6EDF6"/>
+                </a:solidFill>
+                <a:latin typeface="Cambria" pitchFamily="34" charset="0"/>
+                <a:ea typeface="Cambria" pitchFamily="34" charset="-122"/>
+                <a:cs typeface="Cambria" pitchFamily="34" charset="-120"/>
+              </a:rPr>
+              <a:t>What we tested honestly — and what we did about it</a:t>
+            </a:r>
+            <a:endParaRPr lang="en-US" sz="2700" dirty="0"/>
+          </a:p>
+        </p:txBody>
+      </p:sp>
+      <p:sp>
+        <p:nvSpPr>
+          <p:cNvPr id="3" name="Text 1"/>
+          <p:cNvSpPr/>
+          <p:nvPr/>
+        </p:nvSpPr>
+        <p:spPr>
+          <a:xfrm>
+            <a:off x="548640" y="1051560"/>
+            <a:ext cx="10972800" cy="365760"/>
+          </a:xfrm>
+          <a:prstGeom prst="rect">
+            <a:avLst/>
+          </a:prstGeom>
+          <a:noFill/>
+          <a:ln/>
+        </p:spPr>
+        <p:txBody>
+          <a:bodyPr wrap="square" rtlCol="0" anchor="ctr"/>
+          <a:lstStyle/>
+          <a:p>
+            <a:pPr indent="0" marL="0">
+              <a:buNone/>
+            </a:pPr>
+            <a:r>
+              <a:rPr lang="en-US" sz="1350" i="1" dirty="0">
+                <a:solidFill>
+                  <a:srgbClr val="8C9BB5"/>
+                </a:solidFill>
+                <a:latin typeface="Calibri" pitchFamily="34" charset="0"/>
+                <a:ea typeface="Calibri" pitchFamily="34" charset="-122"/>
+                <a:cs typeface="Calibri" pitchFamily="34" charset="-120"/>
+              </a:rPr>
+              <a:t>We publish our weaknesses. A public-safety tool that hides its error modes cannot be trusted with a citizen’s money.</a:t>
+            </a:r>
+            <a:endParaRPr lang="en-US" sz="1350" dirty="0"/>
+          </a:p>
+        </p:txBody>
+      </p:sp>
+      <p:sp>
+        <p:nvSpPr>
+          <p:cNvPr id="4" name="Shape 2"/>
+          <p:cNvSpPr/>
+          <p:nvPr/>
+        </p:nvSpPr>
+        <p:spPr>
+          <a:xfrm>
+            <a:off x="548640" y="1600200"/>
+            <a:ext cx="11064240" cy="987552"/>
+          </a:xfrm>
+          <a:prstGeom prst="roundRect">
+            <a:avLst>
+              <a:gd name="adj" fmla="val 7407"/>
+            </a:avLst>
+          </a:prstGeom>
+          <a:solidFill>
+            <a:srgbClr val="121826"/>
+          </a:solidFill>
+          <a:ln w="12700">
+            <a:solidFill>
+              <a:srgbClr val="1F2A3D"/>
+            </a:solidFill>
+            <a:prstDash val="solid"/>
+          </a:ln>
+          <a:effectLst>
+            <a:outerShdw sx="100000" sy="100000" kx="0" ky="0" algn="bl" rotWithShape="0" blurRad="88900" dist="38100" dir="5400000">
+              <a:srgbClr val="000000">
+                <a:alpha val="35000"/>
+              </a:srgbClr>
+            </a:outerShdw>
+          </a:effectLst>
+        </p:spPr>
+      </p:sp>
+      <p:sp>
+        <p:nvSpPr>
+          <p:cNvPr id="5" name="Shape 3"/>
+          <p:cNvSpPr/>
+          <p:nvPr/>
+        </p:nvSpPr>
+        <p:spPr>
+          <a:xfrm>
+            <a:off x="548640" y="1600200"/>
+            <a:ext cx="64008" cy="987552"/>
+          </a:xfrm>
+          <a:prstGeom prst="roundRect">
+            <a:avLst>
+              <a:gd name="adj" fmla="val 42857"/>
+            </a:avLst>
+          </a:prstGeom>
+          <a:solidFill>
+            <a:srgbClr val="3EA6FF"/>
+          </a:solidFill>
+          <a:ln/>
+        </p:spPr>
+      </p:sp>
+      <p:sp>
+        <p:nvSpPr>
+          <p:cNvPr id="6" name="Text 4"/>
+          <p:cNvSpPr/>
+          <p:nvPr/>
+        </p:nvSpPr>
+        <p:spPr>
+          <a:xfrm>
+            <a:off x="777240" y="1673352"/>
+            <a:ext cx="3657600" cy="411480"/>
+          </a:xfrm>
+          <a:prstGeom prst="rect">
+            <a:avLst/>
+          </a:prstGeom>
+          <a:noFill/>
+          <a:ln/>
+        </p:spPr>
+        <p:txBody>
+          <a:bodyPr wrap="square" rtlCol="0" anchor="ctr"/>
+          <a:lstStyle/>
+          <a:p>
+            <a:pPr indent="0" marL="0">
+              <a:buNone/>
+            </a:pPr>
+            <a:r>
+              <a:rPr lang="en-US" sz="1300" b="1" dirty="0">
+                <a:solidFill>
+                  <a:srgbClr val="3EA6FF"/>
+                </a:solidFill>
+                <a:latin typeface="Cambria" pitchFamily="34" charset="0"/>
+                <a:ea typeface="Cambria" pitchFamily="34" charset="-122"/>
+                <a:cs typeface="Cambria" pitchFamily="34" charset="-120"/>
+              </a:rPr>
+              <a:t>Self-graded corpus would be circular</a:t>
+            </a:r>
+            <a:endParaRPr lang="en-US" sz="1300" dirty="0"/>
+          </a:p>
+        </p:txBody>
+      </p:sp>
+      <p:sp>
+        <p:nvSpPr>
+          <p:cNvPr id="7" name="Text 5"/>
+          <p:cNvSpPr/>
+          <p:nvPr/>
+        </p:nvSpPr>
+        <p:spPr>
+          <a:xfrm>
+            <a:off x="777240" y="2075688"/>
+            <a:ext cx="3657600" cy="457200"/>
+          </a:xfrm>
+          <a:prstGeom prst="rect">
+            <a:avLst/>
+          </a:prstGeom>
+          <a:noFill/>
+          <a:ln/>
+        </p:spPr>
+        <p:txBody>
+          <a:bodyPr wrap="square" rtlCol="0" anchor="ctr"/>
+          <a:lstStyle/>
+          <a:p>
+            <a:pPr indent="0" marL="0">
+              <a:buNone/>
+            </a:pPr>
+            <a:r>
+              <a:rPr lang="en-US" sz="1050" dirty="0">
+                <a:solidFill>
+                  <a:srgbClr val="8C9BB5"/>
+                </a:solidFill>
+                <a:latin typeface="Calibri" pitchFamily="34" charset="0"/>
+                <a:ea typeface="Calibri" pitchFamily="34" charset="-122"/>
+                <a:cs typeface="Calibri" pitchFamily="34" charset="-120"/>
+              </a:rPr>
+              <a:t>Added a held-out set paraphrased from documented MHA/I4C + news cases — never used to author the patterns.</a:t>
+            </a:r>
+            <a:endParaRPr lang="en-US" sz="1050" dirty="0"/>
+          </a:p>
+        </p:txBody>
+      </p:sp>
+      <p:sp>
+        <p:nvSpPr>
+          <p:cNvPr id="8" name="Text 6"/>
+          <p:cNvSpPr/>
+          <p:nvPr/>
+        </p:nvSpPr>
+        <p:spPr>
+          <a:xfrm>
+            <a:off x="4663440" y="1600200"/>
+            <a:ext cx="6766560" cy="987552"/>
+          </a:xfrm>
+          <a:prstGeom prst="rect">
+            <a:avLst/>
+          </a:prstGeom>
+          <a:noFill/>
+          <a:ln/>
+        </p:spPr>
+        <p:txBody>
+          <a:bodyPr wrap="square" rtlCol="0" anchor="ctr"/>
+          <a:lstStyle/>
+          <a:p>
+            <a:pPr indent="0" marL="0">
+              <a:buNone/>
+            </a:pPr>
+            <a:r>
+              <a:rPr lang="en-US" sz="1200" dirty="0">
+                <a:solidFill>
+                  <a:srgbClr val="E6EDF6"/>
+                </a:solidFill>
+                <a:latin typeface="Calibri" pitchFamily="34" charset="0"/>
+                <a:ea typeface="Calibri" pitchFamily="34" charset="-122"/>
+                <a:cs typeface="Calibri" pitchFamily="34" charset="-120"/>
+              </a:rPr>
+              <a:t>100% precision · 91.7% recall · 0% false alarms (reported separately, not hidden)</a:t>
+            </a:r>
+            <a:endParaRPr lang="en-US" sz="1200" dirty="0"/>
+          </a:p>
+        </p:txBody>
+      </p:sp>
+      <p:sp>
+        <p:nvSpPr>
+          <p:cNvPr id="9" name="Shape 7"/>
+          <p:cNvSpPr/>
+          <p:nvPr/>
+        </p:nvSpPr>
+        <p:spPr>
+          <a:xfrm>
+            <a:off x="548640" y="2697480"/>
+            <a:ext cx="11064240" cy="987552"/>
+          </a:xfrm>
+          <a:prstGeom prst="roundRect">
+            <a:avLst>
+              <a:gd name="adj" fmla="val 7407"/>
+            </a:avLst>
+          </a:prstGeom>
+          <a:solidFill>
+            <a:srgbClr val="0F1420"/>
+          </a:solidFill>
+          <a:ln w="12700">
+            <a:solidFill>
+              <a:srgbClr val="1F2A3D"/>
+            </a:solidFill>
+            <a:prstDash val="solid"/>
+          </a:ln>
+          <a:effectLst>
+            <a:outerShdw sx="100000" sy="100000" kx="0" ky="0" algn="bl" rotWithShape="0" blurRad="88900" dist="38100" dir="5400000">
+              <a:srgbClr val="000000">
+                <a:alpha val="35000"/>
+              </a:srgbClr>
+            </a:outerShdw>
+          </a:effectLst>
+        </p:spPr>
+      </p:sp>
+      <p:sp>
+        <p:nvSpPr>
+          <p:cNvPr id="10" name="Shape 8"/>
+          <p:cNvSpPr/>
+          <p:nvPr/>
+        </p:nvSpPr>
+        <p:spPr>
+          <a:xfrm>
+            <a:off x="548640" y="2697480"/>
+            <a:ext cx="64008" cy="987552"/>
+          </a:xfrm>
+          <a:prstGeom prst="roundRect">
+            <a:avLst>
+              <a:gd name="adj" fmla="val 42857"/>
+            </a:avLst>
+          </a:prstGeom>
+          <a:solidFill>
+            <a:srgbClr val="F5A623"/>
+          </a:solidFill>
+          <a:ln/>
+        </p:spPr>
+      </p:sp>
+      <p:sp>
+        <p:nvSpPr>
+          <p:cNvPr id="11" name="Text 9"/>
+          <p:cNvSpPr/>
+          <p:nvPr/>
+        </p:nvSpPr>
+        <p:spPr>
+          <a:xfrm>
+            <a:off x="777240" y="2770632"/>
+            <a:ext cx="3657600" cy="411480"/>
+          </a:xfrm>
+          <a:prstGeom prst="rect">
+            <a:avLst/>
+          </a:prstGeom>
+          <a:noFill/>
+          <a:ln/>
+        </p:spPr>
+        <p:txBody>
+          <a:bodyPr wrap="square" rtlCol="0" anchor="ctr"/>
+          <a:lstStyle/>
+          <a:p>
+            <a:pPr indent="0" marL="0">
+              <a:buNone/>
+            </a:pPr>
+            <a:r>
+              <a:rPr lang="en-US" sz="1300" b="1" dirty="0">
+                <a:solidFill>
+                  <a:srgbClr val="F5A623"/>
+                </a:solidFill>
+                <a:latin typeface="Cambria" pitchFamily="34" charset="0"/>
+                <a:ea typeface="Cambria" pitchFamily="34" charset="-122"/>
+                <a:cs typeface="Cambria" pitchFamily="34" charset="-120"/>
+              </a:rPr>
+              <a:t>Counterfeit on uncontrolled phone photos</a:t>
+            </a:r>
+            <a:endParaRPr lang="en-US" sz="1300" dirty="0"/>
+          </a:p>
+        </p:txBody>
+      </p:sp>
+      <p:sp>
+        <p:nvSpPr>
+          <p:cNvPr id="12" name="Text 10"/>
+          <p:cNvSpPr/>
+          <p:nvPr/>
+        </p:nvSpPr>
+        <p:spPr>
+          <a:xfrm>
+            <a:off x="777240" y="3172968"/>
+            <a:ext cx="3657600" cy="457200"/>
+          </a:xfrm>
+          <a:prstGeom prst="rect">
+            <a:avLst/>
+          </a:prstGeom>
+          <a:noFill/>
+          <a:ln/>
+        </p:spPr>
+        <p:txBody>
+          <a:bodyPr wrap="square" rtlCol="0" anchor="ctr"/>
+          <a:lstStyle/>
+          <a:p>
+            <a:pPr indent="0" marL="0">
+              <a:buNone/>
+            </a:pPr>
+            <a:r>
+              <a:rPr lang="en-US" sz="1050" dirty="0">
+                <a:solidFill>
+                  <a:srgbClr val="8C9BB5"/>
+                </a:solidFill>
+                <a:latin typeface="Calibri" pitchFamily="34" charset="0"/>
+                <a:ea typeface="Calibri" pitchFamily="34" charset="-122"/>
+                <a:cs typeface="Calibri" pitchFamily="34" charset="-120"/>
+              </a:rPr>
+              <a:t>v1 heuristic targets controlled capture; real mobile shots degrade.</a:t>
+            </a:r>
+            <a:endParaRPr lang="en-US" sz="1050" dirty="0"/>
+          </a:p>
+        </p:txBody>
+      </p:sp>
+      <p:sp>
+        <p:nvSpPr>
+          <p:cNvPr id="13" name="Text 11"/>
+          <p:cNvSpPr/>
+          <p:nvPr/>
+        </p:nvSpPr>
+        <p:spPr>
+          <a:xfrm>
+            <a:off x="4663440" y="2697480"/>
+            <a:ext cx="6766560" cy="987552"/>
+          </a:xfrm>
+          <a:prstGeom prst="rect">
+            <a:avLst/>
+          </a:prstGeom>
+          <a:noFill/>
+          <a:ln/>
+        </p:spPr>
+        <p:txBody>
+          <a:bodyPr wrap="square" rtlCol="0" anchor="ctr"/>
+          <a:lstStyle/>
+          <a:p>
+            <a:pPr indent="0" marL="0">
+              <a:buNone/>
+            </a:pPr>
+            <a:r>
+              <a:rPr lang="en-US" sz="1200" dirty="0">
+                <a:solidFill>
+                  <a:srgbClr val="E6EDF6"/>
+                </a:solidFill>
+                <a:latin typeface="Calibri" pitchFamily="34" charset="0"/>
+                <a:ea typeface="Calibri" pitchFamily="34" charset="-122"/>
+                <a:cs typeface="Calibri" pitchFamily="34" charset="-120"/>
+              </a:rPr>
+              <a:t>62.6% cleared · 31.8% routed to manual review · 5.6% false-reject — so we route, we don’t bluff</a:t>
+            </a:r>
+            <a:endParaRPr lang="en-US" sz="1200" dirty="0"/>
+          </a:p>
+        </p:txBody>
+      </p:sp>
+      <p:sp>
+        <p:nvSpPr>
+          <p:cNvPr id="14" name="Shape 12"/>
+          <p:cNvSpPr/>
+          <p:nvPr/>
+        </p:nvSpPr>
+        <p:spPr>
+          <a:xfrm>
+            <a:off x="548640" y="3794760"/>
+            <a:ext cx="11064240" cy="987552"/>
+          </a:xfrm>
+          <a:prstGeom prst="roundRect">
+            <a:avLst>
+              <a:gd name="adj" fmla="val 7407"/>
+            </a:avLst>
+          </a:prstGeom>
+          <a:solidFill>
+            <a:srgbClr val="121826"/>
+          </a:solidFill>
+          <a:ln w="12700">
+            <a:solidFill>
+              <a:srgbClr val="1F2A3D"/>
+            </a:solidFill>
+            <a:prstDash val="solid"/>
+          </a:ln>
+          <a:effectLst>
+            <a:outerShdw sx="100000" sy="100000" kx="0" ky="0" algn="bl" rotWithShape="0" blurRad="88900" dist="38100" dir="5400000">
+              <a:srgbClr val="000000">
+                <a:alpha val="35000"/>
+              </a:srgbClr>
+            </a:outerShdw>
+          </a:effectLst>
+        </p:spPr>
+      </p:sp>
+      <p:sp>
+        <p:nvSpPr>
+          <p:cNvPr id="15" name="Shape 13"/>
+          <p:cNvSpPr/>
+          <p:nvPr/>
+        </p:nvSpPr>
+        <p:spPr>
+          <a:xfrm>
+            <a:off x="548640" y="3794760"/>
+            <a:ext cx="64008" cy="987552"/>
+          </a:xfrm>
+          <a:prstGeom prst="roundRect">
+            <a:avLst>
+              <a:gd name="adj" fmla="val 42857"/>
+            </a:avLst>
+          </a:prstGeom>
+          <a:solidFill>
+            <a:srgbClr val="FF2D95"/>
+          </a:solidFill>
+          <a:ln/>
+        </p:spPr>
+      </p:sp>
+      <p:sp>
+        <p:nvSpPr>
+          <p:cNvPr id="16" name="Text 14"/>
+          <p:cNvSpPr/>
+          <p:nvPr/>
+        </p:nvSpPr>
+        <p:spPr>
+          <a:xfrm>
+            <a:off x="777240" y="3867912"/>
+            <a:ext cx="3657600" cy="411480"/>
+          </a:xfrm>
+          <a:prstGeom prst="rect">
+            <a:avLst/>
+          </a:prstGeom>
+          <a:noFill/>
+          <a:ln/>
+        </p:spPr>
+        <p:txBody>
+          <a:bodyPr wrap="square" rtlCol="0" anchor="ctr"/>
+          <a:lstStyle/>
+          <a:p>
+            <a:pPr indent="0" marL="0">
+              <a:buNone/>
+            </a:pPr>
+            <a:r>
+              <a:rPr lang="en-US" sz="1300" b="1" dirty="0">
+                <a:solidFill>
+                  <a:srgbClr val="FF2D95"/>
+                </a:solidFill>
+                <a:latin typeface="Cambria" pitchFamily="34" charset="0"/>
+                <a:ea typeface="Cambria" pitchFamily="34" charset="-122"/>
+                <a:cs typeface="Cambria" pitchFamily="34" charset="-120"/>
+              </a:rPr>
+              <a:t>Speech &amp; deepfake screeners unvalidated</a:t>
+            </a:r>
+            <a:endParaRPr lang="en-US" sz="1300" dirty="0"/>
+          </a:p>
+        </p:txBody>
+      </p:sp>
+      <p:sp>
+        <p:nvSpPr>
+          <p:cNvPr id="17" name="Text 15"/>
+          <p:cNvSpPr/>
+          <p:nvPr/>
+        </p:nvSpPr>
+        <p:spPr>
+          <a:xfrm>
+            <a:off x="777240" y="4270248"/>
+            <a:ext cx="3657600" cy="457200"/>
+          </a:xfrm>
+          <a:prstGeom prst="rect">
+            <a:avLst/>
+          </a:prstGeom>
+          <a:noFill/>
+          <a:ln/>
+        </p:spPr>
+        <p:txBody>
+          <a:bodyPr wrap="square" rtlCol="0" anchor="ctr"/>
+          <a:lstStyle/>
+          <a:p>
+            <a:pPr indent="0" marL="0">
+              <a:buNone/>
+            </a:pPr>
+            <a:r>
+              <a:rPr lang="en-US" sz="1050" dirty="0">
+                <a:solidFill>
+                  <a:srgbClr val="8C9BB5"/>
+                </a:solidFill>
+                <a:latin typeface="Calibri" pitchFamily="34" charset="0"/>
+                <a:ea typeface="Calibri" pitchFamily="34" charset="-122"/>
+                <a:cs typeface="Calibri" pitchFamily="34" charset="-120"/>
+              </a:rPr>
+              <a:t>No public face-swap / voice-spoof dataset was used, so accuracy is unproven.</a:t>
+            </a:r>
+            <a:endParaRPr lang="en-US" sz="1050" dirty="0"/>
+          </a:p>
+        </p:txBody>
+      </p:sp>
+      <p:sp>
+        <p:nvSpPr>
+          <p:cNvPr id="18" name="Text 16"/>
+          <p:cNvSpPr/>
+          <p:nvPr/>
+        </p:nvSpPr>
+        <p:spPr>
+          <a:xfrm>
+            <a:off x="4663440" y="3794760"/>
+            <a:ext cx="6766560" cy="987552"/>
+          </a:xfrm>
+          <a:prstGeom prst="rect">
+            <a:avLst/>
+          </a:prstGeom>
+          <a:noFill/>
+          <a:ln/>
+        </p:spPr>
+        <p:txBody>
+          <a:bodyPr wrap="square" rtlCol="0" anchor="ctr"/>
+          <a:lstStyle/>
+          <a:p>
+            <a:pPr indent="0" marL="0">
+              <a:buNone/>
+            </a:pPr>
+            <a:r>
+              <a:rPr lang="en-US" sz="1200" dirty="0">
+                <a:solidFill>
+                  <a:srgbClr val="E6EDF6"/>
+                </a:solidFill>
+                <a:latin typeface="Calibri" pitchFamily="34" charset="0"/>
+                <a:ea typeface="Calibri" pitchFamily="34" charset="-122"/>
+                <a:cs typeface="Calibri" pitchFamily="34" charset="-120"/>
+              </a:rPr>
+              <a:t>Shipped and labelled EXPERIMENTAL — they route to human review, never auto-clear</a:t>
+            </a:r>
+            <a:endParaRPr lang="en-US" sz="1200" dirty="0"/>
+          </a:p>
+        </p:txBody>
+      </p:sp>
+      <p:sp>
+        <p:nvSpPr>
+          <p:cNvPr id="19" name="Shape 17"/>
+          <p:cNvSpPr/>
+          <p:nvPr/>
+        </p:nvSpPr>
+        <p:spPr>
+          <a:xfrm>
+            <a:off x="548640" y="4892040"/>
+            <a:ext cx="11064240" cy="987552"/>
+          </a:xfrm>
+          <a:prstGeom prst="roundRect">
+            <a:avLst>
+              <a:gd name="adj" fmla="val 7407"/>
+            </a:avLst>
+          </a:prstGeom>
+          <a:solidFill>
+            <a:srgbClr val="0F1420"/>
+          </a:solidFill>
+          <a:ln w="12700">
+            <a:solidFill>
+              <a:srgbClr val="1F2A3D"/>
+            </a:solidFill>
+            <a:prstDash val="solid"/>
+          </a:ln>
+          <a:effectLst>
+            <a:outerShdw sx="100000" sy="100000" kx="0" ky="0" algn="bl" rotWithShape="0" blurRad="88900" dist="38100" dir="5400000">
+              <a:srgbClr val="000000">
+                <a:alpha val="35000"/>
+              </a:srgbClr>
+            </a:outerShdw>
+          </a:effectLst>
+        </p:spPr>
+      </p:sp>
+      <p:sp>
+        <p:nvSpPr>
+          <p:cNvPr id="20" name="Shape 18"/>
+          <p:cNvSpPr/>
+          <p:nvPr/>
+        </p:nvSpPr>
+        <p:spPr>
+          <a:xfrm>
+            <a:off x="548640" y="4892040"/>
+            <a:ext cx="64008" cy="987552"/>
+          </a:xfrm>
+          <a:prstGeom prst="roundRect">
+            <a:avLst>
+              <a:gd name="adj" fmla="val 42857"/>
+            </a:avLst>
+          </a:prstGeom>
+          <a:solidFill>
+            <a:srgbClr val="8B5CF6"/>
+          </a:solidFill>
+          <a:ln/>
+        </p:spPr>
+      </p:sp>
+      <p:sp>
+        <p:nvSpPr>
+          <p:cNvPr id="21" name="Text 19"/>
+          <p:cNvSpPr/>
+          <p:nvPr/>
+        </p:nvSpPr>
+        <p:spPr>
+          <a:xfrm>
+            <a:off x="777240" y="4965192"/>
+            <a:ext cx="3657600" cy="411480"/>
+          </a:xfrm>
+          <a:prstGeom prst="rect">
+            <a:avLst/>
+          </a:prstGeom>
+          <a:noFill/>
+          <a:ln/>
+        </p:spPr>
+        <p:txBody>
+          <a:bodyPr wrap="square" rtlCol="0" anchor="ctr"/>
+          <a:lstStyle/>
+          <a:p>
+            <a:pPr indent="0" marL="0">
+              <a:buNone/>
+            </a:pPr>
+            <a:r>
+              <a:rPr lang="en-US" sz="1300" b="1" dirty="0">
+                <a:solidFill>
+                  <a:srgbClr val="8B5CF6"/>
+                </a:solidFill>
+                <a:latin typeface="Cambria" pitchFamily="34" charset="0"/>
+                <a:ea typeface="Cambria" pitchFamily="34" charset="-122"/>
+                <a:cs typeface="Cambria" pitchFamily="34" charset="-120"/>
+              </a:rPr>
+              <a:t>8 of 12 languages not native-verified</a:t>
+            </a:r>
+            <a:endParaRPr lang="en-US" sz="1300" dirty="0"/>
+          </a:p>
+        </p:txBody>
+      </p:sp>
+      <p:sp>
+        <p:nvSpPr>
+          <p:cNvPr id="22" name="Text 20"/>
+          <p:cNvSpPr/>
+          <p:nvPr/>
+        </p:nvSpPr>
+        <p:spPr>
+          <a:xfrm>
+            <a:off x="777240" y="5367528"/>
+            <a:ext cx="3657600" cy="457200"/>
+          </a:xfrm>
+          <a:prstGeom prst="rect">
+            <a:avLst/>
+          </a:prstGeom>
+          <a:noFill/>
+          <a:ln/>
+        </p:spPr>
+        <p:txBody>
+          <a:bodyPr wrap="square" rtlCol="0" anchor="ctr"/>
+          <a:lstStyle/>
+          <a:p>
+            <a:pPr indent="0" marL="0">
+              <a:buNone/>
+            </a:pPr>
+            <a:r>
+              <a:rPr lang="en-US" sz="1050" dirty="0">
+                <a:solidFill>
+                  <a:srgbClr val="8C9BB5"/>
+                </a:solidFill>
+                <a:latin typeface="Calibri" pitchFamily="34" charset="0"/>
+                <a:ea typeface="Calibri" pitchFamily="34" charset="-122"/>
+                <a:cs typeface="Calibri" pitchFamily="34" charset="-120"/>
+              </a:rPr>
+              <a:t>Machine-guessed translation in a safety tool is a liability.</a:t>
+            </a:r>
+            <a:endParaRPr lang="en-US" sz="1050" dirty="0"/>
+          </a:p>
+        </p:txBody>
+      </p:sp>
+      <p:sp>
+        <p:nvSpPr>
+          <p:cNvPr id="23" name="Text 21"/>
+          <p:cNvSpPr/>
+          <p:nvPr/>
+        </p:nvSpPr>
+        <p:spPr>
+          <a:xfrm>
+            <a:off x="4663440" y="4892040"/>
+            <a:ext cx="6766560" cy="987552"/>
+          </a:xfrm>
+          <a:prstGeom prst="rect">
+            <a:avLst/>
+          </a:prstGeom>
+          <a:noFill/>
+          <a:ln/>
+        </p:spPr>
+        <p:txBody>
+          <a:bodyPr wrap="square" rtlCol="0" anchor="ctr"/>
+          <a:lstStyle/>
+          <a:p>
+            <a:pPr indent="0" marL="0">
+              <a:buNone/>
+            </a:pPr>
+            <a:r>
+              <a:rPr lang="en-US" sz="1200" dirty="0">
+                <a:solidFill>
+                  <a:srgbClr val="E6EDF6"/>
+                </a:solidFill>
+                <a:latin typeface="Calibri" pitchFamily="34" charset="0"/>
+                <a:ea typeface="Calibri" pitchFamily="34" charset="-122"/>
+                <a:cs typeface="Calibri" pitchFamily="34" charset="-120"/>
+              </a:rPr>
+              <a:t>4 languages fully authored (EN/HI/TA/BN); the rest fall back to English until verified</a:t>
+            </a:r>
+            <a:endParaRPr lang="en-US" sz="1200" dirty="0"/>
+          </a:p>
+        </p:txBody>
+      </p:sp>
+      <p:sp>
+        <p:nvSpPr>
+          <p:cNvPr id="24" name="Text 22"/>
+          <p:cNvSpPr/>
+          <p:nvPr/>
+        </p:nvSpPr>
+        <p:spPr>
+          <a:xfrm>
+            <a:off x="548640" y="5989320"/>
+            <a:ext cx="11064240" cy="365760"/>
+          </a:xfrm>
+          <a:prstGeom prst="rect">
+            <a:avLst/>
+          </a:prstGeom>
+          <a:noFill/>
+          <a:ln/>
+        </p:spPr>
+        <p:txBody>
+          <a:bodyPr wrap="square" rtlCol="0" anchor="ctr"/>
+          <a:lstStyle/>
+          <a:p>
+            <a:pPr algn="ctr" indent="0" marL="0">
+              <a:buNone/>
+            </a:pPr>
+            <a:r>
+              <a:rPr lang="en-US" sz="1250" i="1" dirty="0">
+                <a:solidFill>
+                  <a:srgbClr val="2ECC71"/>
+                </a:solidFill>
+                <a:latin typeface="Calibri" pitchFamily="34" charset="0"/>
+                <a:ea typeface="Calibri" pitchFamily="34" charset="-122"/>
+                <a:cs typeface="Calibri" pitchFamily="34" charset="-120"/>
+              </a:rPr>
+              <a:t>Honest limits are a feature: every number above is reproducible from this repo.</a:t>
+            </a:r>
+            <a:endParaRPr lang="en-US" sz="1250" dirty="0"/>
+          </a:p>
+        </p:txBody>
+      </p:sp>
+      <p:sp>
+        <p:nvSpPr>
+          <p:cNvPr id="25" name="Text 23"/>
+          <p:cNvSpPr/>
+          <p:nvPr/>
+        </p:nvSpPr>
+        <p:spPr>
+          <a:xfrm>
+            <a:off x="457200" y="6473952"/>
+            <a:ext cx="7315200" cy="274320"/>
+          </a:xfrm>
+          <a:prstGeom prst="rect">
+            <a:avLst/>
+          </a:prstGeom>
+          <a:noFill/>
+          <a:ln/>
+        </p:spPr>
+        <p:txBody>
+          <a:bodyPr wrap="square" rtlCol="0" anchor="ctr"/>
+          <a:lstStyle/>
+          <a:p>
+            <a:pPr indent="0" marL="0">
+              <a:buNone/>
+            </a:pPr>
+            <a:r>
+              <a:rPr lang="en-US" sz="900" dirty="0">
+                <a:solidFill>
+                  <a:srgbClr val="8C9BB5"/>
+                </a:solidFill>
+                <a:latin typeface="Calibri" pitchFamily="34" charset="0"/>
+                <a:ea typeface="Calibri" pitchFamily="34" charset="-122"/>
+                <a:cs typeface="Calibri" pitchFamily="34" charset="-120"/>
+              </a:rPr>
+              <a:t>PRAHARI · Digital Public Safety Intelligence</a:t>
+            </a:r>
+            <a:endParaRPr lang="en-US" sz="900" dirty="0"/>
+          </a:p>
+        </p:txBody>
+      </p:sp>
+      <p:sp>
+        <p:nvSpPr>
+          <p:cNvPr id="26" name="Text 24"/>
+          <p:cNvSpPr/>
+          <p:nvPr/>
+        </p:nvSpPr>
+        <p:spPr>
+          <a:xfrm>
+            <a:off x="11274552" y="6473952"/>
+            <a:ext cx="457200" cy="274320"/>
+          </a:xfrm>
+          <a:prstGeom prst="rect">
+            <a:avLst/>
+          </a:prstGeom>
+          <a:noFill/>
+          <a:ln/>
+        </p:spPr>
+        <p:txBody>
+          <a:bodyPr wrap="square" rtlCol="0" anchor="ctr"/>
+          <a:lstStyle/>
+          <a:p>
+            <a:pPr algn="r" indent="0" marL="0">
+              <a:buNone/>
+            </a:pPr>
+            <a:r>
+              <a:rPr lang="en-US" sz="900" dirty="0">
+                <a:solidFill>
+                  <a:srgbClr val="8C9BB5"/>
+                </a:solidFill>
+                <a:latin typeface="Calibri" pitchFamily="34" charset="0"/>
+                <a:ea typeface="Calibri" pitchFamily="34" charset="-122"/>
+                <a:cs typeface="Calibri" pitchFamily="34" charset="-120"/>
+              </a:rPr>
+              <a:t>13</a:t>
+            </a:r>
+            <a:endParaRPr lang="en-US" sz="900" dirty="0"/>
+          </a:p>
+        </p:txBody>
+      </p:sp>
+    </p:spTree>
+  </p:cSld>
+  <p:clrMapOvr>
+    <a:masterClrMapping/>
+  </p:clrMapOvr>
+</p:sld>
+</file>
+
+<file path=ppt/slides/slide14.xml><?xml version="1.0" encoding="utf-8"?>
+<p:sld xmlns:a="http://schemas.openxmlformats.org/drawingml/2006/main" xmlns:r="http://schemas.openxmlformats.org/officeDocument/2006/relationships" xmlns:p="http://schemas.openxmlformats.org/presentationml/2006/main">
+  <p:cSld name="Slide 14">
+    <p:bg>
+      <p:bgPr>
+        <a:solidFill>
+          <a:srgbClr val="0A0E17"/>
+        </a:solidFill>
+      </p:bgPr>
+    </p:bg>
+    <p:spTree>
+      <p:nvGrpSpPr>
+        <p:cNvPr id="1" name=""/>
+        <p:cNvGrpSpPr/>
+        <p:nvPr/>
+      </p:nvGrpSpPr>
+      <p:grpSpPr>
+        <a:xfrm>
+          <a:off x="0" y="0"/>
+          <a:ext cx="0" cy="0"/>
+          <a:chOff x="0" y="0"/>
+          <a:chExt cx="0" cy="0"/>
+        </a:xfrm>
+      </p:grpSpPr>
+      <p:sp>
+        <p:nvSpPr>
+          <p:cNvPr id="2" name="Text 0"/>
+          <p:cNvSpPr/>
+          <p:nvPr/>
+        </p:nvSpPr>
+        <p:spPr>
+          <a:xfrm>
+            <a:off x="548640" y="457200"/>
+            <a:ext cx="10972800" cy="685800"/>
+          </a:xfrm>
+          <a:prstGeom prst="rect">
+            <a:avLst/>
+          </a:prstGeom>
+          <a:noFill/>
+          <a:ln/>
+        </p:spPr>
+        <p:txBody>
+          <a:bodyPr wrap="square" rtlCol="0" anchor="ctr"/>
+          <a:lstStyle/>
+          <a:p>
+            <a:pPr indent="0" marL="0">
+              <a:buNone/>
+            </a:pPr>
+            <a:r>
+              <a:rPr lang="en-US" sz="2500" b="1" dirty="0">
+                <a:solidFill>
+                  <a:srgbClr val="E6EDF6"/>
+                </a:solidFill>
+                <a:latin typeface="Cambria" pitchFamily="34" charset="0"/>
+                <a:ea typeface="Cambria" pitchFamily="34" charset="-122"/>
+                <a:cs typeface="Cambria" pitchFamily="34" charset="-120"/>
+              </a:rPr>
+              <a:t>Privacy by design — a public-safety tool must not become surveillance</a:t>
+            </a:r>
+            <a:endParaRPr lang="en-US" sz="2500" dirty="0"/>
+          </a:p>
+        </p:txBody>
+      </p:sp>
+      <p:sp>
+        <p:nvSpPr>
+          <p:cNvPr id="3" name="Shape 1"/>
+          <p:cNvSpPr/>
+          <p:nvPr/>
+        </p:nvSpPr>
+        <p:spPr>
+          <a:xfrm>
+            <a:off x="548640" y="1371600"/>
+            <a:ext cx="5440680" cy="1234440"/>
+          </a:xfrm>
+          <a:prstGeom prst="roundRect">
+            <a:avLst>
+              <a:gd name="adj" fmla="val 5926"/>
+            </a:avLst>
+          </a:prstGeom>
+          <a:solidFill>
+            <a:srgbClr val="121826"/>
+          </a:solidFill>
+          <a:ln w="12700">
+            <a:solidFill>
+              <a:srgbClr val="1F2A3D"/>
+            </a:solidFill>
+            <a:prstDash val="solid"/>
+          </a:ln>
+          <a:effectLst>
+            <a:outerShdw sx="100000" sy="100000" kx="0" ky="0" algn="bl" rotWithShape="0" blurRad="88900" dist="38100" dir="5400000">
+              <a:srgbClr val="000000">
+                <a:alpha val="35000"/>
+              </a:srgbClr>
+            </a:outerShdw>
+          </a:effectLst>
+        </p:spPr>
+      </p:sp>
+      <p:sp>
+        <p:nvSpPr>
+          <p:cNvPr id="4" name="Text 2"/>
+          <p:cNvSpPr/>
+          <p:nvPr/>
+        </p:nvSpPr>
+        <p:spPr>
+          <a:xfrm>
+            <a:off x="777240" y="1481328"/>
+            <a:ext cx="4983480" cy="347472"/>
+          </a:xfrm>
+          <a:prstGeom prst="rect">
+            <a:avLst/>
+          </a:prstGeom>
+          <a:noFill/>
+          <a:ln/>
+        </p:spPr>
+        <p:txBody>
+          <a:bodyPr wrap="square" rtlCol="0" anchor="ctr"/>
+          <a:lstStyle/>
+          <a:p>
+            <a:pPr indent="0" marL="0">
+              <a:buNone/>
+            </a:pPr>
+            <a:r>
+              <a:rPr lang="en-US" sz="1400" b="1" dirty="0">
+                <a:solidFill>
+                  <a:srgbClr val="2ECC71"/>
+                </a:solidFill>
+                <a:latin typeface="Cambria" pitchFamily="34" charset="0"/>
+                <a:ea typeface="Cambria" pitchFamily="34" charset="-122"/>
+                <a:cs typeface="Cambria" pitchFamily="34" charset="-120"/>
+              </a:rPr>
+              <a:t>Runs fully offline</a:t>
+            </a:r>
+            <a:endParaRPr lang="en-US" sz="1400" dirty="0"/>
+          </a:p>
+        </p:txBody>
+      </p:sp>
+      <p:sp>
+        <p:nvSpPr>
+          <p:cNvPr id="5" name="Text 3"/>
+          <p:cNvSpPr/>
+          <p:nvPr/>
+        </p:nvSpPr>
+        <p:spPr>
+          <a:xfrm>
+            <a:off x="777240" y="1828800"/>
+            <a:ext cx="4983480" cy="685800"/>
+          </a:xfrm>
+          <a:prstGeom prst="rect">
+            <a:avLst/>
+          </a:prstGeom>
+          <a:noFill/>
+          <a:ln/>
+        </p:spPr>
+        <p:txBody>
+          <a:bodyPr wrap="square" rtlCol="0" anchor="ctr"/>
+          <a:lstStyle/>
+          <a:p>
+            <a:pPr indent="0" marL="0">
+              <a:lnSpc>
+                <a:spcPct val="105000"/>
+              </a:lnSpc>
+              <a:buNone/>
+            </a:pPr>
+            <a:r>
+              <a:rPr lang="en-US" sz="1150" dirty="0">
+                <a:solidFill>
+                  <a:srgbClr val="E6EDF6"/>
+                </a:solidFill>
+                <a:latin typeface="Calibri" pitchFamily="34" charset="0"/>
+                <a:ea typeface="Calibri" pitchFamily="34" charset="-122"/>
+                <a:cs typeface="Calibri" pitchFamily="34" charset="-120"/>
+              </a:rPr>
+              <a:t>Detection, OCR, forensics and speech screening execute locally — no citizen message or note image leaves the deployment.</a:t>
+            </a:r>
+            <a:endParaRPr lang="en-US" sz="1150" dirty="0"/>
+          </a:p>
+        </p:txBody>
+      </p:sp>
+      <p:sp>
+        <p:nvSpPr>
+          <p:cNvPr id="6" name="Shape 4"/>
+          <p:cNvSpPr/>
+          <p:nvPr/>
+        </p:nvSpPr>
+        <p:spPr>
+          <a:xfrm>
+            <a:off x="6263640" y="1371600"/>
+            <a:ext cx="5440680" cy="1234440"/>
+          </a:xfrm>
+          <a:prstGeom prst="roundRect">
+            <a:avLst>
+              <a:gd name="adj" fmla="val 5926"/>
+            </a:avLst>
+          </a:prstGeom>
+          <a:solidFill>
+            <a:srgbClr val="121826"/>
+          </a:solidFill>
+          <a:ln w="12700">
+            <a:solidFill>
+              <a:srgbClr val="1F2A3D"/>
+            </a:solidFill>
+            <a:prstDash val="solid"/>
+          </a:ln>
+          <a:effectLst>
+            <a:outerShdw sx="100000" sy="100000" kx="0" ky="0" algn="bl" rotWithShape="0" blurRad="88900" dist="38100" dir="5400000">
+              <a:srgbClr val="000000">
+                <a:alpha val="35000"/>
+              </a:srgbClr>
+            </a:outerShdw>
+          </a:effectLst>
+        </p:spPr>
+      </p:sp>
+      <p:sp>
+        <p:nvSpPr>
+          <p:cNvPr id="7" name="Text 5"/>
+          <p:cNvSpPr/>
+          <p:nvPr/>
+        </p:nvSpPr>
+        <p:spPr>
+          <a:xfrm>
+            <a:off x="6492240" y="1481328"/>
+            <a:ext cx="4983480" cy="347472"/>
+          </a:xfrm>
+          <a:prstGeom prst="rect">
+            <a:avLst/>
+          </a:prstGeom>
+          <a:noFill/>
+          <a:ln/>
+        </p:spPr>
+        <p:txBody>
+          <a:bodyPr wrap="square" rtlCol="0" anchor="ctr"/>
+          <a:lstStyle/>
+          <a:p>
+            <a:pPr indent="0" marL="0">
+              <a:buNone/>
+            </a:pPr>
+            <a:r>
+              <a:rPr lang="en-US" sz="1400" b="1" dirty="0">
+                <a:solidFill>
+                  <a:srgbClr val="3EA6FF"/>
+                </a:solidFill>
+                <a:latin typeface="Cambria" pitchFamily="34" charset="0"/>
+                <a:ea typeface="Cambria" pitchFamily="34" charset="-122"/>
+                <a:cs typeface="Cambria" pitchFamily="34" charset="-120"/>
+              </a:rPr>
+              <a:t>Hashes, not contents</a:t>
+            </a:r>
+            <a:endParaRPr lang="en-US" sz="1400" dirty="0"/>
+          </a:p>
+        </p:txBody>
+      </p:sp>
+      <p:sp>
+        <p:nvSpPr>
+          <p:cNvPr id="8" name="Text 6"/>
+          <p:cNvSpPr/>
+          <p:nvPr/>
+        </p:nvSpPr>
+        <p:spPr>
+          <a:xfrm>
+            <a:off x="6492240" y="1828800"/>
+            <a:ext cx="4983480" cy="685800"/>
+          </a:xfrm>
+          <a:prstGeom prst="rect">
+            <a:avLst/>
+          </a:prstGeom>
+          <a:noFill/>
+          <a:ln/>
+        </p:spPr>
+        <p:txBody>
+          <a:bodyPr wrap="square" rtlCol="0" anchor="ctr"/>
+          <a:lstStyle/>
+          <a:p>
+            <a:pPr indent="0" marL="0">
+              <a:lnSpc>
+                <a:spcPct val="105000"/>
+              </a:lnSpc>
+              <a:buNone/>
+            </a:pPr>
+            <a:r>
+              <a:rPr lang="en-US" sz="1150" dirty="0">
+                <a:solidFill>
+                  <a:srgbClr val="E6EDF6"/>
+                </a:solidFill>
+                <a:latin typeface="Calibri" pitchFamily="34" charset="0"/>
+                <a:ea typeface="Calibri" pitchFamily="34" charset="-122"/>
+                <a:cs typeface="Calibri" pitchFamily="34" charset="-120"/>
+              </a:rPr>
+              <a:t>The audit ledger stores a SHA-256 of the input, never the raw message — chain-of-custody without a PII lake.</a:t>
+            </a:r>
+            <a:endParaRPr lang="en-US" sz="1150" dirty="0"/>
+          </a:p>
+        </p:txBody>
+      </p:sp>
+      <p:sp>
+        <p:nvSpPr>
+          <p:cNvPr id="9" name="Shape 7"/>
+          <p:cNvSpPr/>
+          <p:nvPr/>
+        </p:nvSpPr>
+        <p:spPr>
+          <a:xfrm>
+            <a:off x="548640" y="2788920"/>
+            <a:ext cx="5440680" cy="1234440"/>
+          </a:xfrm>
+          <a:prstGeom prst="roundRect">
+            <a:avLst>
+              <a:gd name="adj" fmla="val 5926"/>
+            </a:avLst>
+          </a:prstGeom>
+          <a:solidFill>
+            <a:srgbClr val="121826"/>
+          </a:solidFill>
+          <a:ln w="12700">
+            <a:solidFill>
+              <a:srgbClr val="1F2A3D"/>
+            </a:solidFill>
+            <a:prstDash val="solid"/>
+          </a:ln>
+          <a:effectLst>
+            <a:outerShdw sx="100000" sy="100000" kx="0" ky="0" algn="bl" rotWithShape="0" blurRad="88900" dist="38100" dir="5400000">
+              <a:srgbClr val="000000">
+                <a:alpha val="35000"/>
+              </a:srgbClr>
+            </a:outerShdw>
+          </a:effectLst>
+        </p:spPr>
+      </p:sp>
+      <p:sp>
+        <p:nvSpPr>
+          <p:cNvPr id="10" name="Text 8"/>
+          <p:cNvSpPr/>
+          <p:nvPr/>
+        </p:nvSpPr>
+        <p:spPr>
+          <a:xfrm>
+            <a:off x="777240" y="2898648"/>
+            <a:ext cx="4983480" cy="347472"/>
+          </a:xfrm>
+          <a:prstGeom prst="rect">
+            <a:avLst/>
+          </a:prstGeom>
+          <a:noFill/>
+          <a:ln/>
+        </p:spPr>
+        <p:txBody>
+          <a:bodyPr wrap="square" rtlCol="0" anchor="ctr"/>
+          <a:lstStyle/>
+          <a:p>
+            <a:pPr indent="0" marL="0">
+              <a:buNone/>
+            </a:pPr>
+            <a:r>
+              <a:rPr lang="en-US" sz="1400" b="1" dirty="0">
+                <a:solidFill>
+                  <a:srgbClr val="8B5CF6"/>
+                </a:solidFill>
+                <a:latin typeface="Cambria" pitchFamily="34" charset="0"/>
+                <a:ea typeface="Cambria" pitchFamily="34" charset="-122"/>
+                <a:cs typeface="Cambria" pitchFamily="34" charset="-120"/>
+              </a:rPr>
+              <a:t>Device-local history</a:t>
+            </a:r>
+            <a:endParaRPr lang="en-US" sz="1400" dirty="0"/>
+          </a:p>
+        </p:txBody>
+      </p:sp>
+      <p:sp>
+        <p:nvSpPr>
+          <p:cNvPr id="11" name="Text 9"/>
+          <p:cNvSpPr/>
+          <p:nvPr/>
+        </p:nvSpPr>
+        <p:spPr>
+          <a:xfrm>
+            <a:off x="777240" y="3246120"/>
+            <a:ext cx="4983480" cy="685800"/>
+          </a:xfrm>
+          <a:prstGeom prst="rect">
+            <a:avLst/>
+          </a:prstGeom>
+          <a:noFill/>
+          <a:ln/>
+        </p:spPr>
+        <p:txBody>
+          <a:bodyPr wrap="square" rtlCol="0" anchor="ctr"/>
+          <a:lstStyle/>
+          <a:p>
+            <a:pPr indent="0" marL="0">
+              <a:lnSpc>
+                <a:spcPct val="105000"/>
+              </a:lnSpc>
+              <a:buNone/>
+            </a:pPr>
+            <a:r>
+              <a:rPr lang="en-US" sz="1150" dirty="0">
+                <a:solidFill>
+                  <a:srgbClr val="E6EDF6"/>
+                </a:solidFill>
+                <a:latin typeface="Calibri" pitchFamily="34" charset="0"/>
+                <a:ea typeface="Calibri" pitchFamily="34" charset="-122"/>
+                <a:cs typeface="Calibri" pitchFamily="34" charset="-120"/>
+              </a:rPr>
+              <a:t>‘Recent checks’ in Citizen Shield live in browser storage only; nothing is sent to a server.</a:t>
+            </a:r>
+            <a:endParaRPr lang="en-US" sz="1150" dirty="0"/>
+          </a:p>
+        </p:txBody>
+      </p:sp>
+      <p:sp>
+        <p:nvSpPr>
+          <p:cNvPr id="12" name="Shape 10"/>
+          <p:cNvSpPr/>
+          <p:nvPr/>
+        </p:nvSpPr>
+        <p:spPr>
+          <a:xfrm>
+            <a:off x="6263640" y="2788920"/>
+            <a:ext cx="5440680" cy="1234440"/>
+          </a:xfrm>
+          <a:prstGeom prst="roundRect">
+            <a:avLst>
+              <a:gd name="adj" fmla="val 5926"/>
+            </a:avLst>
+          </a:prstGeom>
+          <a:solidFill>
+            <a:srgbClr val="121826"/>
+          </a:solidFill>
+          <a:ln w="12700">
+            <a:solidFill>
+              <a:srgbClr val="1F2A3D"/>
+            </a:solidFill>
+            <a:prstDash val="solid"/>
+          </a:ln>
+          <a:effectLst>
+            <a:outerShdw sx="100000" sy="100000" kx="0" ky="0" algn="bl" rotWithShape="0" blurRad="88900" dist="38100" dir="5400000">
+              <a:srgbClr val="000000">
+                <a:alpha val="35000"/>
+              </a:srgbClr>
+            </a:outerShdw>
+          </a:effectLst>
+        </p:spPr>
+      </p:sp>
+      <p:sp>
+        <p:nvSpPr>
+          <p:cNvPr id="13" name="Text 11"/>
+          <p:cNvSpPr/>
+          <p:nvPr/>
+        </p:nvSpPr>
+        <p:spPr>
+          <a:xfrm>
+            <a:off x="6492240" y="2898648"/>
+            <a:ext cx="4983480" cy="347472"/>
+          </a:xfrm>
+          <a:prstGeom prst="rect">
+            <a:avLst/>
+          </a:prstGeom>
+          <a:noFill/>
+          <a:ln/>
+        </p:spPr>
+        <p:txBody>
+          <a:bodyPr wrap="square" rtlCol="0" anchor="ctr"/>
+          <a:lstStyle/>
+          <a:p>
+            <a:pPr indent="0" marL="0">
+              <a:buNone/>
+            </a:pPr>
+            <a:r>
+              <a:rPr lang="en-US" sz="1400" b="1" dirty="0">
+                <a:solidFill>
+                  <a:srgbClr val="F5A623"/>
+                </a:solidFill>
+                <a:latin typeface="Cambria" pitchFamily="34" charset="0"/>
+                <a:ea typeface="Cambria" pitchFamily="34" charset="-122"/>
+                <a:cs typeface="Cambria" pitchFamily="34" charset="-120"/>
+              </a:rPr>
+              <a:t>Optional LLM is opt-in</a:t>
+            </a:r>
+            <a:endParaRPr lang="en-US" sz="1400" dirty="0"/>
+          </a:p>
+        </p:txBody>
+      </p:sp>
+      <p:sp>
+        <p:nvSpPr>
+          <p:cNvPr id="14" name="Text 12"/>
+          <p:cNvSpPr/>
+          <p:nvPr/>
+        </p:nvSpPr>
+        <p:spPr>
+          <a:xfrm>
+            <a:off x="6492240" y="3246120"/>
+            <a:ext cx="4983480" cy="685800"/>
+          </a:xfrm>
+          <a:prstGeom prst="rect">
+            <a:avLst/>
+          </a:prstGeom>
+          <a:noFill/>
+          <a:ln/>
+        </p:spPr>
+        <p:txBody>
+          <a:bodyPr wrap="square" rtlCol="0" anchor="ctr"/>
+          <a:lstStyle/>
+          <a:p>
+            <a:pPr indent="0" marL="0">
+              <a:lnSpc>
+                <a:spcPct val="105000"/>
+              </a:lnSpc>
+              <a:buNone/>
+            </a:pPr>
+            <a:r>
+              <a:rPr lang="en-US" sz="1150" dirty="0">
+                <a:solidFill>
+                  <a:srgbClr val="E6EDF6"/>
+                </a:solidFill>
+                <a:latin typeface="Calibri" pitchFamily="34" charset="0"/>
+                <a:ea typeface="Calibri" pitchFamily="34" charset="-122"/>
+                <a:cs typeface="Calibri" pitchFamily="34" charset="-120"/>
+              </a:rPr>
+              <a:t>The second-opinion layer activates only with an explicit API key; default deployment makes zero external calls.</a:t>
+            </a:r>
+            <a:endParaRPr lang="en-US" sz="1150" dirty="0"/>
+          </a:p>
+        </p:txBody>
+      </p:sp>
+      <p:sp>
+        <p:nvSpPr>
+          <p:cNvPr id="15" name="Shape 13"/>
+          <p:cNvSpPr/>
+          <p:nvPr/>
+        </p:nvSpPr>
+        <p:spPr>
+          <a:xfrm>
+            <a:off x="548640" y="4206240"/>
+            <a:ext cx="11064240" cy="1234440"/>
+          </a:xfrm>
+          <a:prstGeom prst="roundRect">
+            <a:avLst>
+              <a:gd name="adj" fmla="val 5926"/>
+            </a:avLst>
+          </a:prstGeom>
+          <a:solidFill>
+            <a:srgbClr val="0F1420"/>
+          </a:solidFill>
+          <a:ln w="12700">
+            <a:solidFill>
+              <a:srgbClr val="1F2A3D"/>
+            </a:solidFill>
+            <a:prstDash val="solid"/>
+          </a:ln>
+          <a:effectLst>
+            <a:outerShdw sx="100000" sy="100000" kx="0" ky="0" algn="bl" rotWithShape="0" blurRad="88900" dist="38100" dir="5400000">
+              <a:srgbClr val="000000">
+                <a:alpha val="35000"/>
+              </a:srgbClr>
+            </a:outerShdw>
+          </a:effectLst>
+        </p:spPr>
+      </p:sp>
+      <p:sp>
+        <p:nvSpPr>
+          <p:cNvPr id="16" name="Text 14"/>
+          <p:cNvSpPr/>
+          <p:nvPr/>
+        </p:nvSpPr>
+        <p:spPr>
+          <a:xfrm>
+            <a:off x="777240" y="4315968"/>
+            <a:ext cx="10515600" cy="347472"/>
+          </a:xfrm>
+          <a:prstGeom prst="rect">
+            <a:avLst/>
+          </a:prstGeom>
+          <a:noFill/>
+          <a:ln/>
+        </p:spPr>
+        <p:txBody>
+          <a:bodyPr wrap="square" rtlCol="0" anchor="ctr"/>
+          <a:lstStyle/>
+          <a:p>
+            <a:pPr indent="0" marL="0">
+              <a:buNone/>
+            </a:pPr>
+            <a:r>
+              <a:rPr lang="en-US" sz="1400" b="1" dirty="0">
+                <a:solidFill>
+                  <a:srgbClr val="8C9BB5"/>
+                </a:solidFill>
+                <a:latin typeface="Cambria" pitchFamily="34" charset="0"/>
+                <a:ea typeface="Cambria" pitchFamily="34" charset="-122"/>
+                <a:cs typeface="Cambria" pitchFamily="34" charset="-120"/>
+              </a:rPr>
+              <a:t>Roadmap</a:t>
+            </a:r>
+            <a:endParaRPr lang="en-US" sz="1400" dirty="0"/>
+          </a:p>
+        </p:txBody>
+      </p:sp>
+      <p:sp>
+        <p:nvSpPr>
+          <p:cNvPr id="17" name="Text 15"/>
+          <p:cNvSpPr/>
+          <p:nvPr/>
+        </p:nvSpPr>
+        <p:spPr>
+          <a:xfrm>
+            <a:off x="777240" y="4663440"/>
+            <a:ext cx="10515600" cy="685800"/>
+          </a:xfrm>
+          <a:prstGeom prst="rect">
+            <a:avLst/>
+          </a:prstGeom>
+          <a:noFill/>
+          <a:ln/>
+        </p:spPr>
+        <p:txBody>
+          <a:bodyPr wrap="square" rtlCol="0" anchor="ctr"/>
+          <a:lstStyle/>
+          <a:p>
+            <a:pPr indent="0" marL="0">
+              <a:lnSpc>
+                <a:spcPct val="105000"/>
+              </a:lnSpc>
+              <a:buNone/>
+            </a:pPr>
+            <a:r>
+              <a:rPr lang="en-US" sz="1150" dirty="0">
+                <a:solidFill>
+                  <a:srgbClr val="E6EDF6"/>
+                </a:solidFill>
+                <a:latin typeface="Calibri" pitchFamily="34" charset="0"/>
+                <a:ea typeface="Calibri" pitchFamily="34" charset="-122"/>
+                <a:cs typeface="Calibri" pitchFamily="34" charset="-120"/>
+              </a:rPr>
+              <a:t>PII tokenisation at ingest, role-based access, signed append-only ledger, and data-retention limits per NCRP policy.</a:t>
+            </a:r>
+            <a:endParaRPr lang="en-US" sz="1150" dirty="0"/>
+          </a:p>
+        </p:txBody>
+      </p:sp>
+      <p:sp>
+        <p:nvSpPr>
+          <p:cNvPr id="18" name="Text 16"/>
+          <p:cNvSpPr/>
+          <p:nvPr/>
+        </p:nvSpPr>
+        <p:spPr>
+          <a:xfrm>
+            <a:off x="548640" y="5806440"/>
+            <a:ext cx="11064240" cy="365760"/>
+          </a:xfrm>
+          <a:prstGeom prst="rect">
+            <a:avLst/>
+          </a:prstGeom>
+          <a:noFill/>
+          <a:ln/>
+        </p:spPr>
+        <p:txBody>
+          <a:bodyPr wrap="square" rtlCol="0" anchor="ctr"/>
+          <a:lstStyle/>
+          <a:p>
+            <a:pPr algn="ctr" indent="0" marL="0">
+              <a:buNone/>
+            </a:pPr>
+            <a:r>
+              <a:rPr lang="en-US" sz="1250" i="1" dirty="0">
+                <a:solidFill>
+                  <a:srgbClr val="3EA6FF"/>
+                </a:solidFill>
+                <a:latin typeface="Calibri" pitchFamily="34" charset="0"/>
+                <a:ea typeface="Calibri" pitchFamily="34" charset="-122"/>
+                <a:cs typeface="Calibri" pitchFamily="34" charset="-120"/>
+              </a:rPr>
+              <a:t>Offline-first also means it works in a district cyber cell with poor connectivity — privacy and reach, same decision.</a:t>
+            </a:r>
+            <a:endParaRPr lang="en-US" sz="1250" dirty="0"/>
+          </a:p>
+        </p:txBody>
+      </p:sp>
+      <p:sp>
+        <p:nvSpPr>
+          <p:cNvPr id="19" name="Text 17"/>
+          <p:cNvSpPr/>
+          <p:nvPr/>
+        </p:nvSpPr>
+        <p:spPr>
+          <a:xfrm>
+            <a:off x="457200" y="6473952"/>
+            <a:ext cx="7315200" cy="274320"/>
+          </a:xfrm>
+          <a:prstGeom prst="rect">
+            <a:avLst/>
+          </a:prstGeom>
+          <a:noFill/>
+          <a:ln/>
+        </p:spPr>
+        <p:txBody>
+          <a:bodyPr wrap="square" rtlCol="0" anchor="ctr"/>
+          <a:lstStyle/>
+          <a:p>
+            <a:pPr indent="0" marL="0">
+              <a:buNone/>
+            </a:pPr>
+            <a:r>
+              <a:rPr lang="en-US" sz="900" dirty="0">
+                <a:solidFill>
+                  <a:srgbClr val="8C9BB5"/>
+                </a:solidFill>
+                <a:latin typeface="Calibri" pitchFamily="34" charset="0"/>
+                <a:ea typeface="Calibri" pitchFamily="34" charset="-122"/>
+                <a:cs typeface="Calibri" pitchFamily="34" charset="-120"/>
+              </a:rPr>
+              <a:t>PRAHARI · Digital Public Safety Intelligence</a:t>
+            </a:r>
+            <a:endParaRPr lang="en-US" sz="900" dirty="0"/>
+          </a:p>
+        </p:txBody>
+      </p:sp>
+      <p:sp>
+        <p:nvSpPr>
+          <p:cNvPr id="20" name="Text 18"/>
+          <p:cNvSpPr/>
+          <p:nvPr/>
+        </p:nvSpPr>
+        <p:spPr>
+          <a:xfrm>
+            <a:off x="11274552" y="6473952"/>
+            <a:ext cx="457200" cy="274320"/>
+          </a:xfrm>
+          <a:prstGeom prst="rect">
+            <a:avLst/>
+          </a:prstGeom>
+          <a:noFill/>
+          <a:ln/>
+        </p:spPr>
+        <p:txBody>
+          <a:bodyPr wrap="square" rtlCol="0" anchor="ctr"/>
+          <a:lstStyle/>
+          <a:p>
+            <a:pPr algn="r" indent="0" marL="0">
+              <a:buNone/>
+            </a:pPr>
+            <a:r>
+              <a:rPr lang="en-US" sz="900" dirty="0">
+                <a:solidFill>
+                  <a:srgbClr val="8C9BB5"/>
+                </a:solidFill>
+                <a:latin typeface="Calibri" pitchFamily="34" charset="0"/>
+                <a:ea typeface="Calibri" pitchFamily="34" charset="-122"/>
+                <a:cs typeface="Calibri" pitchFamily="34" charset="-120"/>
+              </a:rPr>
+              <a:t>14</a:t>
+            </a:r>
+            <a:endParaRPr lang="en-US" sz="900" dirty="0"/>
+          </a:p>
+        </p:txBody>
+      </p:sp>
+    </p:spTree>
+  </p:cSld>
+  <p:clrMapOvr>
+    <a:masterClrMapping/>
+  </p:clrMapOvr>
+</p:sld>
+</file>
+
+<file path=ppt/slides/slide15.xml><?xml version="1.0" encoding="utf-8"?>
+<p:sld xmlns:a="http://schemas.openxmlformats.org/drawingml/2006/main" xmlns:r="http://schemas.openxmlformats.org/officeDocument/2006/relationships" xmlns:p="http://schemas.openxmlformats.org/presentationml/2006/main">
+  <p:cSld name="Slide 15">
+    <p:bg>
+      <p:bgPr>
+        <a:solidFill>
+          <a:srgbClr val="0A0E17"/>
+        </a:solidFill>
+      </p:bgPr>
+    </p:bg>
+    <p:spTree>
+      <p:nvGrpSpPr>
+        <p:cNvPr id="1" name=""/>
+        <p:cNvGrpSpPr/>
+        <p:nvPr/>
+      </p:nvGrpSpPr>
+      <p:grpSpPr>
+        <a:xfrm>
+          <a:off x="0" y="0"/>
+          <a:ext cx="0" cy="0"/>
+          <a:chOff x="0" y="0"/>
+          <a:chExt cx="0" cy="0"/>
+        </a:xfrm>
+      </p:grpSpPr>
+      <p:sp>
+        <p:nvSpPr>
           <p:cNvPr id="2" name="Shape 0"/>
           <p:cNvSpPr/>
           <p:nvPr/>
@@ -4382,7 +7928,7 @@
                 <a:ea typeface="Calibri" pitchFamily="34" charset="-122"/>
                 <a:cs typeface="Calibri" pitchFamily="34" charset="-120"/>
               </a:rPr>
-              <a:t>7-feature banknote forensics across all denominations, with a per-feature 'why-flagged' breakdown for tellers &amp; field officers.</a:t>
+              <a:t>9-feature banknote forensics + OCR denomination check across ₹10–₹2000, with a per-feature 'why-flagged' breakdown for tellers.</a:t>
             </a:r>
             <a:endParaRPr lang="en-US" sz="1150" dirty="0"/>
           </a:p>
@@ -4904,7 +8450,7 @@
                 <a:ea typeface="Calibri" pitchFamily="34" charset="-122"/>
                 <a:cs typeface="Calibri" pitchFamily="34" charset="-120"/>
               </a:rPr>
-              <a:t>Low-false-positive chatbot in 12 languages on WhatsApp/IVR/app, with guided 1930 reporting.</a:t>
+              <a:t>Low-false-positive chatbot that answers entirely in the citizen's language (4 fully authored), with guided 1930 reporting.</a:t>
             </a:r>
             <a:endParaRPr lang="en-US" sz="1150" dirty="0"/>
           </a:p>
@@ -6693,7 +10239,7 @@
                 <a:ea typeface="Calibri" pitchFamily="34" charset="-122"/>
                 <a:cs typeface="Calibri" pitchFamily="34" charset="-120"/>
               </a:rPr>
-              <a:t>7 security features, per-note, explainable:</a:t>
+              <a:t>9 security features + OCR denomination check, explainable:</a:t>
             </a:r>
             <a:endParaRPr lang="en-US" sz="1200" dirty="0"/>
           </a:p>
@@ -9716,7 +13262,7 @@
         <p:spPr>
           <a:xfrm>
             <a:off x="6492240" y="3840480"/>
-            <a:ext cx="4937760" cy="1828800"/>
+            <a:ext cx="4937760" cy="1965960"/>
           </a:xfrm>
           <a:prstGeom prst="rect">
             <a:avLst/>
@@ -9730,13 +13276,13 @@
           <a:p>
             <a:pPr marL="342900" indent="-342900">
               <a:spcAft>
-                <a:spcPts val="700"/>
+                <a:spcPts val="500"/>
               </a:spcAft>
               <a:buSzPct val="100000"/>
               <a:buChar char="•"/>
             </a:pPr>
             <a:r>
-              <a:rPr lang="en-US" sz="1200" dirty="0">
+              <a:rPr lang="en-US" sz="1050" dirty="0">
                 <a:solidFill>
                   <a:srgbClr val="E6EDF6"/>
                 </a:solidFill>
@@ -9746,18 +13292,18 @@
               </a:rPr>
               <a:t>Zero false positives on benign traffic — the evaluation's hardest bar for a citizen-facing tool.</a:t>
             </a:r>
-            <a:endParaRPr lang="en-US" sz="1200" dirty="0"/>
+            <a:endParaRPr lang="en-US" sz="1050" dirty="0"/>
           </a:p>
           <a:p>
             <a:pPr marL="342900" indent="-342900">
               <a:spcAft>
-                <a:spcPts val="700"/>
+                <a:spcPts val="500"/>
               </a:spcAft>
               <a:buSzPct val="100000"/>
               <a:buChar char="•"/>
             </a:pPr>
             <a:r>
-              <a:rPr lang="en-US" sz="1200" dirty="0">
+              <a:rPr lang="en-US" sz="1050" dirty="0">
                 <a:solidFill>
                   <a:srgbClr val="E6EDF6"/>
                 </a:solidFill>
@@ -9767,39 +13313,39 @@
               </a:rPr>
               <a:t>Covers 7 scam families, not just digital-arrest.</a:t>
             </a:r>
-            <a:endParaRPr lang="en-US" sz="1200" dirty="0"/>
+            <a:endParaRPr lang="en-US" sz="1050" dirty="0"/>
           </a:p>
           <a:p>
             <a:pPr marL="342900" indent="-342900">
               <a:spcAft>
-                <a:spcPts val="700"/>
+                <a:spcPts val="500"/>
               </a:spcAft>
               <a:buSzPct val="100000"/>
               <a:buChar char="•"/>
             </a:pPr>
             <a:r>
-              <a:rPr lang="en-US" sz="1200" dirty="0">
-                <a:solidFill>
-                  <a:srgbClr val="E6EDF6"/>
-                </a:solidFill>
-                <a:latin typeface="Calibri" pitchFamily="34" charset="0"/>
-                <a:ea typeface="Calibri" pitchFamily="34" charset="-122"/>
-                <a:cs typeface="Calibri" pitchFamily="34" charset="-120"/>
-              </a:rPr>
-              <a:t>Only misses are deliberately vague messages — shown openly, no cherry-picking.</a:t>
-            </a:r>
-            <a:endParaRPr lang="en-US" sz="1200" dirty="0"/>
+              <a:rPr lang="en-US" sz="1050" dirty="0">
+                <a:solidFill>
+                  <a:srgbClr val="2ECC71"/>
+                </a:solidFill>
+                <a:latin typeface="Calibri" pitchFamily="34" charset="0"/>
+                <a:ea typeface="Calibri" pitchFamily="34" charset="-122"/>
+                <a:cs typeface="Calibri" pitchFamily="34" charset="-120"/>
+              </a:rPr>
+              <a:t>Held-out set (independently sourced from documented MHA/I4C + news cases, never used to author the patterns): 100% precision · 91.7% recall · 0% false alarms — reported separately, because a self-graded 100% is circular.</a:t>
+            </a:r>
+            <a:endParaRPr lang="en-US" sz="1050" dirty="0"/>
           </a:p>
           <a:p>
             <a:pPr marL="342900" indent="-342900">
               <a:spcAft>
-                <a:spcPts val="700"/>
+                <a:spcPts val="500"/>
               </a:spcAft>
               <a:buSzPct val="100000"/>
               <a:buChar char="•"/>
             </a:pPr>
             <a:r>
-              <a:rPr lang="en-US" sz="1200" dirty="0">
+              <a:rPr lang="en-US" sz="1050" dirty="0">
                 <a:solidFill>
                   <a:srgbClr val="E6EDF6"/>
                 </a:solidFill>
@@ -9807,20 +13353,20 @@
                 <a:ea typeface="Calibri" pitchFamily="34" charset="-122"/>
                 <a:cs typeface="Calibri" pitchFamily="34" charset="-120"/>
               </a:rPr>
-              <a:t>Real India UPI fraud data: 1,000 cases (₹1.59 cr) by type / lure / app / state.</a:t>
-            </a:r>
-            <a:endParaRPr lang="en-US" sz="1200" dirty="0"/>
+              <a:t>Every miss is shown openly, no cherry-picking.</a:t>
+            </a:r>
+            <a:endParaRPr lang="en-US" sz="1050" dirty="0"/>
           </a:p>
           <a:p>
             <a:pPr marL="342900" indent="-342900">
               <a:spcAft>
-                <a:spcPts val="700"/>
+                <a:spcPts val="500"/>
               </a:spcAft>
               <a:buSzPct val="100000"/>
               <a:buChar char="•"/>
             </a:pPr>
             <a:r>
-              <a:rPr lang="en-US" sz="1200" dirty="0">
+              <a:rPr lang="en-US" sz="1050" dirty="0">
                 <a:solidFill>
                   <a:srgbClr val="E6EDF6"/>
                 </a:solidFill>
@@ -9828,9 +13374,30 @@
                 <a:ea typeface="Calibri" pitchFamily="34" charset="-122"/>
                 <a:cs typeface="Calibri" pitchFamily="34" charset="-120"/>
               </a:rPr>
+              <a:t>Real India UPI fraud data: 1,000 cases (₹1.59 cr) by type / lure / app / state.</a:t>
+            </a:r>
+            <a:endParaRPr lang="en-US" sz="1050" dirty="0"/>
+          </a:p>
+          <a:p>
+            <a:pPr marL="342900" indent="-342900">
+              <a:spcAft>
+                <a:spcPts val="500"/>
+              </a:spcAft>
+              <a:buSzPct val="100000"/>
+              <a:buChar char="•"/>
+            </a:pPr>
+            <a:r>
+              <a:rPr lang="en-US" sz="1050" dirty="0">
+                <a:solidFill>
+                  <a:srgbClr val="E6EDF6"/>
+                </a:solidFill>
+                <a:latin typeface="Calibri" pitchFamily="34" charset="0"/>
+                <a:ea typeface="Calibri" pitchFamily="34" charset="-122"/>
+                <a:cs typeface="Calibri" pitchFamily="34" charset="-120"/>
+              </a:rPr>
               <a:t>Glass-box: every score traces to a matched phrase (court-admissible).</a:t>
             </a:r>
-            <a:endParaRPr lang="en-US" sz="1200" dirty="0"/>
+            <a:endParaRPr lang="en-US" sz="1050" dirty="0"/>
           </a:p>
         </p:txBody>
       </p:sp>
@@ -10590,7 +14157,7 @@
                 <a:ea typeface="Calibri" pitchFamily="34" charset="-122"/>
                 <a:cs typeface="Calibri" pitchFamily="34" charset="-120"/>
               </a:rPr>
-              <a:t>Command-centre dashboard + citizen chatbot (12-language interface, verdicts localised in 5 today).</a:t>
+              <a:t>Command-centre dashboard + citizen chatbot that replies entirely in the user's language (4 fully authored: EN/HI/TA/BN).</a:t>
             </a:r>
             <a:endParaRPr lang="en-US" sz="1250" dirty="0"/>
           </a:p>

--- a/docs/Prahari_Pitch_Deck.pptx
+++ b/docs/Prahari_Pitch_Deck.pptx
@@ -217,22 +217,22 @@
                 <c:ptCount val="6"/>
                 <c:lvl>
                   <c:pt idx="0">
-                    <c:v>Telangana</c:v>
+                    <c:v>Tamil Nadu</c:v>
                   </c:pt>
                   <c:pt idx="1">
+                    <c:v>Andhra Pr.</c:v>
+                  </c:pt>
+                  <c:pt idx="2">
+                    <c:v>Maharashtra</c:v>
+                  </c:pt>
+                  <c:pt idx="3">
+                    <c:v>Uttar Pradesh</c:v>
+                  </c:pt>
+                  <c:pt idx="4">
                     <c:v>Karnataka</c:v>
                   </c:pt>
-                  <c:pt idx="2">
-                    <c:v>Uttar Pradesh</c:v>
-                  </c:pt>
-                  <c:pt idx="3">
-                    <c:v>Maharashtra</c:v>
-                  </c:pt>
-                  <c:pt idx="4">
-                    <c:v>Andhra Pr.</c:v>
-                  </c:pt>
                   <c:pt idx="5">
-                    <c:v>Tamil Nadu</c:v>
+                    <c:v>Telangana</c:v>
                   </c:pt>
                 </c:lvl>
               </c:multiLvlStrCache>
@@ -245,22 +245,22 @@
                 <c:formatCode>General</c:formatCode>
                 <c:ptCount val="6"/>
                 <c:pt idx="0">
-                  <c:v>15297</c:v>
+                  <c:v>2082</c:v>
                 </c:pt>
                 <c:pt idx="1">
+                  <c:v>2341</c:v>
+                </c:pt>
+                <c:pt idx="2">
+                  <c:v>8249</c:v>
+                </c:pt>
+                <c:pt idx="3">
+                  <c:v>10117</c:v>
+                </c:pt>
+                <c:pt idx="4">
                   <c:v>12556</c:v>
                 </c:pt>
-                <c:pt idx="2">
-                  <c:v>10117</c:v>
-                </c:pt>
-                <c:pt idx="3">
-                  <c:v>8249</c:v>
-                </c:pt>
-                <c:pt idx="4">
-                  <c:v>2341</c:v>
-                </c:pt>
                 <c:pt idx="5">
-                  <c:v>2082</c:v>
+                  <c:v>15297</c:v>
                 </c:pt>
               </c:numCache>
             </c:numRef>
@@ -729,289 +729,6 @@
         </a:p>
       </c:txPr>
     </c:legend>
-    <c:plotVisOnly val="1"/>
-    <c:dispBlanksAs val="span"/>
-  </c:chart>
-  <c:spPr>
-    <a:noFill/>
-    <a:ln>
-      <a:noFill/>
-    </a:ln>
-    <a:effectLst/>
-  </c:spPr>
-  <c:externalData r:id="rId1">
-    <c:autoUpdate val="0"/>
-  </c:externalData>
-</c:chartSpace>
-</file>
-
-<file path=ppt/charts/chart3.xml><?xml version="1.0" encoding="utf-8"?>
-<c:chartSpace xmlns:c="http://schemas.openxmlformats.org/drawingml/2006/chart" xmlns:a="http://schemas.openxmlformats.org/drawingml/2006/main" xmlns:r="http://schemas.openxmlformats.org/officeDocument/2006/relationships">
-  <c:date1904 val="0"/>
-  <c:roundedCorners val="1"/>
-  <c:chart>
-    <c:title>
-      <c:tx>
-        <c:rich>
-          <a:bodyPr/>
-          <a:lstStyle/>
-          <a:p>
-            <a:pPr>
-              <a:defRPr sz="1200" b="0" i="0" u="none" strike="noStrike">
-                <a:solidFill>
-                  <a:srgbClr val="E9EEF7"/>
-                </a:solidFill>
-                <a:latin typeface="Segoe UI"/>
-              </a:defRPr>
-            </a:pPr>
-            <a:r>
-              <a:rPr sz="1200" b="0" i="0" u="none" strike="noStrike">
-                <a:solidFill>
-                  <a:srgbClr val="E9EEF7"/>
-                </a:solidFill>
-                <a:latin typeface="Segoe UI"/>
-              </a:rPr>
-              <a:t>Mean authenticity score per denomination (genuine RBI notes)</a:t>
-            </a:r>
-          </a:p>
-        </c:rich>
-      </c:tx>
-      <c:layout/>
-      <c:overlay val="0"/>
-    </c:title>
-    <c:autoTitleDeleted val="0"/>
-    <c:plotArea>
-      <c:layout/>
-      <c:barChart>
-        <c:barDir val="col"/>
-        <c:grouping val="clustered"/>
-        <c:varyColors val="0"/>
-        <c:ser>
-          <c:idx val="0"/>
-          <c:order val="0"/>
-          <c:tx>
-            <c:strRef>
-              <c:f>Sheet1!$B$1</c:f>
-              <c:strCache>
-                <c:ptCount val="1"/>
-                <c:pt idx="0">
-                  <c:v>Mean authenticity</c:v>
-                </c:pt>
-              </c:strCache>
-            </c:strRef>
-          </c:tx>
-          <c:spPr>
-            <a:solidFill>
-              <a:srgbClr val="2ECC71"/>
-            </a:solidFill>
-            <a:effectLst/>
-          </c:spPr>
-          <c:invertIfNegative val="0"/>
-          <c:dLbls>
-            <c:numFmt formatCode="#,##0" sourceLinked="0"/>
-            <c:txPr>
-              <a:bodyPr/>
-              <a:lstStyle/>
-              <a:p>
-                <a:pPr>
-                  <a:defRPr b="0" i="0" strike="noStrike" sz="1000" u="none">
-                    <a:solidFill>
-                      <a:srgbClr val="E9EEF7"/>
-                    </a:solidFill>
-                    <a:latin typeface="Segoe UI"/>
-                  </a:defRPr>
-                </a:pPr>
-              </a:p>
-            </c:txPr>
-            <c:showLegendKey val="0"/>
-            <c:showVal val="1"/>
-            <c:showCatName val="0"/>
-            <c:showSerName val="0"/>
-            <c:showPercent val="0"/>
-            <c:showBubbleSize val="0"/>
-            <c:showLeaderLines val="0"/>
-          </c:dLbls>
-          <c:cat>
-            <c:multiLvlStrRef>
-              <c:f>Sheet1!$A$2:$A$8</c:f>
-              <c:multiLvlStrCache>
-                <c:ptCount val="7"/>
-                <c:lvl>
-                  <c:pt idx="0">
-                    <c:v>₹10</c:v>
-                  </c:pt>
-                  <c:pt idx="1">
-                    <c:v>₹20</c:v>
-                  </c:pt>
-                  <c:pt idx="2">
-                    <c:v>₹50</c:v>
-                  </c:pt>
-                  <c:pt idx="3">
-                    <c:v>₹100</c:v>
-                  </c:pt>
-                  <c:pt idx="4">
-                    <c:v>₹200</c:v>
-                  </c:pt>
-                  <c:pt idx="5">
-                    <c:v>₹500</c:v>
-                  </c:pt>
-                  <c:pt idx="6">
-                    <c:v>₹2000</c:v>
-                  </c:pt>
-                </c:lvl>
-              </c:multiLvlStrCache>
-            </c:multiLvlStrRef>
-          </c:cat>
-          <c:val>
-            <c:numRef>
-              <c:f>Sheet1!$B$2:$B$8</c:f>
-              <c:numCache>
-                <c:formatCode>General</c:formatCode>
-                <c:ptCount val="7"/>
-                <c:pt idx="0">
-                  <c:v>87</c:v>
-                </c:pt>
-                <c:pt idx="1">
-                  <c:v>94</c:v>
-                </c:pt>
-                <c:pt idx="2">
-                  <c:v>94.5</c:v>
-                </c:pt>
-                <c:pt idx="3">
-                  <c:v>90.5</c:v>
-                </c:pt>
-                <c:pt idx="4">
-                  <c:v>95</c:v>
-                </c:pt>
-                <c:pt idx="5">
-                  <c:v>94.5</c:v>
-                </c:pt>
-                <c:pt idx="6">
-                  <c:v>96</c:v>
-                </c:pt>
-              </c:numCache>
-            </c:numRef>
-          </c:val>
-        </c:ser>
-        <c:dLbls>
-          <c:numFmt formatCode="#,##0" sourceLinked="0"/>
-          <c:txPr>
-            <a:bodyPr/>
-            <a:lstStyle/>
-            <a:p>
-              <a:pPr>
-                <a:defRPr b="0" i="0" strike="noStrike" sz="1000" u="none">
-                  <a:solidFill>
-                    <a:srgbClr val="E9EEF7"/>
-                  </a:solidFill>
-                  <a:latin typeface="Segoe UI"/>
-                </a:defRPr>
-              </a:pPr>
-            </a:p>
-          </c:txPr>
-          <c:showLegendKey val="0"/>
-          <c:showVal val="1"/>
-          <c:showCatName val="0"/>
-          <c:showSerName val="0"/>
-          <c:showPercent val="0"/>
-          <c:showBubbleSize val="0"/>
-          <c:showLeaderLines val="0"/>
-        </c:dLbls>
-        <c:gapWidth val="45"/>
-        <c:overlap val="0"/>
-        <c:axId val="2094734554"/>
-        <c:axId val="2094734552"/>
-        <c:axId val="2094734556"/>
-      </c:barChart>
-      <c:catAx>
-        <c:axId val="2094734554"/>
-        <c:scaling>
-          <c:orientation val="minMax"/>
-        </c:scaling>
-        <c:delete val="0"/>
-        <c:axPos val="b"/>
-        <c:numFmt formatCode="General" sourceLinked="1"/>
-        <c:majorTickMark val="out"/>
-        <c:minorTickMark val="none"/>
-        <c:tickLblPos val="low"/>
-        <c:spPr>
-          <a:ln w="12700" cap="flat">
-            <a:noFill/>
-            <a:prstDash val="solid"/>
-            <a:round/>
-          </a:ln>
-        </c:spPr>
-        <c:txPr>
-          <a:bodyPr/>
-          <a:lstStyle/>
-          <a:p>
-            <a:pPr>
-              <a:defRPr sz="1100" b="0" i="0" u="none" strike="noStrike">
-                <a:solidFill>
-                  <a:srgbClr val="93A1BA"/>
-                </a:solidFill>
-                <a:latin typeface="Arial"/>
-              </a:defRPr>
-            </a:pPr>
-            <a:endParaRPr lang="en-US"/>
-          </a:p>
-        </c:txPr>
-        <c:crossAx val="2094734552"/>
-        <c:crosses val="autoZero"/>
-        <c:auto val="1"/>
-        <c:lblAlgn val="ctr"/>
-        <c:noMultiLvlLbl val="1"/>
-      </c:catAx>
-      <c:valAx>
-        <c:axId val="2094734552"/>
-        <c:scaling>
-          <c:orientation val="minMax"/>
-          <c:max val="110"/>
-        </c:scaling>
-        <c:delete val="1"/>
-        <c:axPos val="l"/>
-        <c:numFmt formatCode="General" sourceLinked="0"/>
-        <c:majorTickMark val="out"/>
-        <c:minorTickMark val="none"/>
-        <c:tickLblPos val="nextTo"/>
-        <c:spPr>
-          <a:ln w="12700" cap="flat">
-            <a:solidFill>
-              <a:srgbClr val="888888"/>
-            </a:solidFill>
-            <a:prstDash val="solid"/>
-            <a:round/>
-          </a:ln>
-        </c:spPr>
-        <c:txPr>
-          <a:bodyPr/>
-          <a:lstStyle/>
-          <a:p>
-            <a:pPr>
-              <a:defRPr sz="1200" b="0" i="0" u="none" strike="noStrike">
-                <a:solidFill>
-                  <a:srgbClr val="000000"/>
-                </a:solidFill>
-                <a:latin typeface="Arial"/>
-              </a:defRPr>
-            </a:pPr>
-            <a:endParaRPr lang="en-US"/>
-          </a:p>
-        </c:txPr>
-        <c:crossAx val="2094734554"/>
-        <c:crosses val="autoZero"/>
-        <c:crossBetween val="between"/>
-      </c:valAx>
-      <c:spPr>
-        <a:solidFill>
-          <a:srgbClr val="0A0F1B"/>
-        </a:solidFill>
-        <a:ln>
-          <a:noFill/>
-        </a:ln>
-        <a:effectLst/>
-      </c:spPr>
-    </c:plotArea>
     <c:plotVisOnly val="1"/>
     <c:dispBlanksAs val="span"/>
   </c:chart>
@@ -7787,36 +7504,20 @@
           </a:p>
         </p:txBody>
       </p:sp>
-      <p:graphicFrame>
-        <p:nvGraphicFramePr>
-          <p:cNvPr id="5" name="Chart 0" descr=""/>
-          <p:cNvGraphicFramePr/>
-          <p:nvPr/>
-        </p:nvGraphicFramePr>
-        <p:xfrm>
-          <a:off x="502920" y="1280160"/>
-          <a:ext cx="6583680" cy="4572000"/>
-        </p:xfrm>
-        <a:graphic xmlns:a="http://schemas.openxmlformats.org/drawingml/2006/main">
-          <a:graphicData uri="http://schemas.openxmlformats.org/drawingml/2006/chart">
-            <c:chart xmlns:c="http://schemas.openxmlformats.org/drawingml/2006/chart" r:id="rId1"/>
-          </a:graphicData>
-        </a:graphic>
-      </p:graphicFrame>
-      <p:sp>
-        <p:nvSpPr>
-          <p:cNvPr id="6" name="Shape 3"/>
-          <p:cNvSpPr/>
-          <p:nvPr/>
-        </p:nvSpPr>
-        <p:spPr>
-          <a:xfrm>
-            <a:off x="7360920" y="1463040"/>
-            <a:ext cx="2057400" cy="1234440"/>
+      <p:sp>
+        <p:nvSpPr>
+          <p:cNvPr id="5" name="Shape 3"/>
+          <p:cNvSpPr/>
+          <p:nvPr/>
+        </p:nvSpPr>
+        <p:spPr>
+          <a:xfrm>
+            <a:off x="502920" y="1280160"/>
+            <a:ext cx="6583680" cy="4572000"/>
           </a:xfrm>
           <a:prstGeom prst="roundRect">
             <a:avLst>
-              <a:gd name="adj" fmla="val 7407"/>
+              <a:gd name="adj" fmla="val 2000"/>
             </a:avLst>
           </a:prstGeom>
           <a:solidFill>
@@ -7832,14 +7533,78 @@
       </p:sp>
       <p:sp>
         <p:nvSpPr>
-          <p:cNvPr id="7" name="Text 4"/>
-          <p:cNvSpPr/>
-          <p:nvPr/>
-        </p:nvSpPr>
-        <p:spPr>
-          <a:xfrm>
-            <a:off x="7360920" y="1609344"/>
-            <a:ext cx="2057400" cy="640080"/>
+          <p:cNvPr id="6" name="Text 4"/>
+          <p:cNvSpPr/>
+          <p:nvPr/>
+        </p:nvSpPr>
+        <p:spPr>
+          <a:xfrm>
+            <a:off x="731520" y="1463040"/>
+            <a:ext cx="6126480" cy="365760"/>
+          </a:xfrm>
+          <a:prstGeom prst="rect">
+            <a:avLst/>
+          </a:prstGeom>
+          <a:noFill/>
+          <a:ln/>
+        </p:spPr>
+        <p:txBody>
+          <a:bodyPr wrap="square" rtlCol="0" anchor="t"/>
+          <a:lstStyle/>
+          <a:p>
+            <a:pPr algn="l" indent="0" marL="0">
+              <a:lnSpc>
+                <a:spcPct val="100000"/>
+              </a:lnSpc>
+              <a:buNone/>
+            </a:pPr>
+            <a:r>
+              <a:rPr lang="en-US" sz="1200" b="1" dirty="0">
+                <a:solidFill>
+                  <a:srgbClr val="E9EEF7"/>
+                </a:solidFill>
+                <a:latin typeface="Segoe UI" pitchFamily="34" charset="0"/>
+                <a:ea typeface="Segoe UI" pitchFamily="34" charset="-122"/>
+                <a:cs typeface="Segoe UI" pitchFamily="34" charset="-120"/>
+              </a:rPr>
+              <a:t>Mean authenticity score per denomination (genuine RBI notes)</a:t>
+            </a:r>
+            <a:endParaRPr lang="en-US" sz="1200" dirty="0"/>
+          </a:p>
+        </p:txBody>
+      </p:sp>
+      <p:sp>
+        <p:nvSpPr>
+          <p:cNvPr id="7" name="Shape 5"/>
+          <p:cNvSpPr/>
+          <p:nvPr/>
+        </p:nvSpPr>
+        <p:spPr>
+          <a:xfrm>
+            <a:off x="868680" y="2723998"/>
+            <a:ext cx="658368" cy="2625242"/>
+          </a:xfrm>
+          <a:prstGeom prst="roundRect">
+            <a:avLst>
+              <a:gd name="adj" fmla="val 5556"/>
+            </a:avLst>
+          </a:prstGeom>
+          <a:solidFill>
+            <a:srgbClr val="2ECC71"/>
+          </a:solidFill>
+          <a:ln/>
+        </p:spPr>
+      </p:sp>
+      <p:sp>
+        <p:nvSpPr>
+          <p:cNvPr id="8" name="Text 6"/>
+          <p:cNvSpPr/>
+          <p:nvPr/>
+        </p:nvSpPr>
+        <p:spPr>
+          <a:xfrm>
+            <a:off x="777240" y="2431390"/>
+            <a:ext cx="841248" cy="274320"/>
           </a:xfrm>
           <a:prstGeom prst="rect">
             <a:avLst/>
@@ -7858,30 +7623,30 @@
               <a:buNone/>
             </a:pPr>
             <a:r>
-              <a:rPr lang="en-US" sz="3000" b="1" dirty="0">
-                <a:solidFill>
-                  <a:srgbClr val="2ECC71"/>
-                </a:solidFill>
-                <a:latin typeface="Segoe UI Semibold" pitchFamily="34" charset="0"/>
-                <a:ea typeface="Segoe UI Semibold" pitchFamily="34" charset="-122"/>
-                <a:cs typeface="Segoe UI Semibold" pitchFamily="34" charset="-120"/>
-              </a:rPr>
-              <a:t>100%</a:t>
-            </a:r>
-            <a:endParaRPr lang="en-US" sz="3000" dirty="0"/>
-          </a:p>
-        </p:txBody>
-      </p:sp>
-      <p:sp>
-        <p:nvSpPr>
-          <p:cNvPr id="8" name="Text 5"/>
-          <p:cNvSpPr/>
-          <p:nvPr/>
-        </p:nvSpPr>
-        <p:spPr>
-          <a:xfrm>
-            <a:off x="7360920" y="2304288"/>
-            <a:ext cx="2057400" cy="365760"/>
+              <a:rPr lang="en-US" sz="950" b="1" dirty="0">
+                <a:solidFill>
+                  <a:srgbClr val="E9EEF7"/>
+                </a:solidFill>
+                <a:latin typeface="Segoe UI" pitchFamily="34" charset="0"/>
+                <a:ea typeface="Segoe UI" pitchFamily="34" charset="-122"/>
+                <a:cs typeface="Segoe UI" pitchFamily="34" charset="-120"/>
+              </a:rPr>
+              <a:t>87</a:t>
+            </a:r>
+            <a:endParaRPr lang="en-US" sz="950" dirty="0"/>
+          </a:p>
+        </p:txBody>
+      </p:sp>
+      <p:sp>
+        <p:nvSpPr>
+          <p:cNvPr id="9" name="Text 7"/>
+          <p:cNvSpPr/>
+          <p:nvPr/>
+        </p:nvSpPr>
+        <p:spPr>
+          <a:xfrm>
+            <a:off x="731520" y="5422392"/>
+            <a:ext cx="932688" cy="274320"/>
           </a:xfrm>
           <a:prstGeom prst="rect">
             <a:avLst/>
@@ -7908,7 +7673,7 @@
                 <a:ea typeface="Segoe UI" pitchFamily="34" charset="-122"/>
                 <a:cs typeface="Segoe UI" pitchFamily="34" charset="-120"/>
               </a:rPr>
-              <a:t>Genuine accepted</a:t>
+              <a:t>₹10</a:t>
             </a:r>
             <a:endParaRPr lang="en-US" sz="1000" dirty="0"/>
           </a:p>
@@ -7916,14 +7681,675 @@
       </p:sp>
       <p:sp>
         <p:nvSpPr>
-          <p:cNvPr id="9" name="Shape 6"/>
-          <p:cNvSpPr/>
-          <p:nvPr/>
-        </p:nvSpPr>
-        <p:spPr>
-          <a:xfrm>
-            <a:off x="9601200" y="1463040"/>
-            <a:ext cx="2103120" cy="1234440"/>
+          <p:cNvPr id="10" name="Shape 8"/>
+          <p:cNvSpPr/>
+          <p:nvPr/>
+        </p:nvSpPr>
+        <p:spPr>
+          <a:xfrm>
+            <a:off x="1700784" y="2512771"/>
+            <a:ext cx="658368" cy="2836469"/>
+          </a:xfrm>
+          <a:prstGeom prst="roundRect">
+            <a:avLst>
+              <a:gd name="adj" fmla="val 5556"/>
+            </a:avLst>
+          </a:prstGeom>
+          <a:solidFill>
+            <a:srgbClr val="2ECC71"/>
+          </a:solidFill>
+          <a:ln/>
+        </p:spPr>
+      </p:sp>
+      <p:sp>
+        <p:nvSpPr>
+          <p:cNvPr id="11" name="Text 9"/>
+          <p:cNvSpPr/>
+          <p:nvPr/>
+        </p:nvSpPr>
+        <p:spPr>
+          <a:xfrm>
+            <a:off x="1609344" y="2220163"/>
+            <a:ext cx="841248" cy="274320"/>
+          </a:xfrm>
+          <a:prstGeom prst="rect">
+            <a:avLst/>
+          </a:prstGeom>
+          <a:noFill/>
+          <a:ln/>
+        </p:spPr>
+        <p:txBody>
+          <a:bodyPr wrap="square" rtlCol="0" anchor="t"/>
+          <a:lstStyle/>
+          <a:p>
+            <a:pPr algn="ctr" indent="0" marL="0">
+              <a:lnSpc>
+                <a:spcPct val="100000"/>
+              </a:lnSpc>
+              <a:buNone/>
+            </a:pPr>
+            <a:r>
+              <a:rPr lang="en-US" sz="950" b="1" dirty="0">
+                <a:solidFill>
+                  <a:srgbClr val="E9EEF7"/>
+                </a:solidFill>
+                <a:latin typeface="Segoe UI" pitchFamily="34" charset="0"/>
+                <a:ea typeface="Segoe UI" pitchFamily="34" charset="-122"/>
+                <a:cs typeface="Segoe UI" pitchFamily="34" charset="-120"/>
+              </a:rPr>
+              <a:t>94</a:t>
+            </a:r>
+            <a:endParaRPr lang="en-US" sz="950" dirty="0"/>
+          </a:p>
+        </p:txBody>
+      </p:sp>
+      <p:sp>
+        <p:nvSpPr>
+          <p:cNvPr id="12" name="Text 10"/>
+          <p:cNvSpPr/>
+          <p:nvPr/>
+        </p:nvSpPr>
+        <p:spPr>
+          <a:xfrm>
+            <a:off x="1563624" y="5422392"/>
+            <a:ext cx="932688" cy="274320"/>
+          </a:xfrm>
+          <a:prstGeom prst="rect">
+            <a:avLst/>
+          </a:prstGeom>
+          <a:noFill/>
+          <a:ln/>
+        </p:spPr>
+        <p:txBody>
+          <a:bodyPr wrap="square" rtlCol="0" anchor="t"/>
+          <a:lstStyle/>
+          <a:p>
+            <a:pPr algn="ctr" indent="0" marL="0">
+              <a:lnSpc>
+                <a:spcPct val="100000"/>
+              </a:lnSpc>
+              <a:buNone/>
+            </a:pPr>
+            <a:r>
+              <a:rPr lang="en-US" sz="1000" dirty="0">
+                <a:solidFill>
+                  <a:srgbClr val="93A1BA"/>
+                </a:solidFill>
+                <a:latin typeface="Segoe UI" pitchFamily="34" charset="0"/>
+                <a:ea typeface="Segoe UI" pitchFamily="34" charset="-122"/>
+                <a:cs typeface="Segoe UI" pitchFamily="34" charset="-120"/>
+              </a:rPr>
+              <a:t>₹20</a:t>
+            </a:r>
+            <a:endParaRPr lang="en-US" sz="1000" dirty="0"/>
+          </a:p>
+        </p:txBody>
+      </p:sp>
+      <p:sp>
+        <p:nvSpPr>
+          <p:cNvPr id="13" name="Shape 11"/>
+          <p:cNvSpPr/>
+          <p:nvPr/>
+        </p:nvSpPr>
+        <p:spPr>
+          <a:xfrm>
+            <a:off x="2532888" y="2497684"/>
+            <a:ext cx="658368" cy="2851556"/>
+          </a:xfrm>
+          <a:prstGeom prst="roundRect">
+            <a:avLst>
+              <a:gd name="adj" fmla="val 5556"/>
+            </a:avLst>
+          </a:prstGeom>
+          <a:solidFill>
+            <a:srgbClr val="2ECC71"/>
+          </a:solidFill>
+          <a:ln/>
+        </p:spPr>
+      </p:sp>
+      <p:sp>
+        <p:nvSpPr>
+          <p:cNvPr id="14" name="Text 12"/>
+          <p:cNvSpPr/>
+          <p:nvPr/>
+        </p:nvSpPr>
+        <p:spPr>
+          <a:xfrm>
+            <a:off x="2441448" y="2205076"/>
+            <a:ext cx="841248" cy="274320"/>
+          </a:xfrm>
+          <a:prstGeom prst="rect">
+            <a:avLst/>
+          </a:prstGeom>
+          <a:noFill/>
+          <a:ln/>
+        </p:spPr>
+        <p:txBody>
+          <a:bodyPr wrap="square" rtlCol="0" anchor="t"/>
+          <a:lstStyle/>
+          <a:p>
+            <a:pPr algn="ctr" indent="0" marL="0">
+              <a:lnSpc>
+                <a:spcPct val="100000"/>
+              </a:lnSpc>
+              <a:buNone/>
+            </a:pPr>
+            <a:r>
+              <a:rPr lang="en-US" sz="950" b="1" dirty="0">
+                <a:solidFill>
+                  <a:srgbClr val="E9EEF7"/>
+                </a:solidFill>
+                <a:latin typeface="Segoe UI" pitchFamily="34" charset="0"/>
+                <a:ea typeface="Segoe UI" pitchFamily="34" charset="-122"/>
+                <a:cs typeface="Segoe UI" pitchFamily="34" charset="-120"/>
+              </a:rPr>
+              <a:t>94.5</a:t>
+            </a:r>
+            <a:endParaRPr lang="en-US" sz="950" dirty="0"/>
+          </a:p>
+        </p:txBody>
+      </p:sp>
+      <p:sp>
+        <p:nvSpPr>
+          <p:cNvPr id="15" name="Text 13"/>
+          <p:cNvSpPr/>
+          <p:nvPr/>
+        </p:nvSpPr>
+        <p:spPr>
+          <a:xfrm>
+            <a:off x="2395728" y="5422392"/>
+            <a:ext cx="932688" cy="274320"/>
+          </a:xfrm>
+          <a:prstGeom prst="rect">
+            <a:avLst/>
+          </a:prstGeom>
+          <a:noFill/>
+          <a:ln/>
+        </p:spPr>
+        <p:txBody>
+          <a:bodyPr wrap="square" rtlCol="0" anchor="t"/>
+          <a:lstStyle/>
+          <a:p>
+            <a:pPr algn="ctr" indent="0" marL="0">
+              <a:lnSpc>
+                <a:spcPct val="100000"/>
+              </a:lnSpc>
+              <a:buNone/>
+            </a:pPr>
+            <a:r>
+              <a:rPr lang="en-US" sz="1000" dirty="0">
+                <a:solidFill>
+                  <a:srgbClr val="93A1BA"/>
+                </a:solidFill>
+                <a:latin typeface="Segoe UI" pitchFamily="34" charset="0"/>
+                <a:ea typeface="Segoe UI" pitchFamily="34" charset="-122"/>
+                <a:cs typeface="Segoe UI" pitchFamily="34" charset="-120"/>
+              </a:rPr>
+              <a:t>₹50</a:t>
+            </a:r>
+            <a:endParaRPr lang="en-US" sz="1000" dirty="0"/>
+          </a:p>
+        </p:txBody>
+      </p:sp>
+      <p:sp>
+        <p:nvSpPr>
+          <p:cNvPr id="16" name="Shape 14"/>
+          <p:cNvSpPr/>
+          <p:nvPr/>
+        </p:nvSpPr>
+        <p:spPr>
+          <a:xfrm>
+            <a:off x="3364992" y="2618384"/>
+            <a:ext cx="658368" cy="2730856"/>
+          </a:xfrm>
+          <a:prstGeom prst="roundRect">
+            <a:avLst>
+              <a:gd name="adj" fmla="val 5556"/>
+            </a:avLst>
+          </a:prstGeom>
+          <a:solidFill>
+            <a:srgbClr val="2ECC71"/>
+          </a:solidFill>
+          <a:ln/>
+        </p:spPr>
+      </p:sp>
+      <p:sp>
+        <p:nvSpPr>
+          <p:cNvPr id="17" name="Text 15"/>
+          <p:cNvSpPr/>
+          <p:nvPr/>
+        </p:nvSpPr>
+        <p:spPr>
+          <a:xfrm>
+            <a:off x="3273552" y="2325776"/>
+            <a:ext cx="841248" cy="274320"/>
+          </a:xfrm>
+          <a:prstGeom prst="rect">
+            <a:avLst/>
+          </a:prstGeom>
+          <a:noFill/>
+          <a:ln/>
+        </p:spPr>
+        <p:txBody>
+          <a:bodyPr wrap="square" rtlCol="0" anchor="t"/>
+          <a:lstStyle/>
+          <a:p>
+            <a:pPr algn="ctr" indent="0" marL="0">
+              <a:lnSpc>
+                <a:spcPct val="100000"/>
+              </a:lnSpc>
+              <a:buNone/>
+            </a:pPr>
+            <a:r>
+              <a:rPr lang="en-US" sz="950" b="1" dirty="0">
+                <a:solidFill>
+                  <a:srgbClr val="E9EEF7"/>
+                </a:solidFill>
+                <a:latin typeface="Segoe UI" pitchFamily="34" charset="0"/>
+                <a:ea typeface="Segoe UI" pitchFamily="34" charset="-122"/>
+                <a:cs typeface="Segoe UI" pitchFamily="34" charset="-120"/>
+              </a:rPr>
+              <a:t>90.5</a:t>
+            </a:r>
+            <a:endParaRPr lang="en-US" sz="950" dirty="0"/>
+          </a:p>
+        </p:txBody>
+      </p:sp>
+      <p:sp>
+        <p:nvSpPr>
+          <p:cNvPr id="18" name="Text 16"/>
+          <p:cNvSpPr/>
+          <p:nvPr/>
+        </p:nvSpPr>
+        <p:spPr>
+          <a:xfrm>
+            <a:off x="3227832" y="5422392"/>
+            <a:ext cx="932688" cy="274320"/>
+          </a:xfrm>
+          <a:prstGeom prst="rect">
+            <a:avLst/>
+          </a:prstGeom>
+          <a:noFill/>
+          <a:ln/>
+        </p:spPr>
+        <p:txBody>
+          <a:bodyPr wrap="square" rtlCol="0" anchor="t"/>
+          <a:lstStyle/>
+          <a:p>
+            <a:pPr algn="ctr" indent="0" marL="0">
+              <a:lnSpc>
+                <a:spcPct val="100000"/>
+              </a:lnSpc>
+              <a:buNone/>
+            </a:pPr>
+            <a:r>
+              <a:rPr lang="en-US" sz="1000" dirty="0">
+                <a:solidFill>
+                  <a:srgbClr val="93A1BA"/>
+                </a:solidFill>
+                <a:latin typeface="Segoe UI" pitchFamily="34" charset="0"/>
+                <a:ea typeface="Segoe UI" pitchFamily="34" charset="-122"/>
+                <a:cs typeface="Segoe UI" pitchFamily="34" charset="-120"/>
+              </a:rPr>
+              <a:t>₹100</a:t>
+            </a:r>
+            <a:endParaRPr lang="en-US" sz="1000" dirty="0"/>
+          </a:p>
+        </p:txBody>
+      </p:sp>
+      <p:sp>
+        <p:nvSpPr>
+          <p:cNvPr id="19" name="Shape 17"/>
+          <p:cNvSpPr/>
+          <p:nvPr/>
+        </p:nvSpPr>
+        <p:spPr>
+          <a:xfrm>
+            <a:off x="4197096" y="2482596"/>
+            <a:ext cx="658368" cy="2866644"/>
+          </a:xfrm>
+          <a:prstGeom prst="roundRect">
+            <a:avLst>
+              <a:gd name="adj" fmla="val 5556"/>
+            </a:avLst>
+          </a:prstGeom>
+          <a:solidFill>
+            <a:srgbClr val="2ECC71"/>
+          </a:solidFill>
+          <a:ln/>
+        </p:spPr>
+      </p:sp>
+      <p:sp>
+        <p:nvSpPr>
+          <p:cNvPr id="20" name="Text 18"/>
+          <p:cNvSpPr/>
+          <p:nvPr/>
+        </p:nvSpPr>
+        <p:spPr>
+          <a:xfrm>
+            <a:off x="4105656" y="2189988"/>
+            <a:ext cx="841248" cy="274320"/>
+          </a:xfrm>
+          <a:prstGeom prst="rect">
+            <a:avLst/>
+          </a:prstGeom>
+          <a:noFill/>
+          <a:ln/>
+        </p:spPr>
+        <p:txBody>
+          <a:bodyPr wrap="square" rtlCol="0" anchor="t"/>
+          <a:lstStyle/>
+          <a:p>
+            <a:pPr algn="ctr" indent="0" marL="0">
+              <a:lnSpc>
+                <a:spcPct val="100000"/>
+              </a:lnSpc>
+              <a:buNone/>
+            </a:pPr>
+            <a:r>
+              <a:rPr lang="en-US" sz="950" b="1" dirty="0">
+                <a:solidFill>
+                  <a:srgbClr val="E9EEF7"/>
+                </a:solidFill>
+                <a:latin typeface="Segoe UI" pitchFamily="34" charset="0"/>
+                <a:ea typeface="Segoe UI" pitchFamily="34" charset="-122"/>
+                <a:cs typeface="Segoe UI" pitchFamily="34" charset="-120"/>
+              </a:rPr>
+              <a:t>95</a:t>
+            </a:r>
+            <a:endParaRPr lang="en-US" sz="950" dirty="0"/>
+          </a:p>
+        </p:txBody>
+      </p:sp>
+      <p:sp>
+        <p:nvSpPr>
+          <p:cNvPr id="21" name="Text 19"/>
+          <p:cNvSpPr/>
+          <p:nvPr/>
+        </p:nvSpPr>
+        <p:spPr>
+          <a:xfrm>
+            <a:off x="4059936" y="5422392"/>
+            <a:ext cx="932688" cy="274320"/>
+          </a:xfrm>
+          <a:prstGeom prst="rect">
+            <a:avLst/>
+          </a:prstGeom>
+          <a:noFill/>
+          <a:ln/>
+        </p:spPr>
+        <p:txBody>
+          <a:bodyPr wrap="square" rtlCol="0" anchor="t"/>
+          <a:lstStyle/>
+          <a:p>
+            <a:pPr algn="ctr" indent="0" marL="0">
+              <a:lnSpc>
+                <a:spcPct val="100000"/>
+              </a:lnSpc>
+              <a:buNone/>
+            </a:pPr>
+            <a:r>
+              <a:rPr lang="en-US" sz="1000" dirty="0">
+                <a:solidFill>
+                  <a:srgbClr val="93A1BA"/>
+                </a:solidFill>
+                <a:latin typeface="Segoe UI" pitchFamily="34" charset="0"/>
+                <a:ea typeface="Segoe UI" pitchFamily="34" charset="-122"/>
+                <a:cs typeface="Segoe UI" pitchFamily="34" charset="-120"/>
+              </a:rPr>
+              <a:t>₹200</a:t>
+            </a:r>
+            <a:endParaRPr lang="en-US" sz="1000" dirty="0"/>
+          </a:p>
+        </p:txBody>
+      </p:sp>
+      <p:sp>
+        <p:nvSpPr>
+          <p:cNvPr id="22" name="Shape 20"/>
+          <p:cNvSpPr/>
+          <p:nvPr/>
+        </p:nvSpPr>
+        <p:spPr>
+          <a:xfrm>
+            <a:off x="5029200" y="2497684"/>
+            <a:ext cx="658368" cy="2851556"/>
+          </a:xfrm>
+          <a:prstGeom prst="roundRect">
+            <a:avLst>
+              <a:gd name="adj" fmla="val 5556"/>
+            </a:avLst>
+          </a:prstGeom>
+          <a:solidFill>
+            <a:srgbClr val="2ECC71"/>
+          </a:solidFill>
+          <a:ln/>
+        </p:spPr>
+      </p:sp>
+      <p:sp>
+        <p:nvSpPr>
+          <p:cNvPr id="23" name="Text 21"/>
+          <p:cNvSpPr/>
+          <p:nvPr/>
+        </p:nvSpPr>
+        <p:spPr>
+          <a:xfrm>
+            <a:off x="4937760" y="2205076"/>
+            <a:ext cx="841248" cy="274320"/>
+          </a:xfrm>
+          <a:prstGeom prst="rect">
+            <a:avLst/>
+          </a:prstGeom>
+          <a:noFill/>
+          <a:ln/>
+        </p:spPr>
+        <p:txBody>
+          <a:bodyPr wrap="square" rtlCol="0" anchor="t"/>
+          <a:lstStyle/>
+          <a:p>
+            <a:pPr algn="ctr" indent="0" marL="0">
+              <a:lnSpc>
+                <a:spcPct val="100000"/>
+              </a:lnSpc>
+              <a:buNone/>
+            </a:pPr>
+            <a:r>
+              <a:rPr lang="en-US" sz="950" b="1" dirty="0">
+                <a:solidFill>
+                  <a:srgbClr val="E9EEF7"/>
+                </a:solidFill>
+                <a:latin typeface="Segoe UI" pitchFamily="34" charset="0"/>
+                <a:ea typeface="Segoe UI" pitchFamily="34" charset="-122"/>
+                <a:cs typeface="Segoe UI" pitchFamily="34" charset="-120"/>
+              </a:rPr>
+              <a:t>94.5</a:t>
+            </a:r>
+            <a:endParaRPr lang="en-US" sz="950" dirty="0"/>
+          </a:p>
+        </p:txBody>
+      </p:sp>
+      <p:sp>
+        <p:nvSpPr>
+          <p:cNvPr id="24" name="Text 22"/>
+          <p:cNvSpPr/>
+          <p:nvPr/>
+        </p:nvSpPr>
+        <p:spPr>
+          <a:xfrm>
+            <a:off x="4892040" y="5422392"/>
+            <a:ext cx="932688" cy="274320"/>
+          </a:xfrm>
+          <a:prstGeom prst="rect">
+            <a:avLst/>
+          </a:prstGeom>
+          <a:noFill/>
+          <a:ln/>
+        </p:spPr>
+        <p:txBody>
+          <a:bodyPr wrap="square" rtlCol="0" anchor="t"/>
+          <a:lstStyle/>
+          <a:p>
+            <a:pPr algn="ctr" indent="0" marL="0">
+              <a:lnSpc>
+                <a:spcPct val="100000"/>
+              </a:lnSpc>
+              <a:buNone/>
+            </a:pPr>
+            <a:r>
+              <a:rPr lang="en-US" sz="1000" dirty="0">
+                <a:solidFill>
+                  <a:srgbClr val="93A1BA"/>
+                </a:solidFill>
+                <a:latin typeface="Segoe UI" pitchFamily="34" charset="0"/>
+                <a:ea typeface="Segoe UI" pitchFamily="34" charset="-122"/>
+                <a:cs typeface="Segoe UI" pitchFamily="34" charset="-120"/>
+              </a:rPr>
+              <a:t>₹500</a:t>
+            </a:r>
+            <a:endParaRPr lang="en-US" sz="1000" dirty="0"/>
+          </a:p>
+        </p:txBody>
+      </p:sp>
+      <p:sp>
+        <p:nvSpPr>
+          <p:cNvPr id="25" name="Shape 23"/>
+          <p:cNvSpPr/>
+          <p:nvPr/>
+        </p:nvSpPr>
+        <p:spPr>
+          <a:xfrm>
+            <a:off x="5861304" y="2452421"/>
+            <a:ext cx="658368" cy="2896819"/>
+          </a:xfrm>
+          <a:prstGeom prst="roundRect">
+            <a:avLst>
+              <a:gd name="adj" fmla="val 5556"/>
+            </a:avLst>
+          </a:prstGeom>
+          <a:solidFill>
+            <a:srgbClr val="2ECC71"/>
+          </a:solidFill>
+          <a:ln/>
+        </p:spPr>
+      </p:sp>
+      <p:sp>
+        <p:nvSpPr>
+          <p:cNvPr id="26" name="Text 24"/>
+          <p:cNvSpPr/>
+          <p:nvPr/>
+        </p:nvSpPr>
+        <p:spPr>
+          <a:xfrm>
+            <a:off x="5769864" y="2159813"/>
+            <a:ext cx="841248" cy="274320"/>
+          </a:xfrm>
+          <a:prstGeom prst="rect">
+            <a:avLst/>
+          </a:prstGeom>
+          <a:noFill/>
+          <a:ln/>
+        </p:spPr>
+        <p:txBody>
+          <a:bodyPr wrap="square" rtlCol="0" anchor="t"/>
+          <a:lstStyle/>
+          <a:p>
+            <a:pPr algn="ctr" indent="0" marL="0">
+              <a:lnSpc>
+                <a:spcPct val="100000"/>
+              </a:lnSpc>
+              <a:buNone/>
+            </a:pPr>
+            <a:r>
+              <a:rPr lang="en-US" sz="950" b="1" dirty="0">
+                <a:solidFill>
+                  <a:srgbClr val="E9EEF7"/>
+                </a:solidFill>
+                <a:latin typeface="Segoe UI" pitchFamily="34" charset="0"/>
+                <a:ea typeface="Segoe UI" pitchFamily="34" charset="-122"/>
+                <a:cs typeface="Segoe UI" pitchFamily="34" charset="-120"/>
+              </a:rPr>
+              <a:t>96</a:t>
+            </a:r>
+            <a:endParaRPr lang="en-US" sz="950" dirty="0"/>
+          </a:p>
+        </p:txBody>
+      </p:sp>
+      <p:sp>
+        <p:nvSpPr>
+          <p:cNvPr id="27" name="Text 25"/>
+          <p:cNvSpPr/>
+          <p:nvPr/>
+        </p:nvSpPr>
+        <p:spPr>
+          <a:xfrm>
+            <a:off x="5724144" y="5422392"/>
+            <a:ext cx="932688" cy="274320"/>
+          </a:xfrm>
+          <a:prstGeom prst="rect">
+            <a:avLst/>
+          </a:prstGeom>
+          <a:noFill/>
+          <a:ln/>
+        </p:spPr>
+        <p:txBody>
+          <a:bodyPr wrap="square" rtlCol="0" anchor="t"/>
+          <a:lstStyle/>
+          <a:p>
+            <a:pPr algn="ctr" indent="0" marL="0">
+              <a:lnSpc>
+                <a:spcPct val="100000"/>
+              </a:lnSpc>
+              <a:buNone/>
+            </a:pPr>
+            <a:r>
+              <a:rPr lang="en-US" sz="1000" dirty="0">
+                <a:solidFill>
+                  <a:srgbClr val="93A1BA"/>
+                </a:solidFill>
+                <a:latin typeface="Segoe UI" pitchFamily="34" charset="0"/>
+                <a:ea typeface="Segoe UI" pitchFamily="34" charset="-122"/>
+                <a:cs typeface="Segoe UI" pitchFamily="34" charset="-120"/>
+              </a:rPr>
+              <a:t>₹2000</a:t>
+            </a:r>
+            <a:endParaRPr lang="en-US" sz="1000" dirty="0"/>
+          </a:p>
+        </p:txBody>
+      </p:sp>
+      <p:sp>
+        <p:nvSpPr>
+          <p:cNvPr id="28" name="Shape 26"/>
+          <p:cNvSpPr/>
+          <p:nvPr/>
+        </p:nvSpPr>
+        <p:spPr>
+          <a:xfrm>
+            <a:off x="777240" y="5349240"/>
+            <a:ext cx="5916168" cy="0"/>
+          </a:xfrm>
+          <a:prstGeom prst="line">
+            <a:avLst/>
+          </a:prstGeom>
+          <a:noFill/>
+          <a:ln w="12700">
+            <a:solidFill>
+              <a:srgbClr val="24304A"/>
+            </a:solidFill>
+            <a:prstDash val="solid"/>
+            <a:headEnd type="none"/>
+            <a:tailEnd type="none"/>
+          </a:ln>
+        </p:spPr>
+      </p:sp>
+      <p:sp>
+        <p:nvSpPr>
+          <p:cNvPr id="29" name="Shape 27"/>
+          <p:cNvSpPr/>
+          <p:nvPr/>
+        </p:nvSpPr>
+        <p:spPr>
+          <a:xfrm>
+            <a:off x="7360920" y="1463040"/>
+            <a:ext cx="2057400" cy="1234440"/>
           </a:xfrm>
           <a:prstGeom prst="roundRect">
             <a:avLst>
@@ -7943,14 +8369,14 @@
       </p:sp>
       <p:sp>
         <p:nvSpPr>
-          <p:cNvPr id="10" name="Text 7"/>
-          <p:cNvSpPr/>
-          <p:nvPr/>
-        </p:nvSpPr>
-        <p:spPr>
-          <a:xfrm>
-            <a:off x="9601200" y="1609344"/>
-            <a:ext cx="2103120" cy="640080"/>
+          <p:cNvPr id="30" name="Text 28"/>
+          <p:cNvSpPr/>
+          <p:nvPr/>
+        </p:nvSpPr>
+        <p:spPr>
+          <a:xfrm>
+            <a:off x="7360920" y="1609344"/>
+            <a:ext cx="2057400" cy="640080"/>
           </a:xfrm>
           <a:prstGeom prst="rect">
             <a:avLst/>
@@ -7977,6 +8403,117 @@
                 <a:ea typeface="Segoe UI Semibold" pitchFamily="34" charset="-122"/>
                 <a:cs typeface="Segoe UI Semibold" pitchFamily="34" charset="-120"/>
               </a:rPr>
+              <a:t>100%</a:t>
+            </a:r>
+            <a:endParaRPr lang="en-US" sz="3000" dirty="0"/>
+          </a:p>
+        </p:txBody>
+      </p:sp>
+      <p:sp>
+        <p:nvSpPr>
+          <p:cNvPr id="31" name="Text 29"/>
+          <p:cNvSpPr/>
+          <p:nvPr/>
+        </p:nvSpPr>
+        <p:spPr>
+          <a:xfrm>
+            <a:off x="7360920" y="2304288"/>
+            <a:ext cx="2057400" cy="365760"/>
+          </a:xfrm>
+          <a:prstGeom prst="rect">
+            <a:avLst/>
+          </a:prstGeom>
+          <a:noFill/>
+          <a:ln/>
+        </p:spPr>
+        <p:txBody>
+          <a:bodyPr wrap="square" rtlCol="0" anchor="t"/>
+          <a:lstStyle/>
+          <a:p>
+            <a:pPr algn="ctr" indent="0" marL="0">
+              <a:lnSpc>
+                <a:spcPct val="100000"/>
+              </a:lnSpc>
+              <a:buNone/>
+            </a:pPr>
+            <a:r>
+              <a:rPr lang="en-US" sz="1000" dirty="0">
+                <a:solidFill>
+                  <a:srgbClr val="93A1BA"/>
+                </a:solidFill>
+                <a:latin typeface="Segoe UI" pitchFamily="34" charset="0"/>
+                <a:ea typeface="Segoe UI" pitchFamily="34" charset="-122"/>
+                <a:cs typeface="Segoe UI" pitchFamily="34" charset="-120"/>
+              </a:rPr>
+              <a:t>Genuine accepted</a:t>
+            </a:r>
+            <a:endParaRPr lang="en-US" sz="1000" dirty="0"/>
+          </a:p>
+        </p:txBody>
+      </p:sp>
+      <p:sp>
+        <p:nvSpPr>
+          <p:cNvPr id="32" name="Shape 30"/>
+          <p:cNvSpPr/>
+          <p:nvPr/>
+        </p:nvSpPr>
+        <p:spPr>
+          <a:xfrm>
+            <a:off x="9601200" y="1463040"/>
+            <a:ext cx="2103120" cy="1234440"/>
+          </a:xfrm>
+          <a:prstGeom prst="roundRect">
+            <a:avLst>
+              <a:gd name="adj" fmla="val 7407"/>
+            </a:avLst>
+          </a:prstGeom>
+          <a:solidFill>
+            <a:srgbClr val="141C2E"/>
+          </a:solidFill>
+          <a:ln w="12700">
+            <a:solidFill>
+              <a:srgbClr val="24304A"/>
+            </a:solidFill>
+            <a:prstDash val="solid"/>
+          </a:ln>
+        </p:spPr>
+      </p:sp>
+      <p:sp>
+        <p:nvSpPr>
+          <p:cNvPr id="33" name="Text 31"/>
+          <p:cNvSpPr/>
+          <p:nvPr/>
+        </p:nvSpPr>
+        <p:spPr>
+          <a:xfrm>
+            <a:off x="9601200" y="1609344"/>
+            <a:ext cx="2103120" cy="640080"/>
+          </a:xfrm>
+          <a:prstGeom prst="rect">
+            <a:avLst/>
+          </a:prstGeom>
+          <a:noFill/>
+          <a:ln/>
+        </p:spPr>
+        <p:txBody>
+          <a:bodyPr wrap="square" rtlCol="0" anchor="t"/>
+          <a:lstStyle/>
+          <a:p>
+            <a:pPr algn="ctr" indent="0" marL="0">
+              <a:lnSpc>
+                <a:spcPct val="100000"/>
+              </a:lnSpc>
+              <a:buNone/>
+            </a:pPr>
+            <a:r>
+              <a:rPr lang="en-US" sz="3000" b="1" dirty="0">
+                <a:solidFill>
+                  <a:srgbClr val="2ECC71"/>
+                </a:solidFill>
+                <a:latin typeface="Segoe UI Semibold" pitchFamily="34" charset="0"/>
+                <a:ea typeface="Segoe UI Semibold" pitchFamily="34" charset="-122"/>
+                <a:cs typeface="Segoe UI Semibold" pitchFamily="34" charset="-120"/>
+              </a:rPr>
               <a:t>0%</a:t>
             </a:r>
             <a:endParaRPr lang="en-US" sz="3000" dirty="0"/>
@@ -7985,7 +8522,7 @@
       </p:sp>
       <p:sp>
         <p:nvSpPr>
-          <p:cNvPr id="11" name="Text 8"/>
+          <p:cNvPr id="34" name="Text 32"/>
           <p:cNvSpPr/>
           <p:nvPr/>
         </p:nvSpPr>
@@ -8027,7 +8564,7 @@
       </p:sp>
       <p:sp>
         <p:nvSpPr>
-          <p:cNvPr id="12" name="Shape 9"/>
+          <p:cNvPr id="35" name="Shape 33"/>
           <p:cNvSpPr/>
           <p:nvPr/>
         </p:nvSpPr>
@@ -8054,7 +8591,7 @@
       </p:sp>
       <p:sp>
         <p:nvSpPr>
-          <p:cNvPr id="13" name="Text 10"/>
+          <p:cNvPr id="36" name="Text 34"/>
           <p:cNvSpPr/>
           <p:nvPr/>
         </p:nvSpPr>
@@ -8096,7 +8633,7 @@
       </p:sp>
       <p:sp>
         <p:nvSpPr>
-          <p:cNvPr id="14" name="Text 11"/>
+          <p:cNvPr id="37" name="Text 35"/>
           <p:cNvSpPr/>
           <p:nvPr/>
         </p:nvSpPr>
@@ -8158,7 +8695,7 @@
       </p:sp>
       <p:sp>
         <p:nvSpPr>
-          <p:cNvPr id="15" name="Text 12"/>
+          <p:cNvPr id="38" name="Text 36"/>
           <p:cNvSpPr/>
           <p:nvPr/>
         </p:nvSpPr>
@@ -8200,7 +8737,7 @@
       </p:sp>
       <p:sp>
         <p:nvSpPr>
-          <p:cNvPr id="16" name="Text 13"/>
+          <p:cNvPr id="39" name="Text 37"/>
           <p:cNvSpPr/>
           <p:nvPr/>
         </p:nvSpPr>
@@ -8242,7 +8779,7 @@
       </p:sp>
       <p:sp>
         <p:nvSpPr>
-          <p:cNvPr id="17" name="Text 14"/>
+          <p:cNvPr id="40" name="Text 38"/>
           <p:cNvSpPr/>
           <p:nvPr/>
         </p:nvSpPr>

--- a/docs/Prahari_Pitch_Deck.pptx
+++ b/docs/Prahari_Pitch_Deck.pptx
@@ -18642,27 +18642,27 @@
         </p:nvSpPr>
         <p:spPr>
           <a:xfrm>
-            <a:off x="6583680" y="3383280"/>
-            <a:ext cx="3061411" cy="256032"/>
-          </a:xfrm>
-          <a:prstGeom prst="rect">
-            <a:avLst/>
-          </a:prstGeom>
-          <a:noFill/>
-          <a:ln/>
-        </p:spPr>
-        <p:txBody>
-          <a:bodyPr wrap="square" rtlCol="0" anchor="t"/>
-          <a:lstStyle/>
-          <a:p>
-            <a:pPr algn="l" indent="0" marL="0">
-              <a:lnSpc>
-                <a:spcPct val="100000"/>
-              </a:lnSpc>
-              <a:buNone/>
-            </a:pPr>
-            <a:r>
-              <a:rPr lang="en-US" sz="1050" dirty="0">
+            <a:off x="6537960" y="3401568"/>
+            <a:ext cx="2689708" cy="256032"/>
+          </a:xfrm>
+          <a:prstGeom prst="rect">
+            <a:avLst/>
+          </a:prstGeom>
+          <a:noFill/>
+          <a:ln/>
+        </p:spPr>
+        <p:txBody>
+          <a:bodyPr wrap="square" rtlCol="0" anchor="t"/>
+          <a:lstStyle/>
+          <a:p>
+            <a:pPr algn="l" indent="0" marL="0">
+              <a:lnSpc>
+                <a:spcPct val="100000"/>
+              </a:lnSpc>
+              <a:buNone/>
+            </a:pPr>
+            <a:r>
+              <a:rPr lang="en-US" sz="1000" dirty="0">
                 <a:solidFill>
                   <a:srgbClr val="E9EEF7"/>
                 </a:solidFill>
@@ -18672,7 +18672,7 @@
               </a:rPr>
               <a:t>✓  Aspect ratio / dimensions</a:t>
             </a:r>
-            <a:endParaRPr lang="en-US" sz="1050" dirty="0"/>
+            <a:endParaRPr lang="en-US" sz="1000" dirty="0"/>
           </a:p>
         </p:txBody>
       </p:sp>
@@ -18684,12 +18684,12 @@
         </p:nvSpPr>
         <p:spPr>
           <a:xfrm>
-            <a:off x="9743846" y="3438144"/>
-            <a:ext cx="1481328" cy="128016"/>
+            <a:off x="9319108" y="3465576"/>
+            <a:ext cx="1370228" cy="118872"/>
           </a:xfrm>
           <a:prstGeom prst="roundRect">
             <a:avLst>
-              <a:gd name="adj" fmla="val 50000"/>
+              <a:gd name="adj" fmla="val 46154"/>
             </a:avLst>
           </a:prstGeom>
           <a:solidFill>
@@ -18706,12 +18706,12 @@
         </p:nvSpPr>
         <p:spPr>
           <a:xfrm>
-            <a:off x="9743846" y="3438144"/>
-            <a:ext cx="1155436" cy="128016"/>
+            <a:off x="9319108" y="3465576"/>
+            <a:ext cx="1068778" cy="118872"/>
           </a:xfrm>
           <a:prstGeom prst="roundRect">
             <a:avLst>
-              <a:gd name="adj" fmla="val 50000"/>
+              <a:gd name="adj" fmla="val 46154"/>
             </a:avLst>
           </a:prstGeom>
           <a:solidFill>
@@ -18728,8 +18728,8 @@
         </p:nvSpPr>
         <p:spPr>
           <a:xfrm>
-            <a:off x="11280038" y="3383280"/>
-            <a:ext cx="296266" cy="256032"/>
+            <a:off x="10780776" y="3401568"/>
+            <a:ext cx="566928" cy="256032"/>
           </a:xfrm>
           <a:prstGeom prst="rect">
             <a:avLst/>
@@ -18770,27 +18770,27 @@
         </p:nvSpPr>
         <p:spPr>
           <a:xfrm>
-            <a:off x="6583680" y="3721608"/>
-            <a:ext cx="3061411" cy="256032"/>
-          </a:xfrm>
-          <a:prstGeom prst="rect">
-            <a:avLst/>
-          </a:prstGeom>
-          <a:noFill/>
-          <a:ln/>
-        </p:spPr>
-        <p:txBody>
-          <a:bodyPr wrap="square" rtlCol="0" anchor="t"/>
-          <a:lstStyle/>
-          <a:p>
-            <a:pPr algn="l" indent="0" marL="0">
-              <a:lnSpc>
-                <a:spcPct val="100000"/>
-              </a:lnSpc>
-              <a:buNone/>
-            </a:pPr>
-            <a:r>
-              <a:rPr lang="en-US" sz="1050" dirty="0">
+            <a:off x="6537960" y="3739896"/>
+            <a:ext cx="2689708" cy="256032"/>
+          </a:xfrm>
+          <a:prstGeom prst="rect">
+            <a:avLst/>
+          </a:prstGeom>
+          <a:noFill/>
+          <a:ln/>
+        </p:spPr>
+        <p:txBody>
+          <a:bodyPr wrap="square" rtlCol="0" anchor="t"/>
+          <a:lstStyle/>
+          <a:p>
+            <a:pPr algn="l" indent="0" marL="0">
+              <a:lnSpc>
+                <a:spcPct val="100000"/>
+              </a:lnSpc>
+              <a:buNone/>
+            </a:pPr>
+            <a:r>
+              <a:rPr lang="en-US" sz="1000" dirty="0">
                 <a:solidFill>
                   <a:srgbClr val="E9EEF7"/>
                 </a:solidFill>
@@ -18800,7 +18800,7 @@
               </a:rPr>
               <a:t>✓  Base colour match</a:t>
             </a:r>
-            <a:endParaRPr lang="en-US" sz="1050" dirty="0"/>
+            <a:endParaRPr lang="en-US" sz="1000" dirty="0"/>
           </a:p>
         </p:txBody>
       </p:sp>
@@ -18812,12 +18812,12 @@
         </p:nvSpPr>
         <p:spPr>
           <a:xfrm>
-            <a:off x="9743846" y="3776472"/>
-            <a:ext cx="1481328" cy="128016"/>
+            <a:off x="9319108" y="3803904"/>
+            <a:ext cx="1370228" cy="118872"/>
           </a:xfrm>
           <a:prstGeom prst="roundRect">
             <a:avLst>
-              <a:gd name="adj" fmla="val 50000"/>
+              <a:gd name="adj" fmla="val 46154"/>
             </a:avLst>
           </a:prstGeom>
           <a:solidFill>
@@ -18834,12 +18834,12 @@
         </p:nvSpPr>
         <p:spPr>
           <a:xfrm>
-            <a:off x="9743846" y="3776472"/>
-            <a:ext cx="1318382" cy="128016"/>
+            <a:off x="9319108" y="3803904"/>
+            <a:ext cx="1219503" cy="118872"/>
           </a:xfrm>
           <a:prstGeom prst="roundRect">
             <a:avLst>
-              <a:gd name="adj" fmla="val 50000"/>
+              <a:gd name="adj" fmla="val 46154"/>
             </a:avLst>
           </a:prstGeom>
           <a:solidFill>
@@ -18856,8 +18856,8 @@
         </p:nvSpPr>
         <p:spPr>
           <a:xfrm>
-            <a:off x="11280038" y="3721608"/>
-            <a:ext cx="296266" cy="256032"/>
+            <a:off x="10780776" y="3739896"/>
+            <a:ext cx="566928" cy="256032"/>
           </a:xfrm>
           <a:prstGeom prst="rect">
             <a:avLst/>
@@ -18898,27 +18898,27 @@
         </p:nvSpPr>
         <p:spPr>
           <a:xfrm>
-            <a:off x="6583680" y="4059936"/>
-            <a:ext cx="3061411" cy="256032"/>
-          </a:xfrm>
-          <a:prstGeom prst="rect">
-            <a:avLst/>
-          </a:prstGeom>
-          <a:noFill/>
-          <a:ln/>
-        </p:spPr>
-        <p:txBody>
-          <a:bodyPr wrap="square" rtlCol="0" anchor="t"/>
-          <a:lstStyle/>
-          <a:p>
-            <a:pPr algn="l" indent="0" marL="0">
-              <a:lnSpc>
-                <a:spcPct val="100000"/>
-              </a:lnSpc>
-              <a:buNone/>
-            </a:pPr>
-            <a:r>
-              <a:rPr lang="en-US" sz="1050" dirty="0">
+            <a:off x="6537960" y="4078224"/>
+            <a:ext cx="2689708" cy="256032"/>
+          </a:xfrm>
+          <a:prstGeom prst="rect">
+            <a:avLst/>
+          </a:prstGeom>
+          <a:noFill/>
+          <a:ln/>
+        </p:spPr>
+        <p:txBody>
+          <a:bodyPr wrap="square" rtlCol="0" anchor="t"/>
+          <a:lstStyle/>
+          <a:p>
+            <a:pPr algn="l" indent="0" marL="0">
+              <a:lnSpc>
+                <a:spcPct val="100000"/>
+              </a:lnSpc>
+              <a:buNone/>
+            </a:pPr>
+            <a:r>
+              <a:rPr lang="en-US" sz="1000" dirty="0">
                 <a:solidFill>
                   <a:srgbClr val="E9EEF7"/>
                 </a:solidFill>
@@ -18928,7 +18928,7 @@
               </a:rPr>
               <a:t>✓  Microprint sharpness</a:t>
             </a:r>
-            <a:endParaRPr lang="en-US" sz="1050" dirty="0"/>
+            <a:endParaRPr lang="en-US" sz="1000" dirty="0"/>
           </a:p>
         </p:txBody>
       </p:sp>
@@ -18940,12 +18940,12 @@
         </p:nvSpPr>
         <p:spPr>
           <a:xfrm>
-            <a:off x="9743846" y="4114800"/>
-            <a:ext cx="1481328" cy="128016"/>
+            <a:off x="9319108" y="4142232"/>
+            <a:ext cx="1370228" cy="118872"/>
           </a:xfrm>
           <a:prstGeom prst="roundRect">
             <a:avLst>
-              <a:gd name="adj" fmla="val 50000"/>
+              <a:gd name="adj" fmla="val 46154"/>
             </a:avLst>
           </a:prstGeom>
           <a:solidFill>
@@ -18962,12 +18962,12 @@
         </p:nvSpPr>
         <p:spPr>
           <a:xfrm>
-            <a:off x="9743846" y="4114800"/>
-            <a:ext cx="1481328" cy="128016"/>
+            <a:off x="9319108" y="4142232"/>
+            <a:ext cx="1370228" cy="118872"/>
           </a:xfrm>
           <a:prstGeom prst="roundRect">
             <a:avLst>
-              <a:gd name="adj" fmla="val 50000"/>
+              <a:gd name="adj" fmla="val 46154"/>
             </a:avLst>
           </a:prstGeom>
           <a:solidFill>
@@ -18984,8 +18984,8 @@
         </p:nvSpPr>
         <p:spPr>
           <a:xfrm>
-            <a:off x="11280038" y="4059936"/>
-            <a:ext cx="296266" cy="256032"/>
+            <a:off x="10780776" y="4078224"/>
+            <a:ext cx="566928" cy="256032"/>
           </a:xfrm>
           <a:prstGeom prst="rect">
             <a:avLst/>
@@ -19026,27 +19026,27 @@
         </p:nvSpPr>
         <p:spPr>
           <a:xfrm>
-            <a:off x="6583680" y="4398264"/>
-            <a:ext cx="3061411" cy="256032"/>
-          </a:xfrm>
-          <a:prstGeom prst="rect">
-            <a:avLst/>
-          </a:prstGeom>
-          <a:noFill/>
-          <a:ln/>
-        </p:spPr>
-        <p:txBody>
-          <a:bodyPr wrap="square" rtlCol="0" anchor="t"/>
-          <a:lstStyle/>
-          <a:p>
-            <a:pPr algn="l" indent="0" marL="0">
-              <a:lnSpc>
-                <a:spcPct val="100000"/>
-              </a:lnSpc>
-              <a:buNone/>
-            </a:pPr>
-            <a:r>
-              <a:rPr lang="en-US" sz="1050" dirty="0">
+            <a:off x="6537960" y="4416552"/>
+            <a:ext cx="2689708" cy="256032"/>
+          </a:xfrm>
+          <a:prstGeom prst="rect">
+            <a:avLst/>
+          </a:prstGeom>
+          <a:noFill/>
+          <a:ln/>
+        </p:spPr>
+        <p:txBody>
+          <a:bodyPr wrap="square" rtlCol="0" anchor="t"/>
+          <a:lstStyle/>
+          <a:p>
+            <a:pPr algn="l" indent="0" marL="0">
+              <a:lnSpc>
+                <a:spcPct val="100000"/>
+              </a:lnSpc>
+              <a:buNone/>
+            </a:pPr>
+            <a:r>
+              <a:rPr lang="en-US" sz="1000" dirty="0">
                 <a:solidFill>
                   <a:srgbClr val="E9EEF7"/>
                 </a:solidFill>
@@ -19056,7 +19056,7 @@
               </a:rPr>
               <a:t>✓  Security thread signature</a:t>
             </a:r>
-            <a:endParaRPr lang="en-US" sz="1050" dirty="0"/>
+            <a:endParaRPr lang="en-US" sz="1000" dirty="0"/>
           </a:p>
         </p:txBody>
       </p:sp>
@@ -19068,12 +19068,12 @@
         </p:nvSpPr>
         <p:spPr>
           <a:xfrm>
-            <a:off x="9743846" y="4453128"/>
-            <a:ext cx="1481328" cy="128016"/>
+            <a:off x="9319108" y="4480560"/>
+            <a:ext cx="1370228" cy="118872"/>
           </a:xfrm>
           <a:prstGeom prst="roundRect">
             <a:avLst>
-              <a:gd name="adj" fmla="val 50000"/>
+              <a:gd name="adj" fmla="val 46154"/>
             </a:avLst>
           </a:prstGeom>
           <a:solidFill>
@@ -19090,12 +19090,12 @@
         </p:nvSpPr>
         <p:spPr>
           <a:xfrm>
-            <a:off x="9743846" y="4453128"/>
-            <a:ext cx="1481328" cy="128016"/>
+            <a:off x="9319108" y="4480560"/>
+            <a:ext cx="1315419" cy="118872"/>
           </a:xfrm>
           <a:prstGeom prst="roundRect">
             <a:avLst>
-              <a:gd name="adj" fmla="val 50000"/>
+              <a:gd name="adj" fmla="val 46154"/>
             </a:avLst>
           </a:prstGeom>
           <a:solidFill>
@@ -19112,8 +19112,8 @@
         </p:nvSpPr>
         <p:spPr>
           <a:xfrm>
-            <a:off x="11280038" y="4398264"/>
-            <a:ext cx="296266" cy="256032"/>
+            <a:off x="10780776" y="4416552"/>
+            <a:ext cx="566928" cy="256032"/>
           </a:xfrm>
           <a:prstGeom prst="rect">
             <a:avLst/>
@@ -19140,7 +19140,7 @@
                 <a:ea typeface="Segoe UI" pitchFamily="34" charset="-122"/>
                 <a:cs typeface="Segoe UI" pitchFamily="34" charset="-120"/>
               </a:rPr>
-              <a:t>100%</a:t>
+              <a:t>96%</a:t>
             </a:r>
             <a:endParaRPr lang="en-US" sz="950" dirty="0"/>
           </a:p>
@@ -19154,27 +19154,27 @@
         </p:nvSpPr>
         <p:spPr>
           <a:xfrm>
-            <a:off x="6583680" y="4736592"/>
-            <a:ext cx="3061411" cy="256032"/>
-          </a:xfrm>
-          <a:prstGeom prst="rect">
-            <a:avLst/>
-          </a:prstGeom>
-          <a:noFill/>
-          <a:ln/>
-        </p:spPr>
-        <p:txBody>
-          <a:bodyPr wrap="square" rtlCol="0" anchor="t"/>
-          <a:lstStyle/>
-          <a:p>
-            <a:pPr algn="l" indent="0" marL="0">
-              <a:lnSpc>
-                <a:spcPct val="100000"/>
-              </a:lnSpc>
-              <a:buNone/>
-            </a:pPr>
-            <a:r>
-              <a:rPr lang="en-US" sz="1050" dirty="0">
+            <a:off x="6537960" y="4754880"/>
+            <a:ext cx="2689708" cy="256032"/>
+          </a:xfrm>
+          <a:prstGeom prst="rect">
+            <a:avLst/>
+          </a:prstGeom>
+          <a:noFill/>
+          <a:ln/>
+        </p:spPr>
+        <p:txBody>
+          <a:bodyPr wrap="square" rtlCol="0" anchor="t"/>
+          <a:lstStyle/>
+          <a:p>
+            <a:pPr algn="l" indent="0" marL="0">
+              <a:lnSpc>
+                <a:spcPct val="100000"/>
+              </a:lnSpc>
+              <a:buNone/>
+            </a:pPr>
+            <a:r>
+              <a:rPr lang="en-US" sz="1000" dirty="0">
                 <a:solidFill>
                   <a:srgbClr val="E9EEF7"/>
                 </a:solidFill>
@@ -19184,7 +19184,7 @@
               </a:rPr>
               <a:t>✓  Intaglio print texture</a:t>
             </a:r>
-            <a:endParaRPr lang="en-US" sz="1050" dirty="0"/>
+            <a:endParaRPr lang="en-US" sz="1000" dirty="0"/>
           </a:p>
         </p:txBody>
       </p:sp>
@@ -19196,12 +19196,12 @@
         </p:nvSpPr>
         <p:spPr>
           <a:xfrm>
-            <a:off x="9743846" y="4791456"/>
-            <a:ext cx="1481328" cy="128016"/>
+            <a:off x="9319108" y="4818888"/>
+            <a:ext cx="1370228" cy="118872"/>
           </a:xfrm>
           <a:prstGeom prst="roundRect">
             <a:avLst>
-              <a:gd name="adj" fmla="val 50000"/>
+              <a:gd name="adj" fmla="val 46154"/>
             </a:avLst>
           </a:prstGeom>
           <a:solidFill>
@@ -19218,12 +19218,12 @@
         </p:nvSpPr>
         <p:spPr>
           <a:xfrm>
-            <a:off x="9743846" y="4791456"/>
-            <a:ext cx="1481328" cy="128016"/>
+            <a:off x="9319108" y="4818888"/>
+            <a:ext cx="1370228" cy="118872"/>
           </a:xfrm>
           <a:prstGeom prst="roundRect">
             <a:avLst>
-              <a:gd name="adj" fmla="val 50000"/>
+              <a:gd name="adj" fmla="val 46154"/>
             </a:avLst>
           </a:prstGeom>
           <a:solidFill>
@@ -19240,8 +19240,8 @@
         </p:nvSpPr>
         <p:spPr>
           <a:xfrm>
-            <a:off x="11280038" y="4736592"/>
-            <a:ext cx="296266" cy="256032"/>
+            <a:off x="10780776" y="4754880"/>
+            <a:ext cx="566928" cy="256032"/>
           </a:xfrm>
           <a:prstGeom prst="rect">
             <a:avLst/>
@@ -19282,27 +19282,27 @@
         </p:nvSpPr>
         <p:spPr>
           <a:xfrm>
-            <a:off x="6583680" y="5074920"/>
-            <a:ext cx="3061411" cy="256032"/>
-          </a:xfrm>
-          <a:prstGeom prst="rect">
-            <a:avLst/>
-          </a:prstGeom>
-          <a:noFill/>
-          <a:ln/>
-        </p:spPr>
-        <p:txBody>
-          <a:bodyPr wrap="square" rtlCol="0" anchor="t"/>
-          <a:lstStyle/>
-          <a:p>
-            <a:pPr algn="l" indent="0" marL="0">
-              <a:lnSpc>
-                <a:spcPct val="100000"/>
-              </a:lnSpc>
-              <a:buNone/>
-            </a:pPr>
-            <a:r>
-              <a:rPr lang="en-US" sz="1050" dirty="0">
+            <a:off x="6537960" y="5093208"/>
+            <a:ext cx="2689708" cy="256032"/>
+          </a:xfrm>
+          <a:prstGeom prst="rect">
+            <a:avLst/>
+          </a:prstGeom>
+          <a:noFill/>
+          <a:ln/>
+        </p:spPr>
+        <p:txBody>
+          <a:bodyPr wrap="square" rtlCol="0" anchor="t"/>
+          <a:lstStyle/>
+          <a:p>
+            <a:pPr algn="l" indent="0" marL="0">
+              <a:lnSpc>
+                <a:spcPct val="100000"/>
+              </a:lnSpc>
+              <a:buNone/>
+            </a:pPr>
+            <a:r>
+              <a:rPr lang="en-US" sz="1000" dirty="0">
                 <a:solidFill>
                   <a:srgbClr val="E9EEF7"/>
                 </a:solidFill>
@@ -19312,7 +19312,7 @@
               </a:rPr>
               <a:t>✓  RBI serial grammar</a:t>
             </a:r>
-            <a:endParaRPr lang="en-US" sz="1050" dirty="0"/>
+            <a:endParaRPr lang="en-US" sz="1000" dirty="0"/>
           </a:p>
         </p:txBody>
       </p:sp>
@@ -19324,12 +19324,12 @@
         </p:nvSpPr>
         <p:spPr>
           <a:xfrm>
-            <a:off x="9743846" y="5129784"/>
-            <a:ext cx="1481328" cy="128016"/>
+            <a:off x="9319108" y="5157216"/>
+            <a:ext cx="1370228" cy="118872"/>
           </a:xfrm>
           <a:prstGeom prst="roundRect">
             <a:avLst>
-              <a:gd name="adj" fmla="val 50000"/>
+              <a:gd name="adj" fmla="val 46154"/>
             </a:avLst>
           </a:prstGeom>
           <a:solidFill>
@@ -19346,12 +19346,12 @@
         </p:nvSpPr>
         <p:spPr>
           <a:xfrm>
-            <a:off x="9743846" y="5129784"/>
-            <a:ext cx="1481328" cy="128016"/>
+            <a:off x="9319108" y="5157216"/>
+            <a:ext cx="1370228" cy="118872"/>
           </a:xfrm>
           <a:prstGeom prst="roundRect">
             <a:avLst>
-              <a:gd name="adj" fmla="val 50000"/>
+              <a:gd name="adj" fmla="val 46154"/>
             </a:avLst>
           </a:prstGeom>
           <a:solidFill>
@@ -19368,8 +19368,8 @@
         </p:nvSpPr>
         <p:spPr>
           <a:xfrm>
-            <a:off x="11280038" y="5074920"/>
-            <a:ext cx="296266" cy="256032"/>
+            <a:off x="10780776" y="5093208"/>
+            <a:ext cx="566928" cy="256032"/>
           </a:xfrm>
           <a:prstGeom prst="rect">
             <a:avLst/>
@@ -19410,29 +19410,29 @@
         </p:nvSpPr>
         <p:spPr>
           <a:xfrm>
-            <a:off x="6583680" y="5413248"/>
-            <a:ext cx="3061411" cy="256032"/>
-          </a:xfrm>
-          <a:prstGeom prst="rect">
-            <a:avLst/>
-          </a:prstGeom>
-          <a:noFill/>
-          <a:ln/>
-        </p:spPr>
-        <p:txBody>
-          <a:bodyPr wrap="square" rtlCol="0" anchor="t"/>
-          <a:lstStyle/>
-          <a:p>
-            <a:pPr algn="l" indent="0" marL="0">
-              <a:lnSpc>
-                <a:spcPct val="100000"/>
-              </a:lnSpc>
-              <a:buNone/>
-            </a:pPr>
-            <a:r>
-              <a:rPr lang="en-US" sz="1050" dirty="0">
-                <a:solidFill>
-                  <a:srgbClr val="FF4D57"/>
+            <a:off x="6537960" y="5431536"/>
+            <a:ext cx="2689708" cy="256032"/>
+          </a:xfrm>
+          <a:prstGeom prst="rect">
+            <a:avLst/>
+          </a:prstGeom>
+          <a:noFill/>
+          <a:ln/>
+        </p:spPr>
+        <p:txBody>
+          <a:bodyPr wrap="square" rtlCol="0" anchor="t"/>
+          <a:lstStyle/>
+          <a:p>
+            <a:pPr algn="l" indent="0" marL="0">
+              <a:lnSpc>
+                <a:spcPct val="100000"/>
+              </a:lnSpc>
+              <a:buNone/>
+            </a:pPr>
+            <a:r>
+              <a:rPr lang="en-US" sz="1000" dirty="0">
+                <a:solidFill>
+                  <a:srgbClr val="F3B6BB"/>
                 </a:solidFill>
                 <a:latin typeface="Segoe UI" pitchFamily="34" charset="0"/>
                 <a:ea typeface="Segoe UI" pitchFamily="34" charset="-122"/>
@@ -19440,7 +19440,7 @@
               </a:rPr>
               <a:t>✗  Watermark window</a:t>
             </a:r>
-            <a:endParaRPr lang="en-US" sz="1050" dirty="0"/>
+            <a:endParaRPr lang="en-US" sz="1000" dirty="0"/>
           </a:p>
         </p:txBody>
       </p:sp>
@@ -19452,12 +19452,12 @@
         </p:nvSpPr>
         <p:spPr>
           <a:xfrm>
-            <a:off x="9743846" y="5468112"/>
-            <a:ext cx="1481328" cy="128016"/>
+            <a:off x="9319108" y="5495544"/>
+            <a:ext cx="1370228" cy="118872"/>
           </a:xfrm>
           <a:prstGeom prst="roundRect">
             <a:avLst>
-              <a:gd name="adj" fmla="val 50000"/>
+              <a:gd name="adj" fmla="val 46154"/>
             </a:avLst>
           </a:prstGeom>
           <a:solidFill>
@@ -19474,12 +19474,12 @@
         </p:nvSpPr>
         <p:spPr>
           <a:xfrm>
-            <a:off x="9743846" y="5468112"/>
-            <a:ext cx="1259129" cy="128016"/>
+            <a:off x="9319108" y="5495544"/>
+            <a:ext cx="575496" cy="118872"/>
           </a:xfrm>
           <a:prstGeom prst="roundRect">
             <a:avLst>
-              <a:gd name="adj" fmla="val 50000"/>
+              <a:gd name="adj" fmla="val 46154"/>
             </a:avLst>
           </a:prstGeom>
           <a:solidFill>
@@ -19496,8 +19496,8 @@
         </p:nvSpPr>
         <p:spPr>
           <a:xfrm>
-            <a:off x="11280038" y="5413248"/>
-            <a:ext cx="296266" cy="256032"/>
+            <a:off x="10780776" y="5431536"/>
+            <a:ext cx="566928" cy="256032"/>
           </a:xfrm>
           <a:prstGeom prst="rect">
             <a:avLst/>
@@ -19524,7 +19524,7 @@
                 <a:ea typeface="Segoe UI" pitchFamily="34" charset="-122"/>
                 <a:cs typeface="Segoe UI" pitchFamily="34" charset="-120"/>
               </a:rPr>
-              <a:t>85%</a:t>
+              <a:t>42%</a:t>
             </a:r>
             <a:endParaRPr lang="en-US" sz="950" dirty="0"/>
           </a:p>
@@ -19538,27 +19538,27 @@
         </p:nvSpPr>
         <p:spPr>
           <a:xfrm>
-            <a:off x="6583680" y="5751576"/>
-            <a:ext cx="3061411" cy="256032"/>
-          </a:xfrm>
-          <a:prstGeom prst="rect">
-            <a:avLst/>
-          </a:prstGeom>
-          <a:noFill/>
-          <a:ln/>
-        </p:spPr>
-        <p:txBody>
-          <a:bodyPr wrap="square" rtlCol="0" anchor="t"/>
-          <a:lstStyle/>
-          <a:p>
-            <a:pPr algn="l" indent="0" marL="0">
-              <a:lnSpc>
-                <a:spcPct val="100000"/>
-              </a:lnSpc>
-              <a:buNone/>
-            </a:pPr>
-            <a:r>
-              <a:rPr lang="en-US" sz="1050" dirty="0">
+            <a:off x="6537960" y="5769864"/>
+            <a:ext cx="2689708" cy="256032"/>
+          </a:xfrm>
+          <a:prstGeom prst="rect">
+            <a:avLst/>
+          </a:prstGeom>
+          <a:noFill/>
+          <a:ln/>
+        </p:spPr>
+        <p:txBody>
+          <a:bodyPr wrap="square" rtlCol="0" anchor="t"/>
+          <a:lstStyle/>
+          <a:p>
+            <a:pPr algn="l" indent="0" marL="0">
+              <a:lnSpc>
+                <a:spcPct val="100000"/>
+              </a:lnSpc>
+              <a:buNone/>
+            </a:pPr>
+            <a:r>
+              <a:rPr lang="en-US" sz="1000" dirty="0">
                 <a:solidFill>
                   <a:srgbClr val="E9EEF7"/>
                 </a:solidFill>
@@ -19568,7 +19568,7 @@
               </a:rPr>
               <a:t>✓  Colour-shift ink numeral</a:t>
             </a:r>
-            <a:endParaRPr lang="en-US" sz="1050" dirty="0"/>
+            <a:endParaRPr lang="en-US" sz="1000" dirty="0"/>
           </a:p>
         </p:txBody>
       </p:sp>
@@ -19580,12 +19580,12 @@
         </p:nvSpPr>
         <p:spPr>
           <a:xfrm>
-            <a:off x="9743846" y="5806440"/>
-            <a:ext cx="1481328" cy="128016"/>
+            <a:off x="9319108" y="5833872"/>
+            <a:ext cx="1370228" cy="118872"/>
           </a:xfrm>
           <a:prstGeom prst="roundRect">
             <a:avLst>
-              <a:gd name="adj" fmla="val 50000"/>
+              <a:gd name="adj" fmla="val 46154"/>
             </a:avLst>
           </a:prstGeom>
           <a:solidFill>
@@ -19602,12 +19602,12 @@
         </p:nvSpPr>
         <p:spPr>
           <a:xfrm>
-            <a:off x="9743846" y="5806440"/>
-            <a:ext cx="1481328" cy="128016"/>
+            <a:off x="9319108" y="5833872"/>
+            <a:ext cx="1370228" cy="118872"/>
           </a:xfrm>
           <a:prstGeom prst="roundRect">
             <a:avLst>
-              <a:gd name="adj" fmla="val 50000"/>
+              <a:gd name="adj" fmla="val 46154"/>
             </a:avLst>
           </a:prstGeom>
           <a:solidFill>
@@ -19624,8 +19624,8 @@
         </p:nvSpPr>
         <p:spPr>
           <a:xfrm>
-            <a:off x="11280038" y="5751576"/>
-            <a:ext cx="296266" cy="256032"/>
+            <a:off x="10780776" y="5769864"/>
+            <a:ext cx="566928" cy="256032"/>
           </a:xfrm>
           <a:prstGeom prst="rect">
             <a:avLst/>
